--- a/docs/apresentacao.pptx
+++ b/docs/apresentacao.pptx
@@ -1,26 +1,26 @@
 
 <file path=ppt/presentation.xml><?xml version="1.0" encoding="utf-8"?>
-<p:presentation xmlns:a="http://schemas.openxmlformats.org/drawingml/2006/main" xmlns:r="http://schemas.openxmlformats.org/officeDocument/2006/relationships" xmlns:p="http://schemas.openxmlformats.org/presentationml/2006/main" saveSubsetFonts="1" autoCompressPictures="0">
+<p:presentation xmlns:a="http://schemas.openxmlformats.org/drawingml/2006/main" xmlns:r="http://schemas.openxmlformats.org/officeDocument/2006/relationships" xmlns:p="http://schemas.openxmlformats.org/presentationml/2006/main" autoCompressPictures="0">
   <p:sldMasterIdLst>
     <p:sldMasterId id="2147483648" r:id="rId1"/>
   </p:sldMasterIdLst>
+  <p:notesMasterIdLst>
+    <p:notesMasterId r:id="rId4"/>
+  </p:notesMasterIdLst>
   <p:sldIdLst>
-    <p:sldId id="256" r:id="rId2"/>
-    <p:sldId id="257" r:id="rId3"/>
-    <p:sldId id="258" r:id="rId4"/>
-    <p:sldId id="259" r:id="rId5"/>
-    <p:sldId id="260" r:id="rId6"/>
-    <p:sldId id="261" r:id="rId7"/>
-    <p:sldId id="262" r:id="rId8"/>
-    <p:sldId id="263" r:id="rId9"/>
-    <p:sldId id="264" r:id="rId10"/>
-    <p:sldId id="265" r:id="rId11"/>
-    <p:sldId id="266" r:id="rId12"/>
-    <p:sldId id="267" r:id="rId13"/>
+    <p:sldId id="256" r:id="rId3"/>
+    <p:sldId id="257" r:id="rId5"/>
+    <p:sldId id="258" r:id="rId6"/>
+    <p:sldId id="259" r:id="rId7"/>
+    <p:sldId id="260" r:id="rId8"/>
+    <p:sldId id="261" r:id="rId9"/>
+    <p:sldId id="262" r:id="rId10"/>
+    <p:sldId id="263" r:id="rId11"/>
+    <p:sldId id="264" r:id="rId12"/>
+    <p:sldId id="265" r:id="rId13"/>
+    <p:sldId id="266" r:id="rId14"/>
+    <p:sldId id="267" r:id="rId15"/>
   </p:sldIdLst>
-  <p:notesMasterIdLst>
-    <p:notesMasterId r:id="rId14"/>
-  </p:notesMasterIdLst>
   <p:sldSz cx="12192000" cy="6858000"/>
   <p:notesSz cx="6858000" cy="12192000"/>
   <p:defaultTextStyle>
@@ -115,6 +115,22 @@
       </a:defRPr>
     </a:lvl9pPr>
   </p:defaultTextStyle>
+  <p:extLst>
+    <p:ext uri="{EFAFB233-063F-42B5-8137-9DF3F51BA10A}">
+      <p15:sldGuideLst xmlns:p15="http://schemas.microsoft.com/office/powerpoint/2012/main">
+        <p15:guide id="1" orient="horz" pos="2154" userDrawn="1">
+          <p15:clr>
+            <a:srgbClr val="A4A3A4"/>
+          </p15:clr>
+        </p15:guide>
+        <p15:guide id="2" pos="3830" userDrawn="1">
+          <p15:clr>
+            <a:srgbClr val="A4A3A4"/>
+          </p15:clr>
+        </p15:guide>
+      </p15:sldGuideLst>
+    </p:ext>
+  </p:extLst>
 </p:presentation>
 </file>
 
@@ -200,7 +216,6 @@
           <a:p>
             <a:fld id="{5282F153-3F37-0F45-9E97-73ACFA13230C}" type="datetimeFigureOut">
               <a:rPr lang="en-US"/>
-              <a:t>7/23/19</a:t>
             </a:fld>
             <a:endParaRPr lang="en-US"/>
           </a:p>
@@ -267,6 +282,7 @@
               <a:rPr lang="en-US"/>
               <a:t>Click to edit Master text styles</a:t>
             </a:r>
+            <a:endParaRPr lang="en-US"/>
           </a:p>
           <a:p>
             <a:pPr lvl="1"/>
@@ -274,6 +290,7 @@
               <a:rPr lang="en-US"/>
               <a:t>Second level</a:t>
             </a:r>
+            <a:endParaRPr lang="en-US"/>
           </a:p>
           <a:p>
             <a:pPr lvl="2"/>
@@ -281,6 +298,7 @@
               <a:rPr lang="en-US"/>
               <a:t>Third level</a:t>
             </a:r>
+            <a:endParaRPr lang="en-US"/>
           </a:p>
           <a:p>
             <a:pPr lvl="3"/>
@@ -288,6 +306,7 @@
               <a:rPr lang="en-US"/>
               <a:t>Fourth level</a:t>
             </a:r>
+            <a:endParaRPr lang="en-US"/>
           </a:p>
           <a:p>
             <a:pPr lvl="4"/>
@@ -295,6 +314,7 @@
               <a:rPr lang="en-US"/>
               <a:t>Fifth level</a:t>
             </a:r>
+            <a:endParaRPr lang="en-US"/>
           </a:p>
         </p:txBody>
       </p:sp>
@@ -358,18 +378,12 @@
           <a:p>
             <a:fld id="{CE5E9CC1-C706-0F49-92D6-E571CC5EEA8F}" type="slidenum">
               <a:rPr lang="en-US"/>
-              <a:t>‹#›</a:t>
             </a:fld>
             <a:endParaRPr lang="en-US"/>
           </a:p>
         </p:txBody>
       </p:sp>
     </p:spTree>
-    <p:extLst>
-      <p:ext uri="{BB962C8B-B14F-4D97-AF65-F5344CB8AC3E}">
-        <p14:creationId xmlns:p14="http://schemas.microsoft.com/office/powerpoint/2010/main" val="1024086991"/>
-      </p:ext>
-    </p:extLst>
   </p:cSld>
   <p:clrMap bg1="lt1" tx1="dk1" bg2="lt2" tx2="dk2" accent1="accent1" accent2="accent2" accent3="accent3" accent4="accent4" accent5="accent5" accent6="accent6" hlink="hlink" folHlink="folHlink"/>
   <p:notesStyle>
@@ -536,18 +550,12 @@
           <a:p>
             <a:fld id="{F7021451-1387-4CA6-816F-3879F97B5CBC}" type="slidenum">
               <a:rPr lang="en-US"/>
-              <a:t>1</a:t>
             </a:fld>
             <a:endParaRPr lang="en-US"/>
           </a:p>
         </p:txBody>
       </p:sp>
     </p:spTree>
-    <p:extLst>
-      <p:ext uri="{BB962C8B-B14F-4D97-AF65-F5344CB8AC3E}">
-        <p14:creationId xmlns:p14="http://schemas.microsoft.com/office/powerpoint/2010/main" val="1024086991"/>
-      </p:ext>
-    </p:extLst>
   </p:cSld>
   <p:clrMapOvr>
     <a:masterClrMapping/>
@@ -624,18 +632,12 @@
           <a:p>
             <a:fld id="{F7021451-1387-4CA6-816F-3879F97B5CBC}" type="slidenum">
               <a:rPr lang="en-US"/>
-              <a:t>10</a:t>
             </a:fld>
             <a:endParaRPr lang="en-US"/>
           </a:p>
         </p:txBody>
       </p:sp>
     </p:spTree>
-    <p:extLst>
-      <p:ext uri="{BB962C8B-B14F-4D97-AF65-F5344CB8AC3E}">
-        <p14:creationId xmlns:p14="http://schemas.microsoft.com/office/powerpoint/2010/main" val="1024086991"/>
-      </p:ext>
-    </p:extLst>
   </p:cSld>
   <p:clrMapOvr>
     <a:masterClrMapping/>
@@ -712,18 +714,12 @@
           <a:p>
             <a:fld id="{F7021451-1387-4CA6-816F-3879F97B5CBC}" type="slidenum">
               <a:rPr lang="en-US"/>
-              <a:t>11</a:t>
             </a:fld>
             <a:endParaRPr lang="en-US"/>
           </a:p>
         </p:txBody>
       </p:sp>
     </p:spTree>
-    <p:extLst>
-      <p:ext uri="{BB962C8B-B14F-4D97-AF65-F5344CB8AC3E}">
-        <p14:creationId xmlns:p14="http://schemas.microsoft.com/office/powerpoint/2010/main" val="1024086991"/>
-      </p:ext>
-    </p:extLst>
   </p:cSld>
   <p:clrMapOvr>
     <a:masterClrMapping/>
@@ -800,18 +796,12 @@
           <a:p>
             <a:fld id="{F7021451-1387-4CA6-816F-3879F97B5CBC}" type="slidenum">
               <a:rPr lang="en-US"/>
-              <a:t>12</a:t>
             </a:fld>
             <a:endParaRPr lang="en-US"/>
           </a:p>
         </p:txBody>
       </p:sp>
     </p:spTree>
-    <p:extLst>
-      <p:ext uri="{BB962C8B-B14F-4D97-AF65-F5344CB8AC3E}">
-        <p14:creationId xmlns:p14="http://schemas.microsoft.com/office/powerpoint/2010/main" val="1024086991"/>
-      </p:ext>
-    </p:extLst>
   </p:cSld>
   <p:clrMapOvr>
     <a:masterClrMapping/>
@@ -888,18 +878,12 @@
           <a:p>
             <a:fld id="{F7021451-1387-4CA6-816F-3879F97B5CBC}" type="slidenum">
               <a:rPr lang="en-US"/>
-              <a:t>2</a:t>
             </a:fld>
             <a:endParaRPr lang="en-US"/>
           </a:p>
         </p:txBody>
       </p:sp>
     </p:spTree>
-    <p:extLst>
-      <p:ext uri="{BB962C8B-B14F-4D97-AF65-F5344CB8AC3E}">
-        <p14:creationId xmlns:p14="http://schemas.microsoft.com/office/powerpoint/2010/main" val="1024086991"/>
-      </p:ext>
-    </p:extLst>
   </p:cSld>
   <p:clrMapOvr>
     <a:masterClrMapping/>
@@ -976,18 +960,12 @@
           <a:p>
             <a:fld id="{F7021451-1387-4CA6-816F-3879F97B5CBC}" type="slidenum">
               <a:rPr lang="en-US"/>
-              <a:t>3</a:t>
             </a:fld>
             <a:endParaRPr lang="en-US"/>
           </a:p>
         </p:txBody>
       </p:sp>
     </p:spTree>
-    <p:extLst>
-      <p:ext uri="{BB962C8B-B14F-4D97-AF65-F5344CB8AC3E}">
-        <p14:creationId xmlns:p14="http://schemas.microsoft.com/office/powerpoint/2010/main" val="1024086991"/>
-      </p:ext>
-    </p:extLst>
   </p:cSld>
   <p:clrMapOvr>
     <a:masterClrMapping/>
@@ -1064,18 +1042,12 @@
           <a:p>
             <a:fld id="{F7021451-1387-4CA6-816F-3879F97B5CBC}" type="slidenum">
               <a:rPr lang="en-US"/>
-              <a:t>4</a:t>
             </a:fld>
             <a:endParaRPr lang="en-US"/>
           </a:p>
         </p:txBody>
       </p:sp>
     </p:spTree>
-    <p:extLst>
-      <p:ext uri="{BB962C8B-B14F-4D97-AF65-F5344CB8AC3E}">
-        <p14:creationId xmlns:p14="http://schemas.microsoft.com/office/powerpoint/2010/main" val="1024086991"/>
-      </p:ext>
-    </p:extLst>
   </p:cSld>
   <p:clrMapOvr>
     <a:masterClrMapping/>
@@ -1152,18 +1124,12 @@
           <a:p>
             <a:fld id="{F7021451-1387-4CA6-816F-3879F97B5CBC}" type="slidenum">
               <a:rPr lang="en-US"/>
-              <a:t>5</a:t>
             </a:fld>
             <a:endParaRPr lang="en-US"/>
           </a:p>
         </p:txBody>
       </p:sp>
     </p:spTree>
-    <p:extLst>
-      <p:ext uri="{BB962C8B-B14F-4D97-AF65-F5344CB8AC3E}">
-        <p14:creationId xmlns:p14="http://schemas.microsoft.com/office/powerpoint/2010/main" val="1024086991"/>
-      </p:ext>
-    </p:extLst>
   </p:cSld>
   <p:clrMapOvr>
     <a:masterClrMapping/>
@@ -1240,18 +1206,12 @@
           <a:p>
             <a:fld id="{F7021451-1387-4CA6-816F-3879F97B5CBC}" type="slidenum">
               <a:rPr lang="en-US"/>
-              <a:t>6</a:t>
             </a:fld>
             <a:endParaRPr lang="en-US"/>
           </a:p>
         </p:txBody>
       </p:sp>
     </p:spTree>
-    <p:extLst>
-      <p:ext uri="{BB962C8B-B14F-4D97-AF65-F5344CB8AC3E}">
-        <p14:creationId xmlns:p14="http://schemas.microsoft.com/office/powerpoint/2010/main" val="1024086991"/>
-      </p:ext>
-    </p:extLst>
   </p:cSld>
   <p:clrMapOvr>
     <a:masterClrMapping/>
@@ -1328,18 +1288,12 @@
           <a:p>
             <a:fld id="{F7021451-1387-4CA6-816F-3879F97B5CBC}" type="slidenum">
               <a:rPr lang="en-US"/>
-              <a:t>7</a:t>
             </a:fld>
             <a:endParaRPr lang="en-US"/>
           </a:p>
         </p:txBody>
       </p:sp>
     </p:spTree>
-    <p:extLst>
-      <p:ext uri="{BB962C8B-B14F-4D97-AF65-F5344CB8AC3E}">
-        <p14:creationId xmlns:p14="http://schemas.microsoft.com/office/powerpoint/2010/main" val="1024086991"/>
-      </p:ext>
-    </p:extLst>
   </p:cSld>
   <p:clrMapOvr>
     <a:masterClrMapping/>
@@ -1416,18 +1370,12 @@
           <a:p>
             <a:fld id="{F7021451-1387-4CA6-816F-3879F97B5CBC}" type="slidenum">
               <a:rPr lang="en-US"/>
-              <a:t>8</a:t>
             </a:fld>
             <a:endParaRPr lang="en-US"/>
           </a:p>
         </p:txBody>
       </p:sp>
     </p:spTree>
-    <p:extLst>
-      <p:ext uri="{BB962C8B-B14F-4D97-AF65-F5344CB8AC3E}">
-        <p14:creationId xmlns:p14="http://schemas.microsoft.com/office/powerpoint/2010/main" val="1024086991"/>
-      </p:ext>
-    </p:extLst>
   </p:cSld>
   <p:clrMapOvr>
     <a:masterClrMapping/>
@@ -1504,18 +1452,12 @@
           <a:p>
             <a:fld id="{F7021451-1387-4CA6-816F-3879F97B5CBC}" type="slidenum">
               <a:rPr lang="en-US"/>
-              <a:t>9</a:t>
             </a:fld>
             <a:endParaRPr lang="en-US"/>
           </a:p>
         </p:txBody>
       </p:sp>
     </p:spTree>
-    <p:extLst>
-      <p:ext uri="{BB962C8B-B14F-4D97-AF65-F5344CB8AC3E}">
-        <p14:creationId xmlns:p14="http://schemas.microsoft.com/office/powerpoint/2010/main" val="1024086991"/>
-      </p:ext>
-    </p:extLst>
   </p:cSld>
   <p:clrMapOvr>
     <a:masterClrMapping/>
@@ -1556,6 +1498,11 @@
 <file path=ppt/slideMasters/slideMaster1.xml><?xml version="1.0" encoding="utf-8"?>
 <p:sldMaster xmlns:a="http://schemas.openxmlformats.org/drawingml/2006/main" xmlns:r="http://schemas.openxmlformats.org/officeDocument/2006/relationships" xmlns:p="http://schemas.openxmlformats.org/presentationml/2006/main">
   <p:cSld>
+    <p:bg>
+      <p:bgRef idx="1001">
+        <a:schemeClr val="bg1"/>
+      </p:bgRef>
+    </p:bg>
     <p:spTree>
       <p:nvGrpSpPr>
         <p:cNvPr id="1" name=""/>
@@ -1599,7 +1546,7 @@
         <a:spcBef>
           <a:spcPct val="20000"/>
         </a:spcBef>
-        <a:buFont typeface="Arial" pitchFamily="34" charset="0"/>
+        <a:buFont typeface="Arial" panose="020B0604020202020204" pitchFamily="34" charset="0"/>
         <a:buChar char="•"/>
         <a:defRPr sz="3200" kern="1200">
           <a:solidFill>
@@ -1614,7 +1561,7 @@
         <a:spcBef>
           <a:spcPct val="20000"/>
         </a:spcBef>
-        <a:buFont typeface="Arial" pitchFamily="34" charset="0"/>
+        <a:buFont typeface="Arial" panose="020B0604020202020204" pitchFamily="34" charset="0"/>
         <a:buChar char="–"/>
         <a:defRPr sz="2800" kern="1200">
           <a:solidFill>
@@ -1629,7 +1576,7 @@
         <a:spcBef>
           <a:spcPct val="20000"/>
         </a:spcBef>
-        <a:buFont typeface="Arial" pitchFamily="34" charset="0"/>
+        <a:buFont typeface="Arial" panose="020B0604020202020204" pitchFamily="34" charset="0"/>
         <a:buChar char="•"/>
         <a:defRPr sz="2400" kern="1200">
           <a:solidFill>
@@ -1644,7 +1591,7 @@
         <a:spcBef>
           <a:spcPct val="20000"/>
         </a:spcBef>
-        <a:buFont typeface="Arial" pitchFamily="34" charset="0"/>
+        <a:buFont typeface="Arial" panose="020B0604020202020204" pitchFamily="34" charset="0"/>
         <a:buChar char="–"/>
         <a:defRPr sz="2000" kern="1200">
           <a:solidFill>
@@ -1659,7 +1606,7 @@
         <a:spcBef>
           <a:spcPct val="20000"/>
         </a:spcBef>
-        <a:buFont typeface="Arial" pitchFamily="34" charset="0"/>
+        <a:buFont typeface="Arial" panose="020B0604020202020204" pitchFamily="34" charset="0"/>
         <a:buChar char="»"/>
         <a:defRPr sz="2000" kern="1200">
           <a:solidFill>
@@ -1674,7 +1621,7 @@
         <a:spcBef>
           <a:spcPct val="20000"/>
         </a:spcBef>
-        <a:buFont typeface="Arial" pitchFamily="34" charset="0"/>
+        <a:buFont typeface="Arial" panose="020B0604020202020204" pitchFamily="34" charset="0"/>
         <a:buChar char="•"/>
         <a:defRPr sz="2000" kern="1200">
           <a:solidFill>
@@ -1689,7 +1636,7 @@
         <a:spcBef>
           <a:spcPct val="20000"/>
         </a:spcBef>
-        <a:buFont typeface="Arial" pitchFamily="34" charset="0"/>
+        <a:buFont typeface="Arial" panose="020B0604020202020204" pitchFamily="34" charset="0"/>
         <a:buChar char="•"/>
         <a:defRPr sz="2000" kern="1200">
           <a:solidFill>
@@ -1704,7 +1651,7 @@
         <a:spcBef>
           <a:spcPct val="20000"/>
         </a:spcBef>
-        <a:buFont typeface="Arial" pitchFamily="34" charset="0"/>
+        <a:buFont typeface="Arial" panose="020B0604020202020204" pitchFamily="34" charset="0"/>
         <a:buChar char="•"/>
         <a:defRPr sz="2000" kern="1200">
           <a:solidFill>
@@ -1719,7 +1666,7 @@
         <a:spcBef>
           <a:spcPct val="20000"/>
         </a:spcBef>
-        <a:buFont typeface="Arial" pitchFamily="34" charset="0"/>
+        <a:buFont typeface="Arial" panose="020B0604020202020204" pitchFamily="34" charset="0"/>
         <a:buChar char="•"/>
         <a:defRPr sz="2000" kern="1200">
           <a:solidFill>
@@ -1832,12 +1779,13 @@
 
 <file path=ppt/slides/slide1.xml><?xml version="1.0" encoding="utf-8"?>
 <p:sld xmlns:a="http://schemas.openxmlformats.org/drawingml/2006/main" xmlns:r="http://schemas.openxmlformats.org/officeDocument/2006/relationships" xmlns:p="http://schemas.openxmlformats.org/presentationml/2006/main">
-  <p:cSld name="Slide 1">
+  <p:cSld>
     <p:bg>
       <p:bgPr>
         <a:solidFill>
           <a:srgbClr val="0E2A33"/>
         </a:solidFill>
+        <a:effectLst/>
       </p:bgPr>
     </p:bg>
     <p:spTree>
@@ -1869,23 +1817,22 @@
             <a:avLst/>
           </a:prstGeom>
           <a:noFill/>
-          <a:ln/>
-        </p:spPr>
-        <p:txBody>
-          <a:bodyPr wrap="square" lIns="0" tIns="0" rIns="0" bIns="0" rtlCol="0" anchor="ctr"/>
-          <a:lstStyle/>
-          <a:p>
-            <a:pPr indent="0" marL="0">
-              <a:buNone/>
-            </a:pPr>
-            <a:r>
-              <a:rPr lang="en-US" sz="1300" b="1" spc="200" kern="0" dirty="0">
+        </p:spPr>
+        <p:txBody>
+          <a:bodyPr wrap="square" lIns="0" tIns="0" rIns="0" bIns="0" rtlCol="0" anchor="ctr"/>
+          <a:lstStyle/>
+          <a:p>
+            <a:pPr marL="0" indent="0">
+              <a:buNone/>
+            </a:pPr>
+            <a:r>
+              <a:rPr lang="en-US" sz="1300" b="1" kern="0" spc="200" dirty="0">
                 <a:solidFill>
                   <a:srgbClr val="02C39A"/>
                 </a:solidFill>
-                <a:latin typeface="Calibri" pitchFamily="34" charset="0"/>
-                <a:ea typeface="Calibri" pitchFamily="34" charset="-122"/>
-                <a:cs typeface="Calibri" pitchFamily="34" charset="-120"/>
+                <a:latin typeface="Calibri" panose="020F0502020204030204" pitchFamily="34" charset="0"/>
+                <a:ea typeface="Calibri" panose="020F0502020204030204" pitchFamily="34" charset="-122"/>
+                <a:cs typeface="Calibri" panose="020F0502020204030204" pitchFamily="34" charset="-120"/>
               </a:rPr>
               <a:t>CERTIFICAÇÃO DATA ENGINEER · INDICIUM</a:t>
             </a:r>
@@ -1908,13 +1855,12 @@
             <a:avLst/>
           </a:prstGeom>
           <a:noFill/>
-          <a:ln/>
-        </p:spPr>
-        <p:txBody>
-          <a:bodyPr wrap="square" lIns="0" tIns="0" rIns="0" bIns="0" rtlCol="0" anchor="ctr"/>
-          <a:lstStyle/>
-          <a:p>
-            <a:pPr indent="0" marL="0">
+        </p:spPr>
+        <p:txBody>
+          <a:bodyPr wrap="square" lIns="0" tIns="0" rIns="0" bIns="0" rtlCol="0" anchor="ctr"/>
+          <a:lstStyle/>
+          <a:p>
+            <a:pPr marL="0" indent="0">
               <a:buNone/>
             </a:pPr>
             <a:r>
@@ -1922,9 +1868,9 @@
                 <a:solidFill>
                   <a:srgbClr val="FFFFFF"/>
                 </a:solidFill>
-                <a:latin typeface="Cambria" pitchFamily="34" charset="0"/>
-                <a:ea typeface="Cambria" pitchFamily="34" charset="-122"/>
-                <a:cs typeface="Cambria" pitchFamily="34" charset="-120"/>
+                <a:latin typeface="Cambria" panose="02040503050406030204" pitchFamily="34" charset="0"/>
+                <a:ea typeface="Cambria" panose="02040503050406030204" pitchFamily="34" charset="-122"/>
+                <a:cs typeface="Cambria" panose="02040503050406030204" pitchFamily="34" charset="-120"/>
               </a:rPr>
               <a:t>BanVic</a:t>
             </a:r>
@@ -1947,13 +1893,12 @@
             <a:avLst/>
           </a:prstGeom>
           <a:noFill/>
-          <a:ln/>
-        </p:spPr>
-        <p:txBody>
-          <a:bodyPr wrap="square" lIns="0" tIns="0" rIns="0" bIns="0" rtlCol="0" anchor="ctr"/>
-          <a:lstStyle/>
-          <a:p>
-            <a:pPr indent="0" marL="0">
+        </p:spPr>
+        <p:txBody>
+          <a:bodyPr wrap="square" lIns="0" tIns="0" rIns="0" bIns="0" rtlCol="0" anchor="ctr"/>
+          <a:lstStyle/>
+          <a:p>
+            <a:pPr marL="0" indent="0">
               <a:buNone/>
             </a:pPr>
             <a:r>
@@ -1961,9 +1906,9 @@
                 <a:solidFill>
                   <a:srgbClr val="9FC9CE"/>
                 </a:solidFill>
-                <a:latin typeface="Cambria" pitchFamily="34" charset="0"/>
-                <a:ea typeface="Cambria" pitchFamily="34" charset="-122"/>
-                <a:cs typeface="Cambria" pitchFamily="34" charset="-120"/>
+                <a:latin typeface="Cambria" panose="02040503050406030204" pitchFamily="34" charset="0"/>
+                <a:ea typeface="Cambria" panose="02040503050406030204" pitchFamily="34" charset="-122"/>
+                <a:cs typeface="Cambria" panose="02040503050406030204" pitchFamily="34" charset="-120"/>
               </a:rPr>
               <a:t>Plataforma de ingestão de dados</a:t>
             </a:r>
@@ -1986,13 +1931,12 @@
             <a:avLst/>
           </a:prstGeom>
           <a:noFill/>
-          <a:ln/>
-        </p:spPr>
-        <p:txBody>
-          <a:bodyPr wrap="square" lIns="0" tIns="0" rIns="0" bIns="0" rtlCol="0" anchor="ctr"/>
-          <a:lstStyle/>
-          <a:p>
-            <a:pPr indent="0" marL="0">
+        </p:spPr>
+        <p:txBody>
+          <a:bodyPr wrap="square" lIns="0" tIns="0" rIns="0" bIns="0" rtlCol="0" anchor="ctr"/>
+          <a:lstStyle/>
+          <a:p>
+            <a:pPr marL="0" indent="0">
               <a:buNone/>
             </a:pPr>
             <a:r>
@@ -2000,9 +1944,9 @@
                 <a:solidFill>
                   <a:srgbClr val="7FA9AF"/>
                 </a:solidFill>
-                <a:latin typeface="Calibri" pitchFamily="34" charset="0"/>
-                <a:ea typeface="Calibri" pitchFamily="34" charset="-122"/>
-                <a:cs typeface="Calibri" pitchFamily="34" charset="-120"/>
+                <a:latin typeface="Calibri" panose="020F0502020204030204" pitchFamily="34" charset="0"/>
+                <a:ea typeface="Calibri" panose="020F0502020204030204" pitchFamily="34" charset="-122"/>
+                <a:cs typeface="Calibri" panose="020F0502020204030204" pitchFamily="34" charset="-120"/>
               </a:rPr>
               <a:t>Infraestrutura como código, pipeline ELT e orquestração para tirar o banco das planilhas</a:t>
             </a:r>
@@ -2025,13 +1969,12 @@
             <a:avLst/>
           </a:prstGeom>
           <a:noFill/>
-          <a:ln/>
-        </p:spPr>
-        <p:txBody>
-          <a:bodyPr wrap="square" lIns="0" tIns="0" rIns="0" bIns="0" rtlCol="0" anchor="ctr"/>
-          <a:lstStyle/>
-          <a:p>
-            <a:pPr indent="0" marL="0">
+        </p:spPr>
+        <p:txBody>
+          <a:bodyPr wrap="square" lIns="0" tIns="0" rIns="0" bIns="0" rtlCol="0" anchor="ctr"/>
+          <a:lstStyle/>
+          <a:p>
+            <a:pPr marL="0" indent="0">
               <a:buNone/>
             </a:pPr>
             <a:r>
@@ -2039,9 +1982,9 @@
                 <a:solidFill>
                   <a:srgbClr val="7FA9AF"/>
                 </a:solidFill>
-                <a:latin typeface="Calibri" pitchFamily="34" charset="0"/>
-                <a:ea typeface="Calibri" pitchFamily="34" charset="-122"/>
-                <a:cs typeface="Calibri" pitchFamily="34" charset="-120"/>
+                <a:latin typeface="Calibri" panose="020F0502020204030204" pitchFamily="34" charset="0"/>
+                <a:ea typeface="Calibri" panose="020F0502020204030204" pitchFamily="34" charset="-122"/>
+                <a:cs typeface="Calibri" panose="020F0502020204030204" pitchFamily="34" charset="-120"/>
               </a:rPr>
               <a:t>David Couto</a:t>
             </a:r>
@@ -2059,12 +2002,13 @@
 
 <file path=ppt/slides/slide10.xml><?xml version="1.0" encoding="utf-8"?>
 <p:sld xmlns:a="http://schemas.openxmlformats.org/drawingml/2006/main" xmlns:r="http://schemas.openxmlformats.org/officeDocument/2006/relationships" xmlns:p="http://schemas.openxmlformats.org/presentationml/2006/main">
-  <p:cSld name="Slide 10">
+  <p:cSld>
     <p:bg>
       <p:bgPr>
         <a:solidFill>
           <a:srgbClr val="FFFFFF"/>
         </a:solidFill>
+        <a:effectLst/>
       </p:bgPr>
     </p:bg>
     <p:spTree>
@@ -2096,13 +2040,12 @@
             <a:avLst/>
           </a:prstGeom>
           <a:noFill/>
-          <a:ln/>
-        </p:spPr>
-        <p:txBody>
-          <a:bodyPr wrap="square" lIns="0" tIns="0" rIns="0" bIns="0" rtlCol="0" anchor="ctr"/>
-          <a:lstStyle/>
-          <a:p>
-            <a:pPr indent="0" marL="0">
+        </p:spPr>
+        <p:txBody>
+          <a:bodyPr wrap="square" lIns="0" tIns="0" rIns="0" bIns="0" rtlCol="0" anchor="ctr"/>
+          <a:lstStyle/>
+          <a:p>
+            <a:pPr marL="0" indent="0">
               <a:buNone/>
             </a:pPr>
             <a:r>
@@ -2110,9 +2053,9 @@
                 <a:solidFill>
                   <a:srgbClr val="0E2A33"/>
                 </a:solidFill>
-                <a:latin typeface="Cambria" pitchFamily="34" charset="0"/>
-                <a:ea typeface="Cambria" pitchFamily="34" charset="-122"/>
-                <a:cs typeface="Cambria" pitchFamily="34" charset="-120"/>
+                <a:latin typeface="Cambria" panose="02040503050406030204" pitchFamily="34" charset="0"/>
+                <a:ea typeface="Cambria" panose="02040503050406030204" pitchFamily="34" charset="-122"/>
+                <a:cs typeface="Cambria" panose="02040503050406030204" pitchFamily="34" charset="-120"/>
               </a:rPr>
               <a:t>Resultado</a:t>
             </a:r>
@@ -2135,13 +2078,12 @@
             <a:avLst/>
           </a:prstGeom>
           <a:noFill/>
-          <a:ln/>
         </p:spPr>
         <p:txBody>
           <a:bodyPr wrap="square" lIns="0" tIns="0" rIns="0" bIns="0" rtlCol="0" anchor="t"/>
           <a:lstStyle/>
           <a:p>
-            <a:pPr indent="0" marL="0">
+            <a:pPr marL="0" indent="0">
               <a:buNone/>
             </a:pPr>
             <a:r>
@@ -2149,9 +2091,9 @@
                 <a:solidFill>
                   <a:srgbClr val="5F7278"/>
                 </a:solidFill>
-                <a:latin typeface="Calibri" pitchFamily="34" charset="0"/>
-                <a:ea typeface="Calibri" pitchFamily="34" charset="-122"/>
-                <a:cs typeface="Calibri" pitchFamily="34" charset="-120"/>
+                <a:latin typeface="Calibri" panose="020F0502020204030204" pitchFamily="34" charset="0"/>
+                <a:ea typeface="Calibri" panose="020F0502020204030204" pitchFamily="34" charset="-122"/>
+                <a:cs typeface="Calibri" panose="020F0502020204030204" pitchFamily="34" charset="-120"/>
               </a:rPr>
               <a:t>Sete tabelas do ERP em duas camadas, com contagem conferida a cada execução.</a:t>
             </a:r>
@@ -2201,13 +2143,12 @@
             <a:avLst/>
           </a:prstGeom>
           <a:noFill/>
-          <a:ln/>
-        </p:spPr>
-        <p:txBody>
-          <a:bodyPr wrap="square" lIns="0" tIns="0" rIns="0" bIns="0" rtlCol="0" anchor="ctr"/>
-          <a:lstStyle/>
-          <a:p>
-            <a:pPr indent="0" marL="0">
+        </p:spPr>
+        <p:txBody>
+          <a:bodyPr wrap="square" lIns="0" tIns="0" rIns="0" bIns="0" rtlCol="0" anchor="ctr"/>
+          <a:lstStyle/>
+          <a:p>
+            <a:pPr marL="0" indent="0">
               <a:buNone/>
             </a:pPr>
             <a:r>
@@ -2215,9 +2156,9 @@
                 <a:solidFill>
                   <a:srgbClr val="02C39A"/>
                 </a:solidFill>
-                <a:latin typeface="Cambria" pitchFamily="34" charset="0"/>
-                <a:ea typeface="Cambria" pitchFamily="34" charset="-122"/>
-                <a:cs typeface="Cambria" pitchFamily="34" charset="-120"/>
+                <a:latin typeface="Cambria" panose="02040503050406030204" pitchFamily="34" charset="0"/>
+                <a:ea typeface="Cambria" panose="02040503050406030204" pitchFamily="34" charset="-122"/>
+                <a:cs typeface="Cambria" panose="02040503050406030204" pitchFamily="34" charset="-120"/>
               </a:rPr>
               <a:t>76.206</a:t>
             </a:r>
@@ -2240,13 +2181,12 @@
             <a:avLst/>
           </a:prstGeom>
           <a:noFill/>
-          <a:ln/>
-        </p:spPr>
-        <p:txBody>
-          <a:bodyPr wrap="square" lIns="0" tIns="0" rIns="0" bIns="0" rtlCol="0" anchor="ctr"/>
-          <a:lstStyle/>
-          <a:p>
-            <a:pPr indent="0" marL="0">
+        </p:spPr>
+        <p:txBody>
+          <a:bodyPr wrap="square" lIns="0" tIns="0" rIns="0" bIns="0" rtlCol="0" anchor="ctr"/>
+          <a:lstStyle/>
+          <a:p>
+            <a:pPr marL="0" indent="0">
               <a:buNone/>
             </a:pPr>
             <a:r>
@@ -2254,9 +2194,9 @@
                 <a:solidFill>
                   <a:srgbClr val="FFFFFF"/>
                 </a:solidFill>
-                <a:latin typeface="Calibri" pitchFamily="34" charset="0"/>
-                <a:ea typeface="Calibri" pitchFamily="34" charset="-122"/>
-                <a:cs typeface="Calibri" pitchFamily="34" charset="-120"/>
+                <a:latin typeface="Calibri" panose="020F0502020204030204" pitchFamily="34" charset="0"/>
+                <a:ea typeface="Calibri" panose="020F0502020204030204" pitchFamily="34" charset="-122"/>
+                <a:cs typeface="Calibri" panose="020F0502020204030204" pitchFamily="34" charset="-120"/>
               </a:rPr>
               <a:t>registros carregados</a:t>
             </a:r>
@@ -2279,13 +2219,12 @@
             <a:avLst/>
           </a:prstGeom>
           <a:noFill/>
-          <a:ln/>
-        </p:spPr>
-        <p:txBody>
-          <a:bodyPr wrap="square" lIns="0" tIns="0" rIns="0" bIns="0" rtlCol="0" anchor="ctr"/>
-          <a:lstStyle/>
-          <a:p>
-            <a:pPr indent="0" marL="0">
+        </p:spPr>
+        <p:txBody>
+          <a:bodyPr wrap="square" lIns="0" tIns="0" rIns="0" bIns="0" rtlCol="0" anchor="ctr"/>
+          <a:lstStyle/>
+          <a:p>
+            <a:pPr marL="0" indent="0">
               <a:buNone/>
             </a:pPr>
             <a:r>
@@ -2293,16 +2232,16 @@
                 <a:solidFill>
                   <a:srgbClr val="9FC9CE"/>
                 </a:solidFill>
-                <a:latin typeface="Calibri" pitchFamily="34" charset="0"/>
-                <a:ea typeface="Calibri" pitchFamily="34" charset="-122"/>
-                <a:cs typeface="Calibri" pitchFamily="34" charset="-120"/>
+                <a:latin typeface="Calibri" panose="020F0502020204030204" pitchFamily="34" charset="0"/>
+                <a:ea typeface="Calibri" panose="020F0502020204030204" pitchFamily="34" charset="-122"/>
+                <a:cs typeface="Calibri" panose="020F0502020204030204" pitchFamily="34" charset="-120"/>
               </a:rPr>
               <a:t>7 tabelas · 2 camadas</a:t>
             </a:r>
             <a:endParaRPr lang="en-US" sz="1300" dirty="0"/>
           </a:p>
           <a:p>
-            <a:pPr indent="0" marL="0">
+            <a:pPr marL="0" indent="0">
               <a:buNone/>
             </a:pPr>
             <a:r>
@@ -2310,9 +2249,9 @@
                 <a:solidFill>
                   <a:srgbClr val="9FC9CE"/>
                 </a:solidFill>
-                <a:latin typeface="Calibri" pitchFamily="34" charset="0"/>
-                <a:ea typeface="Calibri" pitchFamily="34" charset="-122"/>
-                <a:cs typeface="Calibri" pitchFamily="34" charset="-120"/>
+                <a:latin typeface="Calibri" panose="020F0502020204030204" pitchFamily="34" charset="0"/>
+                <a:ea typeface="Calibri" panose="020F0502020204030204" pitchFamily="34" charset="-122"/>
+                <a:cs typeface="Calibri" panose="020F0502020204030204" pitchFamily="34" charset="-120"/>
               </a:rPr>
               <a:t>3 execuções com resultado idêntico</a:t>
             </a:r>
@@ -2362,13 +2301,12 @@
             <a:avLst/>
           </a:prstGeom>
           <a:noFill/>
-          <a:ln/>
-        </p:spPr>
-        <p:txBody>
-          <a:bodyPr wrap="square" lIns="0" tIns="0" rIns="0" bIns="0" rtlCol="0" anchor="ctr"/>
-          <a:lstStyle/>
-          <a:p>
-            <a:pPr indent="0" marL="0">
+        </p:spPr>
+        <p:txBody>
+          <a:bodyPr wrap="square" lIns="0" tIns="0" rIns="0" bIns="0" rtlCol="0" anchor="ctr"/>
+          <a:lstStyle/>
+          <a:p>
+            <a:pPr marL="0" indent="0">
               <a:buNone/>
             </a:pPr>
             <a:r>
@@ -2376,9 +2314,9 @@
                 <a:solidFill>
                   <a:srgbClr val="0E2A33"/>
                 </a:solidFill>
-                <a:latin typeface="Courier New" pitchFamily="34" charset="0"/>
-                <a:ea typeface="Courier New" pitchFamily="34" charset="-122"/>
-                <a:cs typeface="Courier New" pitchFamily="34" charset="-120"/>
+                <a:latin typeface="Courier New" panose="02070309020205020404" pitchFamily="34" charset="0"/>
+                <a:ea typeface="Courier New" panose="02070309020205020404" pitchFamily="34" charset="-122"/>
+                <a:cs typeface="Courier New" panose="02070309020205020404" pitchFamily="34" charset="-120"/>
               </a:rPr>
               <a:t>agencias</a:t>
             </a:r>
@@ -2401,13 +2339,12 @@
             <a:avLst/>
           </a:prstGeom>
           <a:noFill/>
-          <a:ln/>
-        </p:spPr>
-        <p:txBody>
-          <a:bodyPr wrap="square" lIns="0" tIns="0" rIns="0" bIns="0" rtlCol="0" anchor="ctr"/>
-          <a:lstStyle/>
-          <a:p>
-            <a:pPr algn="r" indent="0" marL="0">
+        </p:spPr>
+        <p:txBody>
+          <a:bodyPr wrap="square" lIns="0" tIns="0" rIns="0" bIns="0" rtlCol="0" anchor="ctr"/>
+          <a:lstStyle/>
+          <a:p>
+            <a:pPr marL="0" indent="0" algn="r">
               <a:buNone/>
             </a:pPr>
             <a:r>
@@ -2415,9 +2352,9 @@
                 <a:solidFill>
                   <a:srgbClr val="028090"/>
                 </a:solidFill>
-                <a:latin typeface="Calibri" pitchFamily="34" charset="0"/>
-                <a:ea typeface="Calibri" pitchFamily="34" charset="-122"/>
-                <a:cs typeface="Calibri" pitchFamily="34" charset="-120"/>
+                <a:latin typeface="Calibri" panose="020F0502020204030204" pitchFamily="34" charset="0"/>
+                <a:ea typeface="Calibri" panose="020F0502020204030204" pitchFamily="34" charset="-122"/>
+                <a:cs typeface="Calibri" panose="020F0502020204030204" pitchFamily="34" charset="-120"/>
               </a:rPr>
               <a:t>10</a:t>
             </a:r>
@@ -2440,13 +2377,12 @@
             <a:avLst/>
           </a:prstGeom>
           <a:noFill/>
-          <a:ln/>
-        </p:spPr>
-        <p:txBody>
-          <a:bodyPr wrap="square" lIns="0" tIns="0" rIns="0" bIns="0" rtlCol="0" anchor="ctr"/>
-          <a:lstStyle/>
-          <a:p>
-            <a:pPr indent="0" marL="0">
+        </p:spPr>
+        <p:txBody>
+          <a:bodyPr wrap="square" lIns="0" tIns="0" rIns="0" bIns="0" rtlCol="0" anchor="ctr"/>
+          <a:lstStyle/>
+          <a:p>
+            <a:pPr marL="0" indent="0">
               <a:buNone/>
             </a:pPr>
             <a:r>
@@ -2454,9 +2390,9 @@
                 <a:solidFill>
                   <a:srgbClr val="0E2A33"/>
                 </a:solidFill>
-                <a:latin typeface="Courier New" pitchFamily="34" charset="0"/>
-                <a:ea typeface="Courier New" pitchFamily="34" charset="-122"/>
-                <a:cs typeface="Courier New" pitchFamily="34" charset="-120"/>
+                <a:latin typeface="Courier New" panose="02070309020205020404" pitchFamily="34" charset="0"/>
+                <a:ea typeface="Courier New" panose="02070309020205020404" pitchFamily="34" charset="-122"/>
+                <a:cs typeface="Courier New" panose="02070309020205020404" pitchFamily="34" charset="-120"/>
               </a:rPr>
               <a:t>clientes</a:t>
             </a:r>
@@ -2479,13 +2415,12 @@
             <a:avLst/>
           </a:prstGeom>
           <a:noFill/>
-          <a:ln/>
-        </p:spPr>
-        <p:txBody>
-          <a:bodyPr wrap="square" lIns="0" tIns="0" rIns="0" bIns="0" rtlCol="0" anchor="ctr"/>
-          <a:lstStyle/>
-          <a:p>
-            <a:pPr algn="r" indent="0" marL="0">
+        </p:spPr>
+        <p:txBody>
+          <a:bodyPr wrap="square" lIns="0" tIns="0" rIns="0" bIns="0" rtlCol="0" anchor="ctr"/>
+          <a:lstStyle/>
+          <a:p>
+            <a:pPr marL="0" indent="0" algn="r">
               <a:buNone/>
             </a:pPr>
             <a:r>
@@ -2493,9 +2428,9 @@
                 <a:solidFill>
                   <a:srgbClr val="028090"/>
                 </a:solidFill>
-                <a:latin typeface="Calibri" pitchFamily="34" charset="0"/>
-                <a:ea typeface="Calibri" pitchFamily="34" charset="-122"/>
-                <a:cs typeface="Calibri" pitchFamily="34" charset="-120"/>
+                <a:latin typeface="Calibri" panose="020F0502020204030204" pitchFamily="34" charset="0"/>
+                <a:ea typeface="Calibri" panose="020F0502020204030204" pitchFamily="34" charset="-122"/>
+                <a:cs typeface="Calibri" panose="020F0502020204030204" pitchFamily="34" charset="-120"/>
               </a:rPr>
               <a:t>998</a:t>
             </a:r>
@@ -2545,13 +2480,12 @@
             <a:avLst/>
           </a:prstGeom>
           <a:noFill/>
-          <a:ln/>
-        </p:spPr>
-        <p:txBody>
-          <a:bodyPr wrap="square" lIns="0" tIns="0" rIns="0" bIns="0" rtlCol="0" anchor="ctr"/>
-          <a:lstStyle/>
-          <a:p>
-            <a:pPr indent="0" marL="0">
+        </p:spPr>
+        <p:txBody>
+          <a:bodyPr wrap="square" lIns="0" tIns="0" rIns="0" bIns="0" rtlCol="0" anchor="ctr"/>
+          <a:lstStyle/>
+          <a:p>
+            <a:pPr marL="0" indent="0">
               <a:buNone/>
             </a:pPr>
             <a:r>
@@ -2559,9 +2493,9 @@
                 <a:solidFill>
                   <a:srgbClr val="0E2A33"/>
                 </a:solidFill>
-                <a:latin typeface="Courier New" pitchFamily="34" charset="0"/>
-                <a:ea typeface="Courier New" pitchFamily="34" charset="-122"/>
-                <a:cs typeface="Courier New" pitchFamily="34" charset="-120"/>
+                <a:latin typeface="Courier New" panose="02070309020205020404" pitchFamily="34" charset="0"/>
+                <a:ea typeface="Courier New" panose="02070309020205020404" pitchFamily="34" charset="-122"/>
+                <a:cs typeface="Courier New" panose="02070309020205020404" pitchFamily="34" charset="-120"/>
               </a:rPr>
               <a:t>colaboradores</a:t>
             </a:r>
@@ -2584,13 +2518,12 @@
             <a:avLst/>
           </a:prstGeom>
           <a:noFill/>
-          <a:ln/>
-        </p:spPr>
-        <p:txBody>
-          <a:bodyPr wrap="square" lIns="0" tIns="0" rIns="0" bIns="0" rtlCol="0" anchor="ctr"/>
-          <a:lstStyle/>
-          <a:p>
-            <a:pPr algn="r" indent="0" marL="0">
+        </p:spPr>
+        <p:txBody>
+          <a:bodyPr wrap="square" lIns="0" tIns="0" rIns="0" bIns="0" rtlCol="0" anchor="ctr"/>
+          <a:lstStyle/>
+          <a:p>
+            <a:pPr marL="0" indent="0" algn="r">
               <a:buNone/>
             </a:pPr>
             <a:r>
@@ -2598,9 +2531,9 @@
                 <a:solidFill>
                   <a:srgbClr val="028090"/>
                 </a:solidFill>
-                <a:latin typeface="Calibri" pitchFamily="34" charset="0"/>
-                <a:ea typeface="Calibri" pitchFamily="34" charset="-122"/>
-                <a:cs typeface="Calibri" pitchFamily="34" charset="-120"/>
+                <a:latin typeface="Calibri" panose="020F0502020204030204" pitchFamily="34" charset="0"/>
+                <a:ea typeface="Calibri" panose="020F0502020204030204" pitchFamily="34" charset="-122"/>
+                <a:cs typeface="Calibri" panose="020F0502020204030204" pitchFamily="34" charset="-120"/>
               </a:rPr>
               <a:t>100</a:t>
             </a:r>
@@ -2623,13 +2556,12 @@
             <a:avLst/>
           </a:prstGeom>
           <a:noFill/>
-          <a:ln/>
-        </p:spPr>
-        <p:txBody>
-          <a:bodyPr wrap="square" lIns="0" tIns="0" rIns="0" bIns="0" rtlCol="0" anchor="ctr"/>
-          <a:lstStyle/>
-          <a:p>
-            <a:pPr indent="0" marL="0">
+        </p:spPr>
+        <p:txBody>
+          <a:bodyPr wrap="square" lIns="0" tIns="0" rIns="0" bIns="0" rtlCol="0" anchor="ctr"/>
+          <a:lstStyle/>
+          <a:p>
+            <a:pPr marL="0" indent="0">
               <a:buNone/>
             </a:pPr>
             <a:r>
@@ -2637,9 +2569,9 @@
                 <a:solidFill>
                   <a:srgbClr val="0E2A33"/>
                 </a:solidFill>
-                <a:latin typeface="Courier New" pitchFamily="34" charset="0"/>
-                <a:ea typeface="Courier New" pitchFamily="34" charset="-122"/>
-                <a:cs typeface="Courier New" pitchFamily="34" charset="-120"/>
+                <a:latin typeface="Courier New" panose="02070309020205020404" pitchFamily="34" charset="0"/>
+                <a:ea typeface="Courier New" panose="02070309020205020404" pitchFamily="34" charset="-122"/>
+                <a:cs typeface="Courier New" panose="02070309020205020404" pitchFamily="34" charset="-120"/>
               </a:rPr>
               <a:t>colaborador_agencia</a:t>
             </a:r>
@@ -2662,13 +2594,12 @@
             <a:avLst/>
           </a:prstGeom>
           <a:noFill/>
-          <a:ln/>
-        </p:spPr>
-        <p:txBody>
-          <a:bodyPr wrap="square" lIns="0" tIns="0" rIns="0" bIns="0" rtlCol="0" anchor="ctr"/>
-          <a:lstStyle/>
-          <a:p>
-            <a:pPr algn="r" indent="0" marL="0">
+        </p:spPr>
+        <p:txBody>
+          <a:bodyPr wrap="square" lIns="0" tIns="0" rIns="0" bIns="0" rtlCol="0" anchor="ctr"/>
+          <a:lstStyle/>
+          <a:p>
+            <a:pPr marL="0" indent="0" algn="r">
               <a:buNone/>
             </a:pPr>
             <a:r>
@@ -2676,9 +2607,9 @@
                 <a:solidFill>
                   <a:srgbClr val="028090"/>
                 </a:solidFill>
-                <a:latin typeface="Calibri" pitchFamily="34" charset="0"/>
-                <a:ea typeface="Calibri" pitchFamily="34" charset="-122"/>
-                <a:cs typeface="Calibri" pitchFamily="34" charset="-120"/>
+                <a:latin typeface="Calibri" panose="020F0502020204030204" pitchFamily="34" charset="0"/>
+                <a:ea typeface="Calibri" panose="020F0502020204030204" pitchFamily="34" charset="-122"/>
+                <a:cs typeface="Calibri" panose="020F0502020204030204" pitchFamily="34" charset="-120"/>
               </a:rPr>
               <a:t>100</a:t>
             </a:r>
@@ -2728,13 +2659,12 @@
             <a:avLst/>
           </a:prstGeom>
           <a:noFill/>
-          <a:ln/>
-        </p:spPr>
-        <p:txBody>
-          <a:bodyPr wrap="square" lIns="0" tIns="0" rIns="0" bIns="0" rtlCol="0" anchor="ctr"/>
-          <a:lstStyle/>
-          <a:p>
-            <a:pPr indent="0" marL="0">
+        </p:spPr>
+        <p:txBody>
+          <a:bodyPr wrap="square" lIns="0" tIns="0" rIns="0" bIns="0" rtlCol="0" anchor="ctr"/>
+          <a:lstStyle/>
+          <a:p>
+            <a:pPr marL="0" indent="0">
               <a:buNone/>
             </a:pPr>
             <a:r>
@@ -2742,9 +2672,9 @@
                 <a:solidFill>
                   <a:srgbClr val="0E2A33"/>
                 </a:solidFill>
-                <a:latin typeface="Courier New" pitchFamily="34" charset="0"/>
-                <a:ea typeface="Courier New" pitchFamily="34" charset="-122"/>
-                <a:cs typeface="Courier New" pitchFamily="34" charset="-120"/>
+                <a:latin typeface="Courier New" panose="02070309020205020404" pitchFamily="34" charset="0"/>
+                <a:ea typeface="Courier New" panose="02070309020205020404" pitchFamily="34" charset="-122"/>
+                <a:cs typeface="Courier New" panose="02070309020205020404" pitchFamily="34" charset="-120"/>
               </a:rPr>
               <a:t>contas</a:t>
             </a:r>
@@ -2767,13 +2697,12 @@
             <a:avLst/>
           </a:prstGeom>
           <a:noFill/>
-          <a:ln/>
-        </p:spPr>
-        <p:txBody>
-          <a:bodyPr wrap="square" lIns="0" tIns="0" rIns="0" bIns="0" rtlCol="0" anchor="ctr"/>
-          <a:lstStyle/>
-          <a:p>
-            <a:pPr algn="r" indent="0" marL="0">
+        </p:spPr>
+        <p:txBody>
+          <a:bodyPr wrap="square" lIns="0" tIns="0" rIns="0" bIns="0" rtlCol="0" anchor="ctr"/>
+          <a:lstStyle/>
+          <a:p>
+            <a:pPr marL="0" indent="0" algn="r">
               <a:buNone/>
             </a:pPr>
             <a:r>
@@ -2781,9 +2710,9 @@
                 <a:solidFill>
                   <a:srgbClr val="028090"/>
                 </a:solidFill>
-                <a:latin typeface="Calibri" pitchFamily="34" charset="0"/>
-                <a:ea typeface="Calibri" pitchFamily="34" charset="-122"/>
-                <a:cs typeface="Calibri" pitchFamily="34" charset="-120"/>
+                <a:latin typeface="Calibri" panose="020F0502020204030204" pitchFamily="34" charset="0"/>
+                <a:ea typeface="Calibri" panose="020F0502020204030204" pitchFamily="34" charset="-122"/>
+                <a:cs typeface="Calibri" panose="020F0502020204030204" pitchFamily="34" charset="-120"/>
               </a:rPr>
               <a:t>999</a:t>
             </a:r>
@@ -2806,13 +2735,12 @@
             <a:avLst/>
           </a:prstGeom>
           <a:noFill/>
-          <a:ln/>
-        </p:spPr>
-        <p:txBody>
-          <a:bodyPr wrap="square" lIns="0" tIns="0" rIns="0" bIns="0" rtlCol="0" anchor="ctr"/>
-          <a:lstStyle/>
-          <a:p>
-            <a:pPr indent="0" marL="0">
+        </p:spPr>
+        <p:txBody>
+          <a:bodyPr wrap="square" lIns="0" tIns="0" rIns="0" bIns="0" rtlCol="0" anchor="ctr"/>
+          <a:lstStyle/>
+          <a:p>
+            <a:pPr marL="0" indent="0">
               <a:buNone/>
             </a:pPr>
             <a:r>
@@ -2820,9 +2748,9 @@
                 <a:solidFill>
                   <a:srgbClr val="0E2A33"/>
                 </a:solidFill>
-                <a:latin typeface="Courier New" pitchFamily="34" charset="0"/>
-                <a:ea typeface="Courier New" pitchFamily="34" charset="-122"/>
-                <a:cs typeface="Courier New" pitchFamily="34" charset="-120"/>
+                <a:latin typeface="Courier New" panose="02070309020205020404" pitchFamily="34" charset="0"/>
+                <a:ea typeface="Courier New" panose="02070309020205020404" pitchFamily="34" charset="-122"/>
+                <a:cs typeface="Courier New" panose="02070309020205020404" pitchFamily="34" charset="-120"/>
               </a:rPr>
               <a:t>propostas_credito</a:t>
             </a:r>
@@ -2845,13 +2773,12 @@
             <a:avLst/>
           </a:prstGeom>
           <a:noFill/>
-          <a:ln/>
-        </p:spPr>
-        <p:txBody>
-          <a:bodyPr wrap="square" lIns="0" tIns="0" rIns="0" bIns="0" rtlCol="0" anchor="ctr"/>
-          <a:lstStyle/>
-          <a:p>
-            <a:pPr algn="r" indent="0" marL="0">
+        </p:spPr>
+        <p:txBody>
+          <a:bodyPr wrap="square" lIns="0" tIns="0" rIns="0" bIns="0" rtlCol="0" anchor="ctr"/>
+          <a:lstStyle/>
+          <a:p>
+            <a:pPr marL="0" indent="0" algn="r">
               <a:buNone/>
             </a:pPr>
             <a:r>
@@ -2859,9 +2786,9 @@
                 <a:solidFill>
                   <a:srgbClr val="028090"/>
                 </a:solidFill>
-                <a:latin typeface="Calibri" pitchFamily="34" charset="0"/>
-                <a:ea typeface="Calibri" pitchFamily="34" charset="-122"/>
-                <a:cs typeface="Calibri" pitchFamily="34" charset="-120"/>
+                <a:latin typeface="Calibri" panose="020F0502020204030204" pitchFamily="34" charset="0"/>
+                <a:ea typeface="Calibri" panose="020F0502020204030204" pitchFamily="34" charset="-122"/>
+                <a:cs typeface="Calibri" panose="020F0502020204030204" pitchFamily="34" charset="-120"/>
               </a:rPr>
               <a:t>2.000</a:t>
             </a:r>
@@ -2911,13 +2838,12 @@
             <a:avLst/>
           </a:prstGeom>
           <a:noFill/>
-          <a:ln/>
-        </p:spPr>
-        <p:txBody>
-          <a:bodyPr wrap="square" lIns="0" tIns="0" rIns="0" bIns="0" rtlCol="0" anchor="ctr"/>
-          <a:lstStyle/>
-          <a:p>
-            <a:pPr indent="0" marL="0">
+        </p:spPr>
+        <p:txBody>
+          <a:bodyPr wrap="square" lIns="0" tIns="0" rIns="0" bIns="0" rtlCol="0" anchor="ctr"/>
+          <a:lstStyle/>
+          <a:p>
+            <a:pPr marL="0" indent="0">
               <a:buNone/>
             </a:pPr>
             <a:r>
@@ -2925,9 +2851,9 @@
                 <a:solidFill>
                   <a:srgbClr val="0E2A33"/>
                 </a:solidFill>
-                <a:latin typeface="Courier New" pitchFamily="34" charset="0"/>
-                <a:ea typeface="Courier New" pitchFamily="34" charset="-122"/>
-                <a:cs typeface="Courier New" pitchFamily="34" charset="-120"/>
+                <a:latin typeface="Courier New" panose="02070309020205020404" pitchFamily="34" charset="0"/>
+                <a:ea typeface="Courier New" panose="02070309020205020404" pitchFamily="34" charset="-122"/>
+                <a:cs typeface="Courier New" panose="02070309020205020404" pitchFamily="34" charset="-120"/>
               </a:rPr>
               <a:t>transacoes</a:t>
             </a:r>
@@ -2950,13 +2876,12 @@
             <a:avLst/>
           </a:prstGeom>
           <a:noFill/>
-          <a:ln/>
-        </p:spPr>
-        <p:txBody>
-          <a:bodyPr wrap="square" lIns="0" tIns="0" rIns="0" bIns="0" rtlCol="0" anchor="ctr"/>
-          <a:lstStyle/>
-          <a:p>
-            <a:pPr algn="r" indent="0" marL="0">
+        </p:spPr>
+        <p:txBody>
+          <a:bodyPr wrap="square" lIns="0" tIns="0" rIns="0" bIns="0" rtlCol="0" anchor="ctr"/>
+          <a:lstStyle/>
+          <a:p>
+            <a:pPr marL="0" indent="0" algn="r">
               <a:buNone/>
             </a:pPr>
             <a:r>
@@ -2964,9 +2889,9 @@
                 <a:solidFill>
                   <a:srgbClr val="028090"/>
                 </a:solidFill>
-                <a:latin typeface="Calibri" pitchFamily="34" charset="0"/>
-                <a:ea typeface="Calibri" pitchFamily="34" charset="-122"/>
-                <a:cs typeface="Calibri" pitchFamily="34" charset="-120"/>
+                <a:latin typeface="Calibri" panose="020F0502020204030204" pitchFamily="34" charset="0"/>
+                <a:ea typeface="Calibri" panose="020F0502020204030204" pitchFamily="34" charset="-122"/>
+                <a:cs typeface="Calibri" panose="020F0502020204030204" pitchFamily="34" charset="-120"/>
               </a:rPr>
               <a:t>71.999</a:t>
             </a:r>
@@ -2989,13 +2914,12 @@
             <a:avLst/>
           </a:prstGeom>
           <a:noFill/>
-          <a:ln/>
-        </p:spPr>
-        <p:txBody>
-          <a:bodyPr wrap="square" lIns="0" tIns="0" rIns="0" bIns="0" rtlCol="0" anchor="ctr"/>
-          <a:lstStyle/>
-          <a:p>
-            <a:pPr indent="0" marL="0">
+        </p:spPr>
+        <p:txBody>
+          <a:bodyPr wrap="square" lIns="0" tIns="0" rIns="0" bIns="0" rtlCol="0" anchor="ctr"/>
+          <a:lstStyle/>
+          <a:p>
+            <a:pPr marL="0" indent="0">
               <a:buNone/>
             </a:pPr>
             <a:r>
@@ -3003,9 +2927,9 @@
                 <a:solidFill>
                   <a:srgbClr val="5F7278"/>
                 </a:solidFill>
-                <a:latin typeface="Calibri" pitchFamily="34" charset="0"/>
-                <a:ea typeface="Calibri" pitchFamily="34" charset="-122"/>
-                <a:cs typeface="Calibri" pitchFamily="34" charset="-120"/>
+                <a:latin typeface="Calibri" panose="020F0502020204030204" pitchFamily="34" charset="0"/>
+                <a:ea typeface="Calibri" panose="020F0502020204030204" pitchFamily="34" charset="-122"/>
+                <a:cs typeface="Calibri" panose="020F0502020204030204" pitchFamily="34" charset="-120"/>
               </a:rPr>
               <a:t>A conferência é uma task da DAG: compara a contagem do arquivo de origem com a do destino e derruba a execução se divergir.</a:t>
             </a:r>
@@ -3028,13 +2952,12 @@
             <a:avLst/>
           </a:prstGeom>
           <a:noFill/>
-          <a:ln/>
-        </p:spPr>
-        <p:txBody>
-          <a:bodyPr wrap="square" lIns="0" tIns="0" rIns="0" bIns="0" rtlCol="0" anchor="ctr"/>
-          <a:lstStyle/>
-          <a:p>
-            <a:pPr algn="r" indent="0" marL="0">
+        </p:spPr>
+        <p:txBody>
+          <a:bodyPr wrap="square" lIns="0" tIns="0" rIns="0" bIns="0" rtlCol="0" anchor="ctr"/>
+          <a:lstStyle/>
+          <a:p>
+            <a:pPr marL="0" indent="0" algn="r">
               <a:buNone/>
             </a:pPr>
             <a:r>
@@ -3042,9 +2965,9 @@
                 <a:solidFill>
                   <a:srgbClr val="5F7278"/>
                 </a:solidFill>
-                <a:latin typeface="Calibri" pitchFamily="34" charset="0"/>
-                <a:ea typeface="Calibri" pitchFamily="34" charset="-122"/>
-                <a:cs typeface="Calibri" pitchFamily="34" charset="-120"/>
+                <a:latin typeface="Calibri" panose="020F0502020204030204" pitchFamily="34" charset="0"/>
+                <a:ea typeface="Calibri" panose="020F0502020204030204" pitchFamily="34" charset="-122"/>
+                <a:cs typeface="Calibri" panose="020F0502020204030204" pitchFamily="34" charset="-120"/>
               </a:rPr>
               <a:t>10</a:t>
             </a:r>
@@ -3062,12 +2985,13 @@
 
 <file path=ppt/slides/slide11.xml><?xml version="1.0" encoding="utf-8"?>
 <p:sld xmlns:a="http://schemas.openxmlformats.org/drawingml/2006/main" xmlns:r="http://schemas.openxmlformats.org/officeDocument/2006/relationships" xmlns:p="http://schemas.openxmlformats.org/presentationml/2006/main">
-  <p:cSld name="Slide 11">
+  <p:cSld>
     <p:bg>
       <p:bgPr>
         <a:solidFill>
           <a:srgbClr val="FFFFFF"/>
         </a:solidFill>
+        <a:effectLst/>
       </p:bgPr>
     </p:bg>
     <p:spTree>
@@ -3099,13 +3023,12 @@
             <a:avLst/>
           </a:prstGeom>
           <a:noFill/>
-          <a:ln/>
-        </p:spPr>
-        <p:txBody>
-          <a:bodyPr wrap="square" lIns="0" tIns="0" rIns="0" bIns="0" rtlCol="0" anchor="ctr"/>
-          <a:lstStyle/>
-          <a:p>
-            <a:pPr indent="0" marL="0">
+        </p:spPr>
+        <p:txBody>
+          <a:bodyPr wrap="square" lIns="0" tIns="0" rIns="0" bIns="0" rtlCol="0" anchor="ctr"/>
+          <a:lstStyle/>
+          <a:p>
+            <a:pPr marL="0" indent="0">
               <a:buNone/>
             </a:pPr>
             <a:r>
@@ -3113,9 +3036,9 @@
                 <a:solidFill>
                   <a:srgbClr val="0E2A33"/>
                 </a:solidFill>
-                <a:latin typeface="Cambria" pitchFamily="34" charset="0"/>
-                <a:ea typeface="Cambria" pitchFamily="34" charset="-122"/>
-                <a:cs typeface="Cambria" pitchFamily="34" charset="-120"/>
+                <a:latin typeface="Cambria" panose="02040503050406030204" pitchFamily="34" charset="0"/>
+                <a:ea typeface="Cambria" panose="02040503050406030204" pitchFamily="34" charset="-122"/>
+                <a:cs typeface="Cambria" panose="02040503050406030204" pitchFamily="34" charset="-120"/>
               </a:rPr>
               <a:t>Próximos passos</a:t>
             </a:r>
@@ -3138,13 +3061,12 @@
             <a:avLst/>
           </a:prstGeom>
           <a:noFill/>
-          <a:ln/>
         </p:spPr>
         <p:txBody>
           <a:bodyPr wrap="square" lIns="0" tIns="0" rIns="0" bIns="0" rtlCol="0" anchor="t"/>
           <a:lstStyle/>
           <a:p>
-            <a:pPr indent="0" marL="0">
+            <a:pPr marL="0" indent="0">
               <a:buNone/>
             </a:pPr>
             <a:r>
@@ -3152,9 +3074,9 @@
                 <a:solidFill>
                   <a:srgbClr val="5F7278"/>
                 </a:solidFill>
-                <a:latin typeface="Calibri" pitchFamily="34" charset="0"/>
-                <a:ea typeface="Calibri" pitchFamily="34" charset="-122"/>
-                <a:cs typeface="Calibri" pitchFamily="34" charset="-120"/>
+                <a:latin typeface="Calibri" panose="020F0502020204030204" pitchFamily="34" charset="0"/>
+                <a:ea typeface="Calibri" panose="020F0502020204030204" pitchFamily="34" charset="-122"/>
+                <a:cs typeface="Calibri" panose="020F0502020204030204" pitchFamily="34" charset="-120"/>
               </a:rPr>
               <a:t>O que a POC deixa preparado para a jornada de dados do BanVic.</a:t>
             </a:r>
@@ -3202,13 +3124,12 @@
             <a:avLst/>
           </a:prstGeom>
           <a:noFill/>
-          <a:ln/>
-        </p:spPr>
-        <p:txBody>
-          <a:bodyPr wrap="square" lIns="0" tIns="0" rIns="0" bIns="0" rtlCol="0" anchor="ctr"/>
-          <a:lstStyle/>
-          <a:p>
-            <a:pPr algn="ctr" indent="0" marL="0">
+        </p:spPr>
+        <p:txBody>
+          <a:bodyPr wrap="square" lIns="0" tIns="0" rIns="0" bIns="0" rtlCol="0" anchor="ctr"/>
+          <a:lstStyle/>
+          <a:p>
+            <a:pPr marL="0" indent="0" algn="ctr">
               <a:buNone/>
             </a:pPr>
             <a:r>
@@ -3216,9 +3137,9 @@
                 <a:solidFill>
                   <a:srgbClr val="FFFFFF"/>
                 </a:solidFill>
-                <a:latin typeface="Calibri" pitchFamily="34" charset="0"/>
-                <a:ea typeface="Calibri" pitchFamily="34" charset="-122"/>
-                <a:cs typeface="Calibri" pitchFamily="34" charset="-120"/>
+                <a:latin typeface="Calibri" panose="020F0502020204030204" pitchFamily="34" charset="0"/>
+                <a:ea typeface="Calibri" panose="020F0502020204030204" pitchFamily="34" charset="-122"/>
+                <a:cs typeface="Calibri" panose="020F0502020204030204" pitchFamily="34" charset="-120"/>
               </a:rPr>
               <a:t>1</a:t>
             </a:r>
@@ -3241,13 +3162,12 @@
             <a:avLst/>
           </a:prstGeom>
           <a:noFill/>
-          <a:ln/>
-        </p:spPr>
-        <p:txBody>
-          <a:bodyPr wrap="square" lIns="0" tIns="0" rIns="0" bIns="0" rtlCol="0" anchor="ctr"/>
-          <a:lstStyle/>
-          <a:p>
-            <a:pPr indent="0" marL="0">
+        </p:spPr>
+        <p:txBody>
+          <a:bodyPr wrap="square" lIns="0" tIns="0" rIns="0" bIns="0" rtlCol="0" anchor="ctr"/>
+          <a:lstStyle/>
+          <a:p>
+            <a:pPr marL="0" indent="0">
               <a:buNone/>
             </a:pPr>
             <a:r>
@@ -3255,9 +3175,9 @@
                 <a:solidFill>
                   <a:srgbClr val="0E2A33"/>
                 </a:solidFill>
-                <a:latin typeface="Calibri" pitchFamily="34" charset="0"/>
-                <a:ea typeface="Calibri" pitchFamily="34" charset="-122"/>
-                <a:cs typeface="Calibri" pitchFamily="34" charset="-120"/>
+                <a:latin typeface="Calibri" panose="020F0502020204030204" pitchFamily="34" charset="0"/>
+                <a:ea typeface="Calibri" panose="020F0502020204030204" pitchFamily="34" charset="-122"/>
+                <a:cs typeface="Calibri" panose="020F0502020204030204" pitchFamily="34" charset="-120"/>
               </a:rPr>
               <a:t>Transformação com dbt</a:t>
             </a:r>
@@ -3280,13 +3200,12 @@
             <a:avLst/>
           </a:prstGeom>
           <a:noFill/>
-          <a:ln/>
-        </p:spPr>
-        <p:txBody>
-          <a:bodyPr wrap="square" lIns="0" tIns="0" rIns="0" bIns="0" rtlCol="0" anchor="ctr"/>
-          <a:lstStyle/>
-          <a:p>
-            <a:pPr indent="0" marL="0">
+        </p:spPr>
+        <p:txBody>
+          <a:bodyPr wrap="square" lIns="0" tIns="0" rIns="0" bIns="0" rtlCol="0" anchor="ctr"/>
+          <a:lstStyle/>
+          <a:p>
+            <a:pPr marL="0" indent="0">
               <a:buNone/>
             </a:pPr>
             <a:r>
@@ -3294,9 +3213,9 @@
                 <a:solidFill>
                   <a:srgbClr val="5F7278"/>
                 </a:solidFill>
-                <a:latin typeface="Calibri" pitchFamily="34" charset="0"/>
-                <a:ea typeface="Calibri" pitchFamily="34" charset="-122"/>
-                <a:cs typeface="Calibri" pitchFamily="34" charset="-120"/>
+                <a:latin typeface="Calibri" panose="020F0502020204030204" pitchFamily="34" charset="0"/>
+                <a:ea typeface="Calibri" panose="020F0502020204030204" pitchFamily="34" charset="-122"/>
+                <a:cs typeface="Calibri" panose="020F0502020204030204" pitchFamily="34" charset="-120"/>
               </a:rPr>
               <a:t>Sobre o schema raw: tipagem, padronização e modelo dimensional.</a:t>
             </a:r>
@@ -3344,13 +3263,12 @@
             <a:avLst/>
           </a:prstGeom>
           <a:noFill/>
-          <a:ln/>
-        </p:spPr>
-        <p:txBody>
-          <a:bodyPr wrap="square" lIns="0" tIns="0" rIns="0" bIns="0" rtlCol="0" anchor="ctr"/>
-          <a:lstStyle/>
-          <a:p>
-            <a:pPr algn="ctr" indent="0" marL="0">
+        </p:spPr>
+        <p:txBody>
+          <a:bodyPr wrap="square" lIns="0" tIns="0" rIns="0" bIns="0" rtlCol="0" anchor="ctr"/>
+          <a:lstStyle/>
+          <a:p>
+            <a:pPr marL="0" indent="0" algn="ctr">
               <a:buNone/>
             </a:pPr>
             <a:r>
@@ -3358,9 +3276,9 @@
                 <a:solidFill>
                   <a:srgbClr val="FFFFFF"/>
                 </a:solidFill>
-                <a:latin typeface="Calibri" pitchFamily="34" charset="0"/>
-                <a:ea typeface="Calibri" pitchFamily="34" charset="-122"/>
-                <a:cs typeface="Calibri" pitchFamily="34" charset="-120"/>
+                <a:latin typeface="Calibri" panose="020F0502020204030204" pitchFamily="34" charset="0"/>
+                <a:ea typeface="Calibri" panose="020F0502020204030204" pitchFamily="34" charset="-122"/>
+                <a:cs typeface="Calibri" panose="020F0502020204030204" pitchFamily="34" charset="-120"/>
               </a:rPr>
               <a:t>2</a:t>
             </a:r>
@@ -3383,13 +3301,12 @@
             <a:avLst/>
           </a:prstGeom>
           <a:noFill/>
-          <a:ln/>
-        </p:spPr>
-        <p:txBody>
-          <a:bodyPr wrap="square" lIns="0" tIns="0" rIns="0" bIns="0" rtlCol="0" anchor="ctr"/>
-          <a:lstStyle/>
-          <a:p>
-            <a:pPr indent="0" marL="0">
+        </p:spPr>
+        <p:txBody>
+          <a:bodyPr wrap="square" lIns="0" tIns="0" rIns="0" bIns="0" rtlCol="0" anchor="ctr"/>
+          <a:lstStyle/>
+          <a:p>
+            <a:pPr marL="0" indent="0">
               <a:buNone/>
             </a:pPr>
             <a:r>
@@ -3397,9 +3314,9 @@
                 <a:solidFill>
                   <a:srgbClr val="0E2A33"/>
                 </a:solidFill>
-                <a:latin typeface="Calibri" pitchFamily="34" charset="0"/>
-                <a:ea typeface="Calibri" pitchFamily="34" charset="-122"/>
-                <a:cs typeface="Calibri" pitchFamily="34" charset="-120"/>
+                <a:latin typeface="Calibri" panose="020F0502020204030204" pitchFamily="34" charset="0"/>
+                <a:ea typeface="Calibri" panose="020F0502020204030204" pitchFamily="34" charset="-122"/>
+                <a:cs typeface="Calibri" panose="020F0502020204030204" pitchFamily="34" charset="-120"/>
               </a:rPr>
               <a:t>Dashboard comercial</a:t>
             </a:r>
@@ -3422,13 +3339,12 @@
             <a:avLst/>
           </a:prstGeom>
           <a:noFill/>
-          <a:ln/>
-        </p:spPr>
-        <p:txBody>
-          <a:bodyPr wrap="square" lIns="0" tIns="0" rIns="0" bIns="0" rtlCol="0" anchor="ctr"/>
-          <a:lstStyle/>
-          <a:p>
-            <a:pPr indent="0" marL="0">
+        </p:spPr>
+        <p:txBody>
+          <a:bodyPr wrap="square" lIns="0" tIns="0" rIns="0" bIns="0" rtlCol="0" anchor="ctr"/>
+          <a:lstStyle/>
+          <a:p>
+            <a:pPr marL="0" indent="0">
               <a:buNone/>
             </a:pPr>
             <a:r>
@@ -3436,9 +3352,9 @@
                 <a:solidFill>
                   <a:srgbClr val="5F7278"/>
                 </a:solidFill>
-                <a:latin typeface="Calibri" pitchFamily="34" charset="0"/>
-                <a:ea typeface="Calibri" pitchFamily="34" charset="-122"/>
-                <a:cs typeface="Calibri" pitchFamily="34" charset="-120"/>
+                <a:latin typeface="Calibri" panose="020F0502020204030204" pitchFamily="34" charset="0"/>
+                <a:ea typeface="Calibri" panose="020F0502020204030204" pitchFamily="34" charset="-122"/>
+                <a:cs typeface="Calibri" panose="020F0502020204030204" pitchFamily="34" charset="-120"/>
               </a:rPr>
               <a:t>Transações por cliente, base ativa e sinais de churn para a área da Camila.</a:t>
             </a:r>
@@ -3486,13 +3402,12 @@
             <a:avLst/>
           </a:prstGeom>
           <a:noFill/>
-          <a:ln/>
-        </p:spPr>
-        <p:txBody>
-          <a:bodyPr wrap="square" lIns="0" tIns="0" rIns="0" bIns="0" rtlCol="0" anchor="ctr"/>
-          <a:lstStyle/>
-          <a:p>
-            <a:pPr algn="ctr" indent="0" marL="0">
+        </p:spPr>
+        <p:txBody>
+          <a:bodyPr wrap="square" lIns="0" tIns="0" rIns="0" bIns="0" rtlCol="0" anchor="ctr"/>
+          <a:lstStyle/>
+          <a:p>
+            <a:pPr marL="0" indent="0" algn="ctr">
               <a:buNone/>
             </a:pPr>
             <a:r>
@@ -3500,9 +3415,9 @@
                 <a:solidFill>
                   <a:srgbClr val="FFFFFF"/>
                 </a:solidFill>
-                <a:latin typeface="Calibri" pitchFamily="34" charset="0"/>
-                <a:ea typeface="Calibri" pitchFamily="34" charset="-122"/>
-                <a:cs typeface="Calibri" pitchFamily="34" charset="-120"/>
+                <a:latin typeface="Calibri" panose="020F0502020204030204" pitchFamily="34" charset="0"/>
+                <a:ea typeface="Calibri" panose="020F0502020204030204" pitchFamily="34" charset="-122"/>
+                <a:cs typeface="Calibri" panose="020F0502020204030204" pitchFamily="34" charset="-120"/>
               </a:rPr>
               <a:t>3</a:t>
             </a:r>
@@ -3525,13 +3440,12 @@
             <a:avLst/>
           </a:prstGeom>
           <a:noFill/>
-          <a:ln/>
-        </p:spPr>
-        <p:txBody>
-          <a:bodyPr wrap="square" lIns="0" tIns="0" rIns="0" bIns="0" rtlCol="0" anchor="ctr"/>
-          <a:lstStyle/>
-          <a:p>
-            <a:pPr indent="0" marL="0">
+        </p:spPr>
+        <p:txBody>
+          <a:bodyPr wrap="square" lIns="0" tIns="0" rIns="0" bIns="0" rtlCol="0" anchor="ctr"/>
+          <a:lstStyle/>
+          <a:p>
+            <a:pPr marL="0" indent="0">
               <a:buNone/>
             </a:pPr>
             <a:r>
@@ -3539,9 +3453,9 @@
                 <a:solidFill>
                   <a:srgbClr val="0E2A33"/>
                 </a:solidFill>
-                <a:latin typeface="Calibri" pitchFamily="34" charset="0"/>
-                <a:ea typeface="Calibri" pitchFamily="34" charset="-122"/>
-                <a:cs typeface="Calibri" pitchFamily="34" charset="-120"/>
+                <a:latin typeface="Calibri" panose="020F0502020204030204" pitchFamily="34" charset="0"/>
+                <a:ea typeface="Calibri" panose="020F0502020204030204" pitchFamily="34" charset="-122"/>
+                <a:cs typeface="Calibri" panose="020F0502020204030204" pitchFamily="34" charset="-120"/>
               </a:rPr>
               <a:t>Ranking de alavancas</a:t>
             </a:r>
@@ -3564,13 +3478,12 @@
             <a:avLst/>
           </a:prstGeom>
           <a:noFill/>
-          <a:ln/>
-        </p:spPr>
-        <p:txBody>
-          <a:bodyPr wrap="square" lIns="0" tIns="0" rIns="0" bIns="0" rtlCol="0" anchor="ctr"/>
-          <a:lstStyle/>
-          <a:p>
-            <a:pPr indent="0" marL="0">
+        </p:spPr>
+        <p:txBody>
+          <a:bodyPr wrap="square" lIns="0" tIns="0" rIns="0" bIns="0" rtlCol="0" anchor="ctr"/>
+          <a:lstStyle/>
+          <a:p>
+            <a:pPr marL="0" indent="0">
               <a:buNone/>
             </a:pPr>
             <a:r>
@@ -3578,9 +3491,9 @@
                 <a:solidFill>
                   <a:srgbClr val="5F7278"/>
                 </a:solidFill>
-                <a:latin typeface="Calibri" pitchFamily="34" charset="0"/>
-                <a:ea typeface="Calibri" pitchFamily="34" charset="-122"/>
-                <a:cs typeface="Calibri" pitchFamily="34" charset="-120"/>
+                <a:latin typeface="Calibri" panose="020F0502020204030204" pitchFamily="34" charset="0"/>
+                <a:ea typeface="Calibri" panose="020F0502020204030204" pitchFamily="34" charset="-122"/>
+                <a:cs typeface="Calibri" panose="020F0502020204030204" pitchFamily="34" charset="-120"/>
               </a:rPr>
               <a:t>Com transações, contas, propostas e agências no mesmo lugar, a pergunta da CEO vira consulta.</a:t>
             </a:r>
@@ -3628,13 +3541,12 @@
             <a:avLst/>
           </a:prstGeom>
           <a:noFill/>
-          <a:ln/>
-        </p:spPr>
-        <p:txBody>
-          <a:bodyPr wrap="square" lIns="0" tIns="0" rIns="0" bIns="0" rtlCol="0" anchor="ctr"/>
-          <a:lstStyle/>
-          <a:p>
-            <a:pPr algn="ctr" indent="0" marL="0">
+        </p:spPr>
+        <p:txBody>
+          <a:bodyPr wrap="square" lIns="0" tIns="0" rIns="0" bIns="0" rtlCol="0" anchor="ctr"/>
+          <a:lstStyle/>
+          <a:p>
+            <a:pPr marL="0" indent="0" algn="ctr">
               <a:buNone/>
             </a:pPr>
             <a:r>
@@ -3642,9 +3554,9 @@
                 <a:solidFill>
                   <a:srgbClr val="FFFFFF"/>
                 </a:solidFill>
-                <a:latin typeface="Calibri" pitchFamily="34" charset="0"/>
-                <a:ea typeface="Calibri" pitchFamily="34" charset="-122"/>
-                <a:cs typeface="Calibri" pitchFamily="34" charset="-120"/>
+                <a:latin typeface="Calibri" panose="020F0502020204030204" pitchFamily="34" charset="0"/>
+                <a:ea typeface="Calibri" panose="020F0502020204030204" pitchFamily="34" charset="-122"/>
+                <a:cs typeface="Calibri" panose="020F0502020204030204" pitchFamily="34" charset="-120"/>
               </a:rPr>
               <a:t>4</a:t>
             </a:r>
@@ -3667,13 +3579,12 @@
             <a:avLst/>
           </a:prstGeom>
           <a:noFill/>
-          <a:ln/>
-        </p:spPr>
-        <p:txBody>
-          <a:bodyPr wrap="square" lIns="0" tIns="0" rIns="0" bIns="0" rtlCol="0" anchor="ctr"/>
-          <a:lstStyle/>
-          <a:p>
-            <a:pPr indent="0" marL="0">
+        </p:spPr>
+        <p:txBody>
+          <a:bodyPr wrap="square" lIns="0" tIns="0" rIns="0" bIns="0" rtlCol="0" anchor="ctr"/>
+          <a:lstStyle/>
+          <a:p>
+            <a:pPr marL="0" indent="0">
               <a:buNone/>
             </a:pPr>
             <a:r>
@@ -3681,9 +3592,9 @@
                 <a:solidFill>
                   <a:srgbClr val="0E2A33"/>
                 </a:solidFill>
-                <a:latin typeface="Calibri" pitchFamily="34" charset="0"/>
-                <a:ea typeface="Calibri" pitchFamily="34" charset="-122"/>
-                <a:cs typeface="Calibri" pitchFamily="34" charset="-120"/>
+                <a:latin typeface="Calibri" panose="020F0502020204030204" pitchFamily="34" charset="0"/>
+                <a:ea typeface="Calibri" panose="020F0502020204030204" pitchFamily="34" charset="-122"/>
+                <a:cs typeface="Calibri" panose="020F0502020204030204" pitchFamily="34" charset="-120"/>
               </a:rPr>
               <a:t>Observabilidade</a:t>
             </a:r>
@@ -3706,13 +3617,12 @@
             <a:avLst/>
           </a:prstGeom>
           <a:noFill/>
-          <a:ln/>
-        </p:spPr>
-        <p:txBody>
-          <a:bodyPr wrap="square" lIns="0" tIns="0" rIns="0" bIns="0" rtlCol="0" anchor="ctr"/>
-          <a:lstStyle/>
-          <a:p>
-            <a:pPr indent="0" marL="0">
+        </p:spPr>
+        <p:txBody>
+          <a:bodyPr wrap="square" lIns="0" tIns="0" rIns="0" bIns="0" rtlCol="0" anchor="ctr"/>
+          <a:lstStyle/>
+          <a:p>
+            <a:pPr marL="0" indent="0">
               <a:buNone/>
             </a:pPr>
             <a:r>
@@ -3720,9 +3630,9 @@
                 <a:solidFill>
                   <a:srgbClr val="5F7278"/>
                 </a:solidFill>
-                <a:latin typeface="Calibri" pitchFamily="34" charset="0"/>
-                <a:ea typeface="Calibri" pitchFamily="34" charset="-122"/>
-                <a:cs typeface="Calibri" pitchFamily="34" charset="-120"/>
+                <a:latin typeface="Calibri" panose="020F0502020204030204" pitchFamily="34" charset="0"/>
+                <a:ea typeface="Calibri" panose="020F0502020204030204" pitchFamily="34" charset="-122"/>
+                <a:cs typeface="Calibri" panose="020F0502020204030204" pitchFamily="34" charset="-120"/>
               </a:rPr>
               <a:t>Prometheus e Grafana sobre o exporter StatsD que já está ativo.</a:t>
             </a:r>
@@ -3770,13 +3680,12 @@
             <a:avLst/>
           </a:prstGeom>
           <a:noFill/>
-          <a:ln/>
-        </p:spPr>
-        <p:txBody>
-          <a:bodyPr wrap="square" lIns="0" tIns="0" rIns="0" bIns="0" rtlCol="0" anchor="ctr"/>
-          <a:lstStyle/>
-          <a:p>
-            <a:pPr algn="ctr" indent="0" marL="0">
+        </p:spPr>
+        <p:txBody>
+          <a:bodyPr wrap="square" lIns="0" tIns="0" rIns="0" bIns="0" rtlCol="0" anchor="ctr"/>
+          <a:lstStyle/>
+          <a:p>
+            <a:pPr marL="0" indent="0" algn="ctr">
               <a:buNone/>
             </a:pPr>
             <a:r>
@@ -3784,9 +3693,9 @@
                 <a:solidFill>
                   <a:srgbClr val="FFFFFF"/>
                 </a:solidFill>
-                <a:latin typeface="Calibri" pitchFamily="34" charset="0"/>
-                <a:ea typeface="Calibri" pitchFamily="34" charset="-122"/>
-                <a:cs typeface="Calibri" pitchFamily="34" charset="-120"/>
+                <a:latin typeface="Calibri" panose="020F0502020204030204" pitchFamily="34" charset="0"/>
+                <a:ea typeface="Calibri" panose="020F0502020204030204" pitchFamily="34" charset="-122"/>
+                <a:cs typeface="Calibri" panose="020F0502020204030204" pitchFamily="34" charset="-120"/>
               </a:rPr>
               <a:t>5</a:t>
             </a:r>
@@ -3809,13 +3718,12 @@
             <a:avLst/>
           </a:prstGeom>
           <a:noFill/>
-          <a:ln/>
-        </p:spPr>
-        <p:txBody>
-          <a:bodyPr wrap="square" lIns="0" tIns="0" rIns="0" bIns="0" rtlCol="0" anchor="ctr"/>
-          <a:lstStyle/>
-          <a:p>
-            <a:pPr indent="0" marL="0">
+        </p:spPr>
+        <p:txBody>
+          <a:bodyPr wrap="square" lIns="0" tIns="0" rIns="0" bIns="0" rtlCol="0" anchor="ctr"/>
+          <a:lstStyle/>
+          <a:p>
+            <a:pPr marL="0" indent="0">
               <a:buNone/>
             </a:pPr>
             <a:r>
@@ -3823,9 +3731,9 @@
                 <a:solidFill>
                   <a:srgbClr val="0E2A33"/>
                 </a:solidFill>
-                <a:latin typeface="Calibri" pitchFamily="34" charset="0"/>
-                <a:ea typeface="Calibri" pitchFamily="34" charset="-122"/>
-                <a:cs typeface="Calibri" pitchFamily="34" charset="-120"/>
+                <a:latin typeface="Calibri" panose="020F0502020204030204" pitchFamily="34" charset="0"/>
+                <a:ea typeface="Calibri" panose="020F0502020204030204" pitchFamily="34" charset="-122"/>
+                <a:cs typeface="Calibri" panose="020F0502020204030204" pitchFamily="34" charset="-120"/>
               </a:rPr>
               <a:t>Ingestão incremental</a:t>
             </a:r>
@@ -3848,13 +3756,12 @@
             <a:avLst/>
           </a:prstGeom>
           <a:noFill/>
-          <a:ln/>
-        </p:spPr>
-        <p:txBody>
-          <a:bodyPr wrap="square" lIns="0" tIns="0" rIns="0" bIns="0" rtlCol="0" anchor="ctr"/>
-          <a:lstStyle/>
-          <a:p>
-            <a:pPr indent="0" marL="0">
+        </p:spPr>
+        <p:txBody>
+          <a:bodyPr wrap="square" lIns="0" tIns="0" rIns="0" bIns="0" rtlCol="0" anchor="ctr"/>
+          <a:lstStyle/>
+          <a:p>
+            <a:pPr marL="0" indent="0">
               <a:buNone/>
             </a:pPr>
             <a:r>
@@ -3862,9 +3769,9 @@
                 <a:solidFill>
                   <a:srgbClr val="5F7278"/>
                 </a:solidFill>
-                <a:latin typeface="Calibri" pitchFamily="34" charset="0"/>
-                <a:ea typeface="Calibri" pitchFamily="34" charset="-122"/>
-                <a:cs typeface="Calibri" pitchFamily="34" charset="-120"/>
+                <a:latin typeface="Calibri" panose="020F0502020204030204" pitchFamily="34" charset="0"/>
+                <a:ea typeface="Calibri" panose="020F0502020204030204" pitchFamily="34" charset="-122"/>
+                <a:cs typeface="Calibri" panose="020F0502020204030204" pitchFamily="34" charset="-120"/>
               </a:rPr>
               <a:t>CDC quando a origem deixar de ser arquivo e passar a ser o banco do ERP.</a:t>
             </a:r>
@@ -3887,13 +3794,12 @@
             <a:avLst/>
           </a:prstGeom>
           <a:noFill/>
-          <a:ln/>
-        </p:spPr>
-        <p:txBody>
-          <a:bodyPr wrap="square" lIns="0" tIns="0" rIns="0" bIns="0" rtlCol="0" anchor="ctr"/>
-          <a:lstStyle/>
-          <a:p>
-            <a:pPr algn="r" indent="0" marL="0">
+        </p:spPr>
+        <p:txBody>
+          <a:bodyPr wrap="square" lIns="0" tIns="0" rIns="0" bIns="0" rtlCol="0" anchor="ctr"/>
+          <a:lstStyle/>
+          <a:p>
+            <a:pPr marL="0" indent="0" algn="r">
               <a:buNone/>
             </a:pPr>
             <a:r>
@@ -3901,9 +3807,9 @@
                 <a:solidFill>
                   <a:srgbClr val="5F7278"/>
                 </a:solidFill>
-                <a:latin typeface="Calibri" pitchFamily="34" charset="0"/>
-                <a:ea typeface="Calibri" pitchFamily="34" charset="-122"/>
-                <a:cs typeface="Calibri" pitchFamily="34" charset="-120"/>
+                <a:latin typeface="Calibri" panose="020F0502020204030204" pitchFamily="34" charset="0"/>
+                <a:ea typeface="Calibri" panose="020F0502020204030204" pitchFamily="34" charset="-122"/>
+                <a:cs typeface="Calibri" panose="020F0502020204030204" pitchFamily="34" charset="-120"/>
               </a:rPr>
               <a:t>11</a:t>
             </a:r>
@@ -3921,12 +3827,13 @@
 
 <file path=ppt/slides/slide12.xml><?xml version="1.0" encoding="utf-8"?>
 <p:sld xmlns:a="http://schemas.openxmlformats.org/drawingml/2006/main" xmlns:r="http://schemas.openxmlformats.org/officeDocument/2006/relationships" xmlns:p="http://schemas.openxmlformats.org/presentationml/2006/main">
-  <p:cSld name="Slide 12">
+  <p:cSld>
     <p:bg>
       <p:bgPr>
         <a:solidFill>
           <a:srgbClr val="0E2A33"/>
         </a:solidFill>
+        <a:effectLst/>
       </p:bgPr>
     </p:bg>
     <p:spTree>
@@ -3958,13 +3865,12 @@
             <a:avLst/>
           </a:prstGeom>
           <a:noFill/>
-          <a:ln/>
-        </p:spPr>
-        <p:txBody>
-          <a:bodyPr wrap="square" lIns="0" tIns="0" rIns="0" bIns="0" rtlCol="0" anchor="ctr"/>
-          <a:lstStyle/>
-          <a:p>
-            <a:pPr indent="0" marL="0">
+        </p:spPr>
+        <p:txBody>
+          <a:bodyPr wrap="square" lIns="0" tIns="0" rIns="0" bIns="0" rtlCol="0" anchor="ctr"/>
+          <a:lstStyle/>
+          <a:p>
+            <a:pPr marL="0" indent="0">
               <a:buNone/>
             </a:pPr>
             <a:r>
@@ -3972,9 +3878,9 @@
                 <a:solidFill>
                   <a:srgbClr val="FFFFFF"/>
                 </a:solidFill>
-                <a:latin typeface="Cambria" pitchFamily="34" charset="0"/>
-                <a:ea typeface="Cambria" pitchFamily="34" charset="-122"/>
-                <a:cs typeface="Cambria" pitchFamily="34" charset="-120"/>
+                <a:latin typeface="Cambria" panose="02040503050406030204" pitchFamily="34" charset="0"/>
+                <a:ea typeface="Cambria" panose="02040503050406030204" pitchFamily="34" charset="-122"/>
+                <a:cs typeface="Cambria" panose="02040503050406030204" pitchFamily="34" charset="-120"/>
               </a:rPr>
               <a:t>Demonstração</a:t>
             </a:r>
@@ -3997,13 +3903,12 @@
             <a:avLst/>
           </a:prstGeom>
           <a:noFill/>
-          <a:ln/>
-        </p:spPr>
-        <p:txBody>
-          <a:bodyPr wrap="square" lIns="0" tIns="0" rIns="0" bIns="0" rtlCol="0" anchor="ctr"/>
-          <a:lstStyle/>
-          <a:p>
-            <a:pPr indent="0" marL="0">
+        </p:spPr>
+        <p:txBody>
+          <a:bodyPr wrap="square" lIns="0" tIns="0" rIns="0" bIns="0" rtlCol="0" anchor="ctr"/>
+          <a:lstStyle/>
+          <a:p>
+            <a:pPr marL="0" indent="0">
               <a:buNone/>
             </a:pPr>
             <a:r>
@@ -4011,9 +3916,9 @@
                 <a:solidFill>
                   <a:srgbClr val="02C39A"/>
                 </a:solidFill>
-                <a:latin typeface="Calibri" pitchFamily="34" charset="0"/>
-                <a:ea typeface="Calibri" pitchFamily="34" charset="-122"/>
-                <a:cs typeface="Calibri" pitchFamily="34" charset="-120"/>
+                <a:latin typeface="Calibri" panose="020F0502020204030204" pitchFamily="34" charset="0"/>
+                <a:ea typeface="Calibri" panose="020F0502020204030204" pitchFamily="34" charset="-122"/>
+                <a:cs typeface="Calibri" panose="020F0502020204030204" pitchFamily="34" charset="-120"/>
               </a:rPr>
               <a:t>Infraestrutura como código, ingestão idempotente, orquestração com dependências explícitas e nenhum segredo versionado.</a:t>
             </a:r>
@@ -4063,13 +3968,12 @@
             <a:avLst/>
           </a:prstGeom>
           <a:noFill/>
-          <a:ln/>
-        </p:spPr>
-        <p:txBody>
-          <a:bodyPr wrap="square" lIns="0" tIns="0" rIns="0" bIns="0" rtlCol="0" anchor="ctr"/>
-          <a:lstStyle/>
-          <a:p>
-            <a:pPr indent="0" marL="0">
+        </p:spPr>
+        <p:txBody>
+          <a:bodyPr wrap="square" lIns="0" tIns="0" rIns="0" bIns="0" rtlCol="0" anchor="ctr"/>
+          <a:lstStyle/>
+          <a:p>
+            <a:pPr marL="0" indent="0">
               <a:buNone/>
             </a:pPr>
             <a:r>
@@ -4077,9 +3981,9 @@
                 <a:solidFill>
                   <a:srgbClr val="02C39A"/>
                 </a:solidFill>
-                <a:latin typeface="Courier New" pitchFamily="34" charset="0"/>
-                <a:ea typeface="Courier New" pitchFamily="34" charset="-122"/>
-                <a:cs typeface="Courier New" pitchFamily="34" charset="-120"/>
+                <a:latin typeface="Courier New" panose="02070309020205020404" pitchFamily="34" charset="0"/>
+                <a:ea typeface="Courier New" panose="02070309020205020404" pitchFamily="34" charset="-122"/>
+                <a:cs typeface="Courier New" panose="02070309020205020404" pitchFamily="34" charset="-120"/>
               </a:rPr>
               <a:t>make up</a:t>
             </a:r>
@@ -4102,13 +4006,12 @@
             <a:avLst/>
           </a:prstGeom>
           <a:noFill/>
-          <a:ln/>
-        </p:spPr>
-        <p:txBody>
-          <a:bodyPr wrap="square" lIns="0" tIns="0" rIns="0" bIns="0" rtlCol="0" anchor="ctr"/>
-          <a:lstStyle/>
-          <a:p>
-            <a:pPr indent="0" marL="0">
+        </p:spPr>
+        <p:txBody>
+          <a:bodyPr wrap="square" lIns="0" tIns="0" rIns="0" bIns="0" rtlCol="0" anchor="ctr"/>
+          <a:lstStyle/>
+          <a:p>
+            <a:pPr marL="0" indent="0">
               <a:buNone/>
             </a:pPr>
             <a:r>
@@ -4116,9 +4019,9 @@
                 <a:solidFill>
                   <a:srgbClr val="9FC9CE"/>
                 </a:solidFill>
-                <a:latin typeface="Calibri" pitchFamily="34" charset="0"/>
-                <a:ea typeface="Calibri" pitchFamily="34" charset="-122"/>
-                <a:cs typeface="Calibri" pitchFamily="34" charset="-120"/>
+                <a:latin typeface="Calibri" panose="020F0502020204030204" pitchFamily="34" charset="0"/>
+                <a:ea typeface="Calibri" panose="020F0502020204030204" pitchFamily="34" charset="-122"/>
+                <a:cs typeface="Calibri" panose="020F0502020204030204" pitchFamily="34" charset="-120"/>
               </a:rPr>
               <a:t>sobe o ambiente do zero</a:t>
             </a:r>
@@ -4168,13 +4071,12 @@
             <a:avLst/>
           </a:prstGeom>
           <a:noFill/>
-          <a:ln/>
-        </p:spPr>
-        <p:txBody>
-          <a:bodyPr wrap="square" lIns="0" tIns="0" rIns="0" bIns="0" rtlCol="0" anchor="ctr"/>
-          <a:lstStyle/>
-          <a:p>
-            <a:pPr indent="0" marL="0">
+        </p:spPr>
+        <p:txBody>
+          <a:bodyPr wrap="square" lIns="0" tIns="0" rIns="0" bIns="0" rtlCol="0" anchor="ctr"/>
+          <a:lstStyle/>
+          <a:p>
+            <a:pPr marL="0" indent="0">
               <a:buNone/>
             </a:pPr>
             <a:r>
@@ -4182,9 +4084,9 @@
                 <a:solidFill>
                   <a:srgbClr val="02C39A"/>
                 </a:solidFill>
-                <a:latin typeface="Courier New" pitchFamily="34" charset="0"/>
-                <a:ea typeface="Courier New" pitchFamily="34" charset="-122"/>
-                <a:cs typeface="Courier New" pitchFamily="34" charset="-120"/>
+                <a:latin typeface="Courier New" panose="02070309020205020404" pitchFamily="34" charset="0"/>
+                <a:ea typeface="Courier New" panose="02070309020205020404" pitchFamily="34" charset="-122"/>
+                <a:cs typeface="Courier New" panose="02070309020205020404" pitchFamily="34" charset="-120"/>
               </a:rPr>
               <a:t>make run-dag</a:t>
             </a:r>
@@ -4207,13 +4109,12 @@
             <a:avLst/>
           </a:prstGeom>
           <a:noFill/>
-          <a:ln/>
-        </p:spPr>
-        <p:txBody>
-          <a:bodyPr wrap="square" lIns="0" tIns="0" rIns="0" bIns="0" rtlCol="0" anchor="ctr"/>
-          <a:lstStyle/>
-          <a:p>
-            <a:pPr indent="0" marL="0">
+        </p:spPr>
+        <p:txBody>
+          <a:bodyPr wrap="square" lIns="0" tIns="0" rIns="0" bIns="0" rtlCol="0" anchor="ctr"/>
+          <a:lstStyle/>
+          <a:p>
+            <a:pPr marL="0" indent="0">
               <a:buNone/>
             </a:pPr>
             <a:r>
@@ -4221,9 +4122,9 @@
                 <a:solidFill>
                   <a:srgbClr val="9FC9CE"/>
                 </a:solidFill>
-                <a:latin typeface="Calibri" pitchFamily="34" charset="0"/>
-                <a:ea typeface="Calibri" pitchFamily="34" charset="-122"/>
-                <a:cs typeface="Calibri" pitchFamily="34" charset="-120"/>
+                <a:latin typeface="Calibri" panose="020F0502020204030204" pitchFamily="34" charset="0"/>
+                <a:ea typeface="Calibri" panose="020F0502020204030204" pitchFamily="34" charset="-122"/>
+                <a:cs typeface="Calibri" panose="020F0502020204030204" pitchFamily="34" charset="-120"/>
               </a:rPr>
               <a:t>ativa e dispara a DAG</a:t>
             </a:r>
@@ -4273,13 +4174,12 @@
             <a:avLst/>
           </a:prstGeom>
           <a:noFill/>
-          <a:ln/>
-        </p:spPr>
-        <p:txBody>
-          <a:bodyPr wrap="square" lIns="0" tIns="0" rIns="0" bIns="0" rtlCol="0" anchor="ctr"/>
-          <a:lstStyle/>
-          <a:p>
-            <a:pPr indent="0" marL="0">
+        </p:spPr>
+        <p:txBody>
+          <a:bodyPr wrap="square" lIns="0" tIns="0" rIns="0" bIns="0" rtlCol="0" anchor="ctr"/>
+          <a:lstStyle/>
+          <a:p>
+            <a:pPr marL="0" indent="0">
               <a:buNone/>
             </a:pPr>
             <a:r>
@@ -4287,9 +4187,9 @@
                 <a:solidFill>
                   <a:srgbClr val="02C39A"/>
                 </a:solidFill>
-                <a:latin typeface="Courier New" pitchFamily="34" charset="0"/>
-                <a:ea typeface="Courier New" pitchFamily="34" charset="-122"/>
-                <a:cs typeface="Courier New" pitchFamily="34" charset="-120"/>
+                <a:latin typeface="Courier New" panose="02070309020205020404" pitchFamily="34" charset="0"/>
+                <a:ea typeface="Courier New" panose="02070309020205020404" pitchFamily="34" charset="-122"/>
+                <a:cs typeface="Courier New" panose="02070309020205020404" pitchFamily="34" charset="-120"/>
               </a:rPr>
               <a:t>make verify</a:t>
             </a:r>
@@ -4312,13 +4212,12 @@
             <a:avLst/>
           </a:prstGeom>
           <a:noFill/>
-          <a:ln/>
-        </p:spPr>
-        <p:txBody>
-          <a:bodyPr wrap="square" lIns="0" tIns="0" rIns="0" bIns="0" rtlCol="0" anchor="ctr"/>
-          <a:lstStyle/>
-          <a:p>
-            <a:pPr indent="0" marL="0">
+        </p:spPr>
+        <p:txBody>
+          <a:bodyPr wrap="square" lIns="0" tIns="0" rIns="0" bIns="0" rtlCol="0" anchor="ctr"/>
+          <a:lstStyle/>
+          <a:p>
+            <a:pPr marL="0" indent="0">
               <a:buNone/>
             </a:pPr>
             <a:r>
@@ -4326,9 +4225,9 @@
                 <a:solidFill>
                   <a:srgbClr val="9FC9CE"/>
                 </a:solidFill>
-                <a:latin typeface="Calibri" pitchFamily="34" charset="0"/>
-                <a:ea typeface="Calibri" pitchFamily="34" charset="-122"/>
-                <a:cs typeface="Calibri" pitchFamily="34" charset="-120"/>
+                <a:latin typeface="Calibri" panose="020F0502020204030204" pitchFamily="34" charset="0"/>
+                <a:ea typeface="Calibri" panose="020F0502020204030204" pitchFamily="34" charset="-122"/>
+                <a:cs typeface="Calibri" panose="020F0502020204030204" pitchFamily="34" charset="-120"/>
               </a:rPr>
               <a:t>confere os dados no Data Warehouse</a:t>
             </a:r>
@@ -4378,13 +4277,12 @@
             <a:avLst/>
           </a:prstGeom>
           <a:noFill/>
-          <a:ln/>
-        </p:spPr>
-        <p:txBody>
-          <a:bodyPr wrap="square" lIns="0" tIns="0" rIns="0" bIns="0" rtlCol="0" anchor="ctr"/>
-          <a:lstStyle/>
-          <a:p>
-            <a:pPr indent="0" marL="0">
+        </p:spPr>
+        <p:txBody>
+          <a:bodyPr wrap="square" lIns="0" tIns="0" rIns="0" bIns="0" rtlCol="0" anchor="ctr"/>
+          <a:lstStyle/>
+          <a:p>
+            <a:pPr marL="0" indent="0">
               <a:buNone/>
             </a:pPr>
             <a:r>
@@ -4392,9 +4290,9 @@
                 <a:solidFill>
                   <a:srgbClr val="02C39A"/>
                 </a:solidFill>
-                <a:latin typeface="Courier New" pitchFamily="34" charset="0"/>
-                <a:ea typeface="Courier New" pitchFamily="34" charset="-122"/>
-                <a:cs typeface="Courier New" pitchFamily="34" charset="-120"/>
+                <a:latin typeface="Courier New" panose="02070309020205020404" pitchFamily="34" charset="0"/>
+                <a:ea typeface="Courier New" panose="02070309020205020404" pitchFamily="34" charset="-122"/>
+                <a:cs typeface="Courier New" panose="02070309020205020404" pitchFamily="34" charset="-120"/>
               </a:rPr>
               <a:t>make datalake</a:t>
             </a:r>
@@ -4417,13 +4315,12 @@
             <a:avLst/>
           </a:prstGeom>
           <a:noFill/>
-          <a:ln/>
-        </p:spPr>
-        <p:txBody>
-          <a:bodyPr wrap="square" lIns="0" tIns="0" rIns="0" bIns="0" rtlCol="0" anchor="ctr"/>
-          <a:lstStyle/>
-          <a:p>
-            <a:pPr indent="0" marL="0">
+        </p:spPr>
+        <p:txBody>
+          <a:bodyPr wrap="square" lIns="0" tIns="0" rIns="0" bIns="0" rtlCol="0" anchor="ctr"/>
+          <a:lstStyle/>
+          <a:p>
+            <a:pPr marL="0" indent="0">
               <a:buNone/>
             </a:pPr>
             <a:r>
@@ -4431,9 +4328,9 @@
                 <a:solidFill>
                   <a:srgbClr val="9FC9CE"/>
                 </a:solidFill>
-                <a:latin typeface="Calibri" pitchFamily="34" charset="0"/>
-                <a:ea typeface="Calibri" pitchFamily="34" charset="-122"/>
-                <a:cs typeface="Calibri" pitchFamily="34" charset="-120"/>
+                <a:latin typeface="Calibri" panose="020F0502020204030204" pitchFamily="34" charset="0"/>
+                <a:ea typeface="Calibri" panose="020F0502020204030204" pitchFamily="34" charset="-122"/>
+                <a:cs typeface="Calibri" panose="020F0502020204030204" pitchFamily="34" charset="-120"/>
               </a:rPr>
               <a:t>lista os objetos no MinIO</a:t>
             </a:r>
@@ -4456,13 +4353,12 @@
             <a:avLst/>
           </a:prstGeom>
           <a:noFill/>
-          <a:ln/>
-        </p:spPr>
-        <p:txBody>
-          <a:bodyPr wrap="square" lIns="0" tIns="0" rIns="0" bIns="0" rtlCol="0" anchor="ctr"/>
-          <a:lstStyle/>
-          <a:p>
-            <a:pPr indent="0" marL="0">
+        </p:spPr>
+        <p:txBody>
+          <a:bodyPr wrap="square" lIns="0" tIns="0" rIns="0" bIns="0" rtlCol="0" anchor="ctr"/>
+          <a:lstStyle/>
+          <a:p>
+            <a:pPr marL="0" indent="0">
               <a:buNone/>
             </a:pPr>
             <a:r>
@@ -4470,9 +4366,9 @@
                 <a:solidFill>
                   <a:srgbClr val="7FA9AF"/>
                 </a:solidFill>
-                <a:latin typeface="Calibri" pitchFamily="34" charset="0"/>
-                <a:ea typeface="Calibri" pitchFamily="34" charset="-122"/>
-                <a:cs typeface="Calibri" pitchFamily="34" charset="-120"/>
+                <a:latin typeface="Calibri" panose="020F0502020204030204" pitchFamily="34" charset="0"/>
+                <a:ea typeface="Calibri" panose="020F0502020204030204" pitchFamily="34" charset="-122"/>
+                <a:cs typeface="Calibri" panose="020F0502020204030204" pitchFamily="34" charset="-120"/>
               </a:rPr>
               <a:t>github.com/dwsilva/de_cert_indicium</a:t>
             </a:r>
@@ -4495,13 +4391,12 @@
             <a:avLst/>
           </a:prstGeom>
           <a:noFill/>
-          <a:ln/>
-        </p:spPr>
-        <p:txBody>
-          <a:bodyPr wrap="square" lIns="0" tIns="0" rIns="0" bIns="0" rtlCol="0" anchor="ctr"/>
-          <a:lstStyle/>
-          <a:p>
-            <a:pPr algn="r" indent="0" marL="0">
+        </p:spPr>
+        <p:txBody>
+          <a:bodyPr wrap="square" lIns="0" tIns="0" rIns="0" bIns="0" rtlCol="0" anchor="ctr"/>
+          <a:lstStyle/>
+          <a:p>
+            <a:pPr marL="0" indent="0" algn="r">
               <a:buNone/>
             </a:pPr>
             <a:r>
@@ -4509,9 +4404,9 @@
                 <a:solidFill>
                   <a:srgbClr val="17414D"/>
                 </a:solidFill>
-                <a:latin typeface="Calibri" pitchFamily="34" charset="0"/>
-                <a:ea typeface="Calibri" pitchFamily="34" charset="-122"/>
-                <a:cs typeface="Calibri" pitchFamily="34" charset="-120"/>
+                <a:latin typeface="Calibri" panose="020F0502020204030204" pitchFamily="34" charset="0"/>
+                <a:ea typeface="Calibri" panose="020F0502020204030204" pitchFamily="34" charset="-122"/>
+                <a:cs typeface="Calibri" panose="020F0502020204030204" pitchFamily="34" charset="-120"/>
               </a:rPr>
               <a:t>12</a:t>
             </a:r>
@@ -4529,12 +4424,13 @@
 
 <file path=ppt/slides/slide2.xml><?xml version="1.0" encoding="utf-8"?>
 <p:sld xmlns:a="http://schemas.openxmlformats.org/drawingml/2006/main" xmlns:r="http://schemas.openxmlformats.org/officeDocument/2006/relationships" xmlns:p="http://schemas.openxmlformats.org/presentationml/2006/main">
-  <p:cSld name="Slide 2">
+  <p:cSld>
     <p:bg>
       <p:bgPr>
         <a:solidFill>
           <a:srgbClr val="FFFFFF"/>
         </a:solidFill>
+        <a:effectLst/>
       </p:bgPr>
     </p:bg>
     <p:spTree>
@@ -4566,13 +4462,12 @@
             <a:avLst/>
           </a:prstGeom>
           <a:noFill/>
-          <a:ln/>
-        </p:spPr>
-        <p:txBody>
-          <a:bodyPr wrap="square" lIns="0" tIns="0" rIns="0" bIns="0" rtlCol="0" anchor="ctr"/>
-          <a:lstStyle/>
-          <a:p>
-            <a:pPr indent="0" marL="0">
+        </p:spPr>
+        <p:txBody>
+          <a:bodyPr wrap="square" lIns="0" tIns="0" rIns="0" bIns="0" rtlCol="0" anchor="ctr"/>
+          <a:lstStyle/>
+          <a:p>
+            <a:pPr marL="0" indent="0">
               <a:buNone/>
             </a:pPr>
             <a:r>
@@ -4580,9 +4475,9 @@
                 <a:solidFill>
                   <a:srgbClr val="0E2A33"/>
                 </a:solidFill>
-                <a:latin typeface="Cambria" pitchFamily="34" charset="0"/>
-                <a:ea typeface="Cambria" pitchFamily="34" charset="-122"/>
-                <a:cs typeface="Cambria" pitchFamily="34" charset="-120"/>
+                <a:latin typeface="Cambria" panose="02040503050406030204" pitchFamily="34" charset="0"/>
+                <a:ea typeface="Cambria" panose="02040503050406030204" pitchFamily="34" charset="-122"/>
+                <a:cs typeface="Cambria" panose="02040503050406030204" pitchFamily="34" charset="-120"/>
               </a:rPr>
               <a:t>O problema</a:t>
             </a:r>
@@ -4605,13 +4500,12 @@
             <a:avLst/>
           </a:prstGeom>
           <a:noFill/>
-          <a:ln/>
         </p:spPr>
         <p:txBody>
           <a:bodyPr wrap="square" lIns="0" tIns="0" rIns="0" bIns="0" rtlCol="0" anchor="t"/>
           <a:lstStyle/>
           <a:p>
-            <a:pPr indent="0" marL="0">
+            <a:pPr marL="0" indent="0">
               <a:buNone/>
             </a:pPr>
             <a:r>
@@ -4619,9 +4513,9 @@
                 <a:solidFill>
                   <a:srgbClr val="5F7278"/>
                 </a:solidFill>
-                <a:latin typeface="Calibri" pitchFamily="34" charset="0"/>
-                <a:ea typeface="Calibri" pitchFamily="34" charset="-122"/>
-                <a:cs typeface="Calibri" pitchFamily="34" charset="-120"/>
+                <a:latin typeface="Calibri" panose="020F0502020204030204" pitchFamily="34" charset="0"/>
+                <a:ea typeface="Calibri" panose="020F0502020204030204" pitchFamily="34" charset="-122"/>
+                <a:cs typeface="Calibri" panose="020F0502020204030204" pitchFamily="34" charset="-120"/>
               </a:rPr>
               <a:t>O BanVic decide por dados sem ter os dados no lugar certo.</a:t>
             </a:r>
@@ -4669,13 +4563,12 @@
             <a:avLst/>
           </a:prstGeom>
           <a:noFill/>
-          <a:ln/>
-        </p:spPr>
-        <p:txBody>
-          <a:bodyPr wrap="square" lIns="0" tIns="0" rIns="0" bIns="0" rtlCol="0" anchor="ctr"/>
-          <a:lstStyle/>
-          <a:p>
-            <a:pPr algn="ctr" indent="0" marL="0">
+        </p:spPr>
+        <p:txBody>
+          <a:bodyPr wrap="square" lIns="0" tIns="0" rIns="0" bIns="0" rtlCol="0" anchor="ctr"/>
+          <a:lstStyle/>
+          <a:p>
+            <a:pPr marL="0" indent="0" algn="ctr">
               <a:buNone/>
             </a:pPr>
             <a:r>
@@ -4683,9 +4576,9 @@
                 <a:solidFill>
                   <a:srgbClr val="FFFFFF"/>
                 </a:solidFill>
-                <a:latin typeface="Calibri" pitchFamily="34" charset="0"/>
-                <a:ea typeface="Calibri" pitchFamily="34" charset="-122"/>
-                <a:cs typeface="Calibri" pitchFamily="34" charset="-120"/>
+                <a:latin typeface="Calibri" panose="020F0502020204030204" pitchFamily="34" charset="0"/>
+                <a:ea typeface="Calibri" panose="020F0502020204030204" pitchFamily="34" charset="-122"/>
+                <a:cs typeface="Calibri" panose="020F0502020204030204" pitchFamily="34" charset="-120"/>
               </a:rPr>
               <a:t>1</a:t>
             </a:r>
@@ -4708,13 +4601,12 @@
             <a:avLst/>
           </a:prstGeom>
           <a:noFill/>
-          <a:ln/>
-        </p:spPr>
-        <p:txBody>
-          <a:bodyPr wrap="square" lIns="0" tIns="0" rIns="0" bIns="0" rtlCol="0" anchor="ctr"/>
-          <a:lstStyle/>
-          <a:p>
-            <a:pPr indent="0" marL="0">
+        </p:spPr>
+        <p:txBody>
+          <a:bodyPr wrap="square" lIns="0" tIns="0" rIns="0" bIns="0" rtlCol="0" anchor="ctr"/>
+          <a:lstStyle/>
+          <a:p>
+            <a:pPr marL="0" indent="0">
               <a:buNone/>
             </a:pPr>
             <a:r>
@@ -4722,9 +4614,9 @@
                 <a:solidFill>
                   <a:srgbClr val="0E2A33"/>
                 </a:solidFill>
-                <a:latin typeface="Calibri" pitchFamily="34" charset="0"/>
-                <a:ea typeface="Calibri" pitchFamily="34" charset="-122"/>
-                <a:cs typeface="Calibri" pitchFamily="34" charset="-120"/>
+                <a:latin typeface="Calibri" panose="020F0502020204030204" pitchFamily="34" charset="0"/>
+                <a:ea typeface="Calibri" panose="020F0502020204030204" pitchFamily="34" charset="-122"/>
+                <a:cs typeface="Calibri" panose="020F0502020204030204" pitchFamily="34" charset="-120"/>
               </a:rPr>
               <a:t>Análise manual</a:t>
             </a:r>
@@ -4747,13 +4639,12 @@
             <a:avLst/>
           </a:prstGeom>
           <a:noFill/>
-          <a:ln/>
-        </p:spPr>
-        <p:txBody>
-          <a:bodyPr wrap="square" lIns="0" tIns="0" rIns="0" bIns="0" rtlCol="0" anchor="ctr"/>
-          <a:lstStyle/>
-          <a:p>
-            <a:pPr indent="0" marL="0">
+        </p:spPr>
+        <p:txBody>
+          <a:bodyPr wrap="square" lIns="0" tIns="0" rIns="0" bIns="0" rtlCol="0" anchor="ctr"/>
+          <a:lstStyle/>
+          <a:p>
+            <a:pPr marL="0" indent="0">
               <a:buNone/>
             </a:pPr>
             <a:r>
@@ -4761,9 +4652,9 @@
                 <a:solidFill>
                   <a:srgbClr val="5F7278"/>
                 </a:solidFill>
-                <a:latin typeface="Calibri" pitchFamily="34" charset="0"/>
-                <a:ea typeface="Calibri" pitchFamily="34" charset="-122"/>
-                <a:cs typeface="Calibri" pitchFamily="34" charset="-120"/>
+                <a:latin typeface="Calibri" panose="020F0502020204030204" pitchFamily="34" charset="0"/>
+                <a:ea typeface="Calibri" panose="020F0502020204030204" pitchFamily="34" charset="-122"/>
+                <a:cs typeface="Calibri" panose="020F0502020204030204" pitchFamily="34" charset="-120"/>
               </a:rPr>
               <a:t>Planilhas e apresentações; nenhuma ferramenta de BI em uso.</a:t>
             </a:r>
@@ -4811,13 +4702,12 @@
             <a:avLst/>
           </a:prstGeom>
           <a:noFill/>
-          <a:ln/>
-        </p:spPr>
-        <p:txBody>
-          <a:bodyPr wrap="square" lIns="0" tIns="0" rIns="0" bIns="0" rtlCol="0" anchor="ctr"/>
-          <a:lstStyle/>
-          <a:p>
-            <a:pPr algn="ctr" indent="0" marL="0">
+        </p:spPr>
+        <p:txBody>
+          <a:bodyPr wrap="square" lIns="0" tIns="0" rIns="0" bIns="0" rtlCol="0" anchor="ctr"/>
+          <a:lstStyle/>
+          <a:p>
+            <a:pPr marL="0" indent="0" algn="ctr">
               <a:buNone/>
             </a:pPr>
             <a:r>
@@ -4825,9 +4715,9 @@
                 <a:solidFill>
                   <a:srgbClr val="FFFFFF"/>
                 </a:solidFill>
-                <a:latin typeface="Calibri" pitchFamily="34" charset="0"/>
-                <a:ea typeface="Calibri" pitchFamily="34" charset="-122"/>
-                <a:cs typeface="Calibri" pitchFamily="34" charset="-120"/>
+                <a:latin typeface="Calibri" panose="020F0502020204030204" pitchFamily="34" charset="0"/>
+                <a:ea typeface="Calibri" panose="020F0502020204030204" pitchFamily="34" charset="-122"/>
+                <a:cs typeface="Calibri" panose="020F0502020204030204" pitchFamily="34" charset="-120"/>
               </a:rPr>
               <a:t>2</a:t>
             </a:r>
@@ -4850,13 +4740,12 @@
             <a:avLst/>
           </a:prstGeom>
           <a:noFill/>
-          <a:ln/>
-        </p:spPr>
-        <p:txBody>
-          <a:bodyPr wrap="square" lIns="0" tIns="0" rIns="0" bIns="0" rtlCol="0" anchor="ctr"/>
-          <a:lstStyle/>
-          <a:p>
-            <a:pPr indent="0" marL="0">
+        </p:spPr>
+        <p:txBody>
+          <a:bodyPr wrap="square" lIns="0" tIns="0" rIns="0" bIns="0" rtlCol="0" anchor="ctr"/>
+          <a:lstStyle/>
+          <a:p>
+            <a:pPr marL="0" indent="0">
               <a:buNone/>
             </a:pPr>
             <a:r>
@@ -4864,9 +4753,9 @@
                 <a:solidFill>
                   <a:srgbClr val="0E2A33"/>
                 </a:solidFill>
-                <a:latin typeface="Calibri" pitchFamily="34" charset="0"/>
-                <a:ea typeface="Calibri" pitchFamily="34" charset="-122"/>
-                <a:cs typeface="Calibri" pitchFamily="34" charset="-120"/>
+                <a:latin typeface="Calibri" panose="020F0502020204030204" pitchFamily="34" charset="0"/>
+                <a:ea typeface="Calibri" panose="020F0502020204030204" pitchFamily="34" charset="-122"/>
+                <a:cs typeface="Calibri" panose="020F0502020204030204" pitchFamily="34" charset="-120"/>
               </a:rPr>
               <a:t>Dado preso na origem</a:t>
             </a:r>
@@ -4889,13 +4778,12 @@
             <a:avLst/>
           </a:prstGeom>
           <a:noFill/>
-          <a:ln/>
-        </p:spPr>
-        <p:txBody>
-          <a:bodyPr wrap="square" lIns="0" tIns="0" rIns="0" bIns="0" rtlCol="0" anchor="ctr"/>
-          <a:lstStyle/>
-          <a:p>
-            <a:pPr indent="0" marL="0">
+        </p:spPr>
+        <p:txBody>
+          <a:bodyPr wrap="square" lIns="0" tIns="0" rIns="0" bIns="0" rtlCol="0" anchor="ctr"/>
+          <a:lstStyle/>
+          <a:p>
+            <a:pPr marL="0" indent="0">
               <a:buNone/>
             </a:pPr>
             <a:r>
@@ -4903,9 +4791,9 @@
                 <a:solidFill>
                   <a:srgbClr val="5F7278"/>
                 </a:solidFill>
-                <a:latin typeface="Calibri" pitchFamily="34" charset="0"/>
-                <a:ea typeface="Calibri" pitchFamily="34" charset="-122"/>
-                <a:cs typeface="Calibri" pitchFamily="34" charset="-120"/>
+                <a:latin typeface="Calibri" panose="020F0502020204030204" pitchFamily="34" charset="0"/>
+                <a:ea typeface="Calibri" panose="020F0502020204030204" pitchFamily="34" charset="-122"/>
+                <a:cs typeface="Calibri" panose="020F0502020204030204" pitchFamily="34" charset="-120"/>
               </a:rPr>
               <a:t>ERP, CRM e marketing em sistemas separados, sem ponto único de consulta.</a:t>
             </a:r>
@@ -4953,13 +4841,12 @@
             <a:avLst/>
           </a:prstGeom>
           <a:noFill/>
-          <a:ln/>
-        </p:spPr>
-        <p:txBody>
-          <a:bodyPr wrap="square" lIns="0" tIns="0" rIns="0" bIns="0" rtlCol="0" anchor="ctr"/>
-          <a:lstStyle/>
-          <a:p>
-            <a:pPr algn="ctr" indent="0" marL="0">
+        </p:spPr>
+        <p:txBody>
+          <a:bodyPr wrap="square" lIns="0" tIns="0" rIns="0" bIns="0" rtlCol="0" anchor="ctr"/>
+          <a:lstStyle/>
+          <a:p>
+            <a:pPr marL="0" indent="0" algn="ctr">
               <a:buNone/>
             </a:pPr>
             <a:r>
@@ -4967,9 +4854,9 @@
                 <a:solidFill>
                   <a:srgbClr val="FFFFFF"/>
                 </a:solidFill>
-                <a:latin typeface="Calibri" pitchFamily="34" charset="0"/>
-                <a:ea typeface="Calibri" pitchFamily="34" charset="-122"/>
-                <a:cs typeface="Calibri" pitchFamily="34" charset="-120"/>
+                <a:latin typeface="Calibri" panose="020F0502020204030204" pitchFamily="34" charset="0"/>
+                <a:ea typeface="Calibri" panose="020F0502020204030204" pitchFamily="34" charset="-122"/>
+                <a:cs typeface="Calibri" panose="020F0502020204030204" pitchFamily="34" charset="-120"/>
               </a:rPr>
               <a:t>3</a:t>
             </a:r>
@@ -4992,13 +4879,12 @@
             <a:avLst/>
           </a:prstGeom>
           <a:noFill/>
-          <a:ln/>
-        </p:spPr>
-        <p:txBody>
-          <a:bodyPr wrap="square" lIns="0" tIns="0" rIns="0" bIns="0" rtlCol="0" anchor="ctr"/>
-          <a:lstStyle/>
-          <a:p>
-            <a:pPr indent="0" marL="0">
+        </p:spPr>
+        <p:txBody>
+          <a:bodyPr wrap="square" lIns="0" tIns="0" rIns="0" bIns="0" rtlCol="0" anchor="ctr"/>
+          <a:lstStyle/>
+          <a:p>
+            <a:pPr marL="0" indent="0">
               <a:buNone/>
             </a:pPr>
             <a:r>
@@ -5006,9 +4892,9 @@
                 <a:solidFill>
                   <a:srgbClr val="0E2A33"/>
                 </a:solidFill>
-                <a:latin typeface="Calibri" pitchFamily="34" charset="0"/>
-                <a:ea typeface="Calibri" pitchFamily="34" charset="-122"/>
-                <a:cs typeface="Calibri" pitchFamily="34" charset="-120"/>
+                <a:latin typeface="Calibri" panose="020F0502020204030204" pitchFamily="34" charset="0"/>
+                <a:ea typeface="Calibri" panose="020F0502020204030204" pitchFamily="34" charset="-122"/>
+                <a:cs typeface="Calibri" panose="020F0502020204030204" pitchFamily="34" charset="-120"/>
               </a:rPr>
               <a:t>Risco operacional</a:t>
             </a:r>
@@ -5031,13 +4917,12 @@
             <a:avLst/>
           </a:prstGeom>
           <a:noFill/>
-          <a:ln/>
-        </p:spPr>
-        <p:txBody>
-          <a:bodyPr wrap="square" lIns="0" tIns="0" rIns="0" bIns="0" rtlCol="0" anchor="ctr"/>
-          <a:lstStyle/>
-          <a:p>
-            <a:pPr indent="0" marL="0">
+        </p:spPr>
+        <p:txBody>
+          <a:bodyPr wrap="square" lIns="0" tIns="0" rIns="0" bIns="0" rtlCol="0" anchor="ctr"/>
+          <a:lstStyle/>
+          <a:p>
+            <a:pPr marL="0" indent="0">
               <a:buNone/>
             </a:pPr>
             <a:r>
@@ -5045,9 +4930,9 @@
                 <a:solidFill>
                   <a:srgbClr val="5F7278"/>
                 </a:solidFill>
-                <a:latin typeface="Calibri" pitchFamily="34" charset="0"/>
-                <a:ea typeface="Calibri" pitchFamily="34" charset="-122"/>
-                <a:cs typeface="Calibri" pitchFamily="34" charset="-120"/>
+                <a:latin typeface="Calibri" panose="020F0502020204030204" pitchFamily="34" charset="0"/>
+                <a:ea typeface="Calibri" panose="020F0502020204030204" pitchFamily="34" charset="-122"/>
+                <a:cs typeface="Calibri" panose="020F0502020204030204" pitchFamily="34" charset="-120"/>
               </a:rPr>
               <a:t>A equipe do André repete extrações à mão, com o erro humano que isso carrega.</a:t>
             </a:r>
@@ -5095,13 +4980,12 @@
             <a:avLst/>
           </a:prstGeom>
           <a:noFill/>
-          <a:ln/>
-        </p:spPr>
-        <p:txBody>
-          <a:bodyPr wrap="square" lIns="0" tIns="0" rIns="0" bIns="0" rtlCol="0" anchor="ctr"/>
-          <a:lstStyle/>
-          <a:p>
-            <a:pPr algn="ctr" indent="0" marL="0">
+        </p:spPr>
+        <p:txBody>
+          <a:bodyPr wrap="square" lIns="0" tIns="0" rIns="0" bIns="0" rtlCol="0" anchor="ctr"/>
+          <a:lstStyle/>
+          <a:p>
+            <a:pPr marL="0" indent="0" algn="ctr">
               <a:buNone/>
             </a:pPr>
             <a:r>
@@ -5109,9 +4993,9 @@
                 <a:solidFill>
                   <a:srgbClr val="FFFFFF"/>
                 </a:solidFill>
-                <a:latin typeface="Calibri" pitchFamily="34" charset="0"/>
-                <a:ea typeface="Calibri" pitchFamily="34" charset="-122"/>
-                <a:cs typeface="Calibri" pitchFamily="34" charset="-120"/>
+                <a:latin typeface="Calibri" panose="020F0502020204030204" pitchFamily="34" charset="0"/>
+                <a:ea typeface="Calibri" panose="020F0502020204030204" pitchFamily="34" charset="-122"/>
+                <a:cs typeface="Calibri" panose="020F0502020204030204" pitchFamily="34" charset="-120"/>
               </a:rPr>
               <a:t>4</a:t>
             </a:r>
@@ -5134,13 +5018,12 @@
             <a:avLst/>
           </a:prstGeom>
           <a:noFill/>
-          <a:ln/>
-        </p:spPr>
-        <p:txBody>
-          <a:bodyPr wrap="square" lIns="0" tIns="0" rIns="0" bIns="0" rtlCol="0" anchor="ctr"/>
-          <a:lstStyle/>
-          <a:p>
-            <a:pPr indent="0" marL="0">
+        </p:spPr>
+        <p:txBody>
+          <a:bodyPr wrap="square" lIns="0" tIns="0" rIns="0" bIns="0" rtlCol="0" anchor="ctr"/>
+          <a:lstStyle/>
+          <a:p>
+            <a:pPr marL="0" indent="0">
               <a:buNone/>
             </a:pPr>
             <a:r>
@@ -5148,9 +5031,9 @@
                 <a:solidFill>
                   <a:srgbClr val="0E2A33"/>
                 </a:solidFill>
-                <a:latin typeface="Calibri" pitchFamily="34" charset="0"/>
-                <a:ea typeface="Calibri" pitchFamily="34" charset="-122"/>
-                <a:cs typeface="Calibri" pitchFamily="34" charset="-120"/>
+                <a:latin typeface="Calibri" panose="020F0502020204030204" pitchFamily="34" charset="0"/>
+                <a:ea typeface="Calibri" panose="020F0502020204030204" pitchFamily="34" charset="-122"/>
+                <a:cs typeface="Calibri" panose="020F0502020204030204" pitchFamily="34" charset="-120"/>
               </a:rPr>
               <a:t>Piloto travado</a:t>
             </a:r>
@@ -5173,13 +5056,12 @@
             <a:avLst/>
           </a:prstGeom>
           <a:noFill/>
-          <a:ln/>
-        </p:spPr>
-        <p:txBody>
-          <a:bodyPr wrap="square" lIns="0" tIns="0" rIns="0" bIns="0" rtlCol="0" anchor="ctr"/>
-          <a:lstStyle/>
-          <a:p>
-            <a:pPr indent="0" marL="0">
+        </p:spPr>
+        <p:txBody>
+          <a:bodyPr wrap="square" lIns="0" tIns="0" rIns="0" bIns="0" rtlCol="0" anchor="ctr"/>
+          <a:lstStyle/>
+          <a:p>
+            <a:pPr marL="0" indent="0">
               <a:buNone/>
             </a:pPr>
             <a:r>
@@ -5187,9 +5069,9 @@
                 <a:solidFill>
                   <a:srgbClr val="5F7278"/>
                 </a:solidFill>
-                <a:latin typeface="Calibri" pitchFamily="34" charset="0"/>
-                <a:ea typeface="Calibri" pitchFamily="34" charset="-122"/>
-                <a:cs typeface="Calibri" pitchFamily="34" charset="-120"/>
+                <a:latin typeface="Calibri" panose="020F0502020204030204" pitchFamily="34" charset="0"/>
+                <a:ea typeface="Calibri" panose="020F0502020204030204" pitchFamily="34" charset="-122"/>
+                <a:cs typeface="Calibri" panose="020F0502020204030204" pitchFamily="34" charset="-120"/>
               </a:rPr>
               <a:t>O projeto de crédito do Lucas precisa de base confiável para provar valor.</a:t>
             </a:r>
@@ -5239,13 +5121,12 @@
             <a:avLst/>
           </a:prstGeom>
           <a:noFill/>
-          <a:ln/>
-        </p:spPr>
-        <p:txBody>
-          <a:bodyPr wrap="square" lIns="0" tIns="0" rIns="0" bIns="0" rtlCol="0" anchor="ctr"/>
-          <a:lstStyle/>
-          <a:p>
-            <a:pPr indent="0" marL="0">
+        </p:spPr>
+        <p:txBody>
+          <a:bodyPr wrap="square" lIns="0" tIns="0" rIns="0" bIns="0" rtlCol="0" anchor="ctr"/>
+          <a:lstStyle/>
+          <a:p>
+            <a:pPr marL="0" indent="0">
               <a:buNone/>
             </a:pPr>
             <a:r>
@@ -5253,9 +5134,9 @@
                 <a:solidFill>
                   <a:srgbClr val="17414D"/>
                 </a:solidFill>
-                <a:latin typeface="Calibri" pitchFamily="34" charset="0"/>
-                <a:ea typeface="Calibri" pitchFamily="34" charset="-122"/>
-                <a:cs typeface="Calibri" pitchFamily="34" charset="-120"/>
+                <a:latin typeface="Calibri" panose="020F0502020204030204" pitchFamily="34" charset="0"/>
+                <a:ea typeface="Calibri" panose="020F0502020204030204" pitchFamily="34" charset="-122"/>
+                <a:cs typeface="Calibri" panose="020F0502020204030204" pitchFamily="34" charset="-120"/>
               </a:rPr>
               <a:t>A POC entrega o caminho automatizado, reprodutível e auditável do ERP até um ambiente único de consulta.</a:t>
             </a:r>
@@ -5278,13 +5159,12 @@
             <a:avLst/>
           </a:prstGeom>
           <a:noFill/>
-          <a:ln/>
-        </p:spPr>
-        <p:txBody>
-          <a:bodyPr wrap="square" lIns="0" tIns="0" rIns="0" bIns="0" rtlCol="0" anchor="ctr"/>
-          <a:lstStyle/>
-          <a:p>
-            <a:pPr algn="r" indent="0" marL="0">
+        </p:spPr>
+        <p:txBody>
+          <a:bodyPr wrap="square" lIns="0" tIns="0" rIns="0" bIns="0" rtlCol="0" anchor="ctr"/>
+          <a:lstStyle/>
+          <a:p>
+            <a:pPr marL="0" indent="0" algn="r">
               <a:buNone/>
             </a:pPr>
             <a:r>
@@ -5292,9 +5172,9 @@
                 <a:solidFill>
                   <a:srgbClr val="5F7278"/>
                 </a:solidFill>
-                <a:latin typeface="Calibri" pitchFamily="34" charset="0"/>
-                <a:ea typeface="Calibri" pitchFamily="34" charset="-122"/>
-                <a:cs typeface="Calibri" pitchFamily="34" charset="-120"/>
+                <a:latin typeface="Calibri" panose="020F0502020204030204" pitchFamily="34" charset="0"/>
+                <a:ea typeface="Calibri" panose="020F0502020204030204" pitchFamily="34" charset="-122"/>
+                <a:cs typeface="Calibri" panose="020F0502020204030204" pitchFamily="34" charset="-120"/>
               </a:rPr>
               <a:t>2</a:t>
             </a:r>
@@ -5312,12 +5192,13 @@
 
 <file path=ppt/slides/slide3.xml><?xml version="1.0" encoding="utf-8"?>
 <p:sld xmlns:a="http://schemas.openxmlformats.org/drawingml/2006/main" xmlns:r="http://schemas.openxmlformats.org/officeDocument/2006/relationships" xmlns:p="http://schemas.openxmlformats.org/presentationml/2006/main">
-  <p:cSld name="Slide 3">
+  <p:cSld>
     <p:bg>
       <p:bgPr>
         <a:solidFill>
           <a:srgbClr val="FFFFFF"/>
         </a:solidFill>
+        <a:effectLst/>
       </p:bgPr>
     </p:bg>
     <p:spTree>
@@ -5349,13 +5230,12 @@
             <a:avLst/>
           </a:prstGeom>
           <a:noFill/>
-          <a:ln/>
-        </p:spPr>
-        <p:txBody>
-          <a:bodyPr wrap="square" lIns="0" tIns="0" rIns="0" bIns="0" rtlCol="0" anchor="ctr"/>
-          <a:lstStyle/>
-          <a:p>
-            <a:pPr indent="0" marL="0">
+        </p:spPr>
+        <p:txBody>
+          <a:bodyPr wrap="square" lIns="0" tIns="0" rIns="0" bIns="0" rtlCol="0" anchor="ctr"/>
+          <a:lstStyle/>
+          <a:p>
+            <a:pPr marL="0" indent="0">
               <a:buNone/>
             </a:pPr>
             <a:r>
@@ -5363,9 +5243,9 @@
                 <a:solidFill>
                   <a:srgbClr val="0E2A33"/>
                 </a:solidFill>
-                <a:latin typeface="Cambria" pitchFamily="34" charset="0"/>
-                <a:ea typeface="Cambria" pitchFamily="34" charset="-122"/>
-                <a:cs typeface="Cambria" pitchFamily="34" charset="-120"/>
+                <a:latin typeface="Cambria" panose="02040503050406030204" pitchFamily="34" charset="0"/>
+                <a:ea typeface="Cambria" panose="02040503050406030204" pitchFamily="34" charset="-122"/>
+                <a:cs typeface="Cambria" panose="02040503050406030204" pitchFamily="34" charset="-120"/>
               </a:rPr>
               <a:t>Escopo da entrega</a:t>
             </a:r>
@@ -5388,13 +5268,12 @@
             <a:avLst/>
           </a:prstGeom>
           <a:noFill/>
-          <a:ln/>
         </p:spPr>
         <p:txBody>
           <a:bodyPr wrap="square" lIns="0" tIns="0" rIns="0" bIns="0" rtlCol="0" anchor="t"/>
           <a:lstStyle/>
           <a:p>
-            <a:pPr indent="0" marL="0">
+            <a:pPr marL="0" indent="0">
               <a:buNone/>
             </a:pPr>
             <a:r>
@@ -5402,9 +5281,9 @@
                 <a:solidFill>
                   <a:srgbClr val="5F7278"/>
                 </a:solidFill>
-                <a:latin typeface="Calibri" pitchFamily="34" charset="0"/>
-                <a:ea typeface="Calibri" pitchFamily="34" charset="-122"/>
-                <a:cs typeface="Calibri" pitchFamily="34" charset="-120"/>
+                <a:latin typeface="Calibri" panose="020F0502020204030204" pitchFamily="34" charset="0"/>
+                <a:ea typeface="Calibri" panose="020F0502020204030204" pitchFamily="34" charset="-122"/>
+                <a:cs typeface="Calibri" panose="020F0502020204030204" pitchFamily="34" charset="-120"/>
               </a:rPr>
               <a:t>O que está dentro da POC e o que é jornada seguinte.</a:t>
             </a:r>
@@ -5454,13 +5333,12 @@
             <a:avLst/>
           </a:prstGeom>
           <a:noFill/>
-          <a:ln/>
-        </p:spPr>
-        <p:txBody>
-          <a:bodyPr wrap="square" lIns="0" tIns="0" rIns="0" bIns="0" rtlCol="0" anchor="ctr"/>
-          <a:lstStyle/>
-          <a:p>
-            <a:pPr indent="0" marL="0">
+        </p:spPr>
+        <p:txBody>
+          <a:bodyPr wrap="square" lIns="0" tIns="0" rIns="0" bIns="0" rtlCol="0" anchor="ctr"/>
+          <a:lstStyle/>
+          <a:p>
+            <a:pPr marL="0" indent="0">
               <a:buNone/>
             </a:pPr>
             <a:r>
@@ -5468,9 +5346,9 @@
                 <a:solidFill>
                   <a:srgbClr val="028090"/>
                 </a:solidFill>
-                <a:latin typeface="Cambria" pitchFamily="34" charset="0"/>
-                <a:ea typeface="Cambria" pitchFamily="34" charset="-122"/>
-                <a:cs typeface="Cambria" pitchFamily="34" charset="-120"/>
+                <a:latin typeface="Cambria" panose="02040503050406030204" pitchFamily="34" charset="0"/>
+                <a:ea typeface="Cambria" panose="02040503050406030204" pitchFamily="34" charset="-122"/>
+                <a:cs typeface="Cambria" panose="02040503050406030204" pitchFamily="34" charset="-120"/>
               </a:rPr>
               <a:t>Dentro</a:t>
             </a:r>
@@ -5493,7 +5371,6 @@
             <a:avLst/>
           </a:prstGeom>
           <a:noFill/>
-          <a:ln/>
         </p:spPr>
         <p:txBody>
           <a:bodyPr wrap="square" lIns="0" tIns="0" rIns="0" bIns="0" rtlCol="0" anchor="t"/>
@@ -5511,9 +5388,9 @@
                 <a:solidFill>
                   <a:srgbClr val="1C2B30"/>
                 </a:solidFill>
-                <a:latin typeface="Calibri" pitchFamily="34" charset="0"/>
-                <a:ea typeface="Calibri" pitchFamily="34" charset="-122"/>
-                <a:cs typeface="Calibri" pitchFamily="34" charset="-120"/>
+                <a:latin typeface="Calibri" panose="020F0502020204030204" pitchFamily="34" charset="0"/>
+                <a:ea typeface="Calibri" panose="020F0502020204030204" pitchFamily="34" charset="-122"/>
+                <a:cs typeface="Calibri" panose="020F0502020204030204" pitchFamily="34" charset="-120"/>
               </a:rPr>
               <a:t>Infraestrutura como código do ambiente inteiro</a:t>
             </a:r>
@@ -5532,9 +5409,9 @@
                 <a:solidFill>
                   <a:srgbClr val="1C2B30"/>
                 </a:solidFill>
-                <a:latin typeface="Calibri" pitchFamily="34" charset="0"/>
-                <a:ea typeface="Calibri" pitchFamily="34" charset="-122"/>
-                <a:cs typeface="Calibri" pitchFamily="34" charset="-120"/>
+                <a:latin typeface="Calibri" panose="020F0502020204030204" pitchFamily="34" charset="0"/>
+                <a:ea typeface="Calibri" panose="020F0502020204030204" pitchFamily="34" charset="-122"/>
+                <a:cs typeface="Calibri" panose="020F0502020204030204" pitchFamily="34" charset="-120"/>
               </a:rPr>
               <a:t>Pipeline de ingestão das 7 tabelas do ERP</a:t>
             </a:r>
@@ -5553,9 +5430,9 @@
                 <a:solidFill>
                   <a:srgbClr val="1C2B30"/>
                 </a:solidFill>
-                <a:latin typeface="Calibri" pitchFamily="34" charset="0"/>
-                <a:ea typeface="Calibri" pitchFamily="34" charset="-122"/>
-                <a:cs typeface="Calibri" pitchFamily="34" charset="-120"/>
+                <a:latin typeface="Calibri" panose="020F0502020204030204" pitchFamily="34" charset="0"/>
+                <a:ea typeface="Calibri" panose="020F0502020204030204" pitchFamily="34" charset="-122"/>
+                <a:cs typeface="Calibri" panose="020F0502020204030204" pitchFamily="34" charset="-120"/>
               </a:rPr>
               <a:t>Orquestração, tratamento de falha e idempotência</a:t>
             </a:r>
@@ -5574,9 +5451,9 @@
                 <a:solidFill>
                   <a:srgbClr val="1C2B30"/>
                 </a:solidFill>
-                <a:latin typeface="Calibri" pitchFamily="34" charset="0"/>
-                <a:ea typeface="Calibri" pitchFamily="34" charset="-122"/>
-                <a:cs typeface="Calibri" pitchFamily="34" charset="-120"/>
+                <a:latin typeface="Calibri" panose="020F0502020204030204" pitchFamily="34" charset="0"/>
+                <a:ea typeface="Calibri" panose="020F0502020204030204" pitchFamily="34" charset="-122"/>
+                <a:cs typeface="Calibri" panose="020F0502020204030204" pitchFamily="34" charset="-120"/>
               </a:rPr>
               <a:t>Validação de qualidade e auditoria das execuções</a:t>
             </a:r>
@@ -5595,9 +5472,9 @@
                 <a:solidFill>
                   <a:srgbClr val="1C2B30"/>
                 </a:solidFill>
-                <a:latin typeface="Calibri" pitchFamily="34" charset="0"/>
-                <a:ea typeface="Calibri" pitchFamily="34" charset="-122"/>
-                <a:cs typeface="Calibri" pitchFamily="34" charset="-120"/>
+                <a:latin typeface="Calibri" panose="020F0502020204030204" pitchFamily="34" charset="0"/>
+                <a:ea typeface="Calibri" panose="020F0502020204030204" pitchFamily="34" charset="-122"/>
+                <a:cs typeface="Calibri" panose="020F0502020204030204" pitchFamily="34" charset="-120"/>
               </a:rPr>
               <a:t>Documentação e demonstração funcional</a:t>
             </a:r>
@@ -5647,13 +5524,12 @@
             <a:avLst/>
           </a:prstGeom>
           <a:noFill/>
-          <a:ln/>
-        </p:spPr>
-        <p:txBody>
-          <a:bodyPr wrap="square" lIns="0" tIns="0" rIns="0" bIns="0" rtlCol="0" anchor="ctr"/>
-          <a:lstStyle/>
-          <a:p>
-            <a:pPr indent="0" marL="0">
+        </p:spPr>
+        <p:txBody>
+          <a:bodyPr wrap="square" lIns="0" tIns="0" rIns="0" bIns="0" rtlCol="0" anchor="ctr"/>
+          <a:lstStyle/>
+          <a:p>
+            <a:pPr marL="0" indent="0">
               <a:buNone/>
             </a:pPr>
             <a:r>
@@ -5661,9 +5537,9 @@
                 <a:solidFill>
                   <a:srgbClr val="5F7278"/>
                 </a:solidFill>
-                <a:latin typeface="Cambria" pitchFamily="34" charset="0"/>
-                <a:ea typeface="Cambria" pitchFamily="34" charset="-122"/>
-                <a:cs typeface="Cambria" pitchFamily="34" charset="-120"/>
+                <a:latin typeface="Cambria" panose="02040503050406030204" pitchFamily="34" charset="0"/>
+                <a:ea typeface="Cambria" panose="02040503050406030204" pitchFamily="34" charset="-122"/>
+                <a:cs typeface="Cambria" panose="02040503050406030204" pitchFamily="34" charset="-120"/>
               </a:rPr>
               <a:t>Etapas seguintes</a:t>
             </a:r>
@@ -5686,7 +5562,6 @@
             <a:avLst/>
           </a:prstGeom>
           <a:noFill/>
-          <a:ln/>
         </p:spPr>
         <p:txBody>
           <a:bodyPr wrap="square" lIns="0" tIns="0" rIns="0" bIns="0" rtlCol="0" anchor="t"/>
@@ -5704,9 +5579,9 @@
                 <a:solidFill>
                   <a:srgbClr val="5F7278"/>
                 </a:solidFill>
-                <a:latin typeface="Calibri" pitchFamily="34" charset="0"/>
-                <a:ea typeface="Calibri" pitchFamily="34" charset="-122"/>
-                <a:cs typeface="Calibri" pitchFamily="34" charset="-120"/>
+                <a:latin typeface="Calibri" panose="020F0502020204030204" pitchFamily="34" charset="0"/>
+                <a:ea typeface="Calibri" panose="020F0502020204030204" pitchFamily="34" charset="-122"/>
+                <a:cs typeface="Calibri" panose="020F0502020204030204" pitchFamily="34" charset="-120"/>
               </a:rPr>
               <a:t>Transformação com dbt sobre o schema raw</a:t>
             </a:r>
@@ -5725,9 +5600,9 @@
                 <a:solidFill>
                   <a:srgbClr val="5F7278"/>
                 </a:solidFill>
-                <a:latin typeface="Calibri" pitchFamily="34" charset="0"/>
-                <a:ea typeface="Calibri" pitchFamily="34" charset="-122"/>
-                <a:cs typeface="Calibri" pitchFamily="34" charset="-120"/>
+                <a:latin typeface="Calibri" panose="020F0502020204030204" pitchFamily="34" charset="0"/>
+                <a:ea typeface="Calibri" panose="020F0502020204030204" pitchFamily="34" charset="-122"/>
+                <a:cs typeface="Calibri" panose="020F0502020204030204" pitchFamily="34" charset="-120"/>
               </a:rPr>
               <a:t>Dashboard comercial para a área da Camila</a:t>
             </a:r>
@@ -5746,9 +5621,9 @@
                 <a:solidFill>
                   <a:srgbClr val="5F7278"/>
                 </a:solidFill>
-                <a:latin typeface="Calibri" pitchFamily="34" charset="0"/>
-                <a:ea typeface="Calibri" pitchFamily="34" charset="-122"/>
-                <a:cs typeface="Calibri" pitchFamily="34" charset="-120"/>
+                <a:latin typeface="Calibri" panose="020F0502020204030204" pitchFamily="34" charset="0"/>
+                <a:ea typeface="Calibri" panose="020F0502020204030204" pitchFamily="34" charset="-122"/>
+                <a:cs typeface="Calibri" panose="020F0502020204030204" pitchFamily="34" charset="-120"/>
               </a:rPr>
               <a:t>Ranking de alavancas pedido pela CEO</a:t>
             </a:r>
@@ -5767,9 +5642,9 @@
                 <a:solidFill>
                   <a:srgbClr val="5F7278"/>
                 </a:solidFill>
-                <a:latin typeface="Calibri" pitchFamily="34" charset="0"/>
-                <a:ea typeface="Calibri" pitchFamily="34" charset="-122"/>
-                <a:cs typeface="Calibri" pitchFamily="34" charset="-120"/>
+                <a:latin typeface="Calibri" panose="020F0502020204030204" pitchFamily="34" charset="0"/>
+                <a:ea typeface="Calibri" panose="020F0502020204030204" pitchFamily="34" charset="-122"/>
+                <a:cs typeface="Calibri" panose="020F0502020204030204" pitchFamily="34" charset="-120"/>
               </a:rPr>
               <a:t>Observabilidade com Prometheus e Grafana</a:t>
             </a:r>
@@ -5788,9 +5663,9 @@
                 <a:solidFill>
                   <a:srgbClr val="5F7278"/>
                 </a:solidFill>
-                <a:latin typeface="Calibri" pitchFamily="34" charset="0"/>
-                <a:ea typeface="Calibri" pitchFamily="34" charset="-122"/>
-                <a:cs typeface="Calibri" pitchFamily="34" charset="-120"/>
+                <a:latin typeface="Calibri" panose="020F0502020204030204" pitchFamily="34" charset="0"/>
+                <a:ea typeface="Calibri" panose="020F0502020204030204" pitchFamily="34" charset="-122"/>
+                <a:cs typeface="Calibri" panose="020F0502020204030204" pitchFamily="34" charset="-120"/>
               </a:rPr>
               <a:t>Ingestão incremental quando a origem for o banco</a:t>
             </a:r>
@@ -5813,13 +5688,12 @@
             <a:avLst/>
           </a:prstGeom>
           <a:noFill/>
-          <a:ln/>
-        </p:spPr>
-        <p:txBody>
-          <a:bodyPr wrap="square" lIns="0" tIns="0" rIns="0" bIns="0" rtlCol="0" anchor="ctr"/>
-          <a:lstStyle/>
-          <a:p>
-            <a:pPr algn="r" indent="0" marL="0">
+        </p:spPr>
+        <p:txBody>
+          <a:bodyPr wrap="square" lIns="0" tIns="0" rIns="0" bIns="0" rtlCol="0" anchor="ctr"/>
+          <a:lstStyle/>
+          <a:p>
+            <a:pPr marL="0" indent="0" algn="r">
               <a:buNone/>
             </a:pPr>
             <a:r>
@@ -5827,9 +5701,9 @@
                 <a:solidFill>
                   <a:srgbClr val="5F7278"/>
                 </a:solidFill>
-                <a:latin typeface="Calibri" pitchFamily="34" charset="0"/>
-                <a:ea typeface="Calibri" pitchFamily="34" charset="-122"/>
-                <a:cs typeface="Calibri" pitchFamily="34" charset="-120"/>
+                <a:latin typeface="Calibri" panose="020F0502020204030204" pitchFamily="34" charset="0"/>
+                <a:ea typeface="Calibri" panose="020F0502020204030204" pitchFamily="34" charset="-122"/>
+                <a:cs typeface="Calibri" panose="020F0502020204030204" pitchFamily="34" charset="-120"/>
               </a:rPr>
               <a:t>3</a:t>
             </a:r>
@@ -5847,12 +5721,13 @@
 
 <file path=ppt/slides/slide4.xml><?xml version="1.0" encoding="utf-8"?>
 <p:sld xmlns:a="http://schemas.openxmlformats.org/drawingml/2006/main" xmlns:r="http://schemas.openxmlformats.org/officeDocument/2006/relationships" xmlns:p="http://schemas.openxmlformats.org/presentationml/2006/main">
-  <p:cSld name="Slide 4">
+  <p:cSld>
     <p:bg>
       <p:bgPr>
         <a:solidFill>
           <a:srgbClr val="FFFFFF"/>
         </a:solidFill>
+        <a:effectLst/>
       </p:bgPr>
     </p:bg>
     <p:spTree>
@@ -5884,13 +5759,12 @@
             <a:avLst/>
           </a:prstGeom>
           <a:noFill/>
-          <a:ln/>
-        </p:spPr>
-        <p:txBody>
-          <a:bodyPr wrap="square" lIns="0" tIns="0" rIns="0" bIns="0" rtlCol="0" anchor="ctr"/>
-          <a:lstStyle/>
-          <a:p>
-            <a:pPr indent="0" marL="0">
+        </p:spPr>
+        <p:txBody>
+          <a:bodyPr wrap="square" lIns="0" tIns="0" rIns="0" bIns="0" rtlCol="0" anchor="ctr"/>
+          <a:lstStyle/>
+          <a:p>
+            <a:pPr marL="0" indent="0">
               <a:buNone/>
             </a:pPr>
             <a:r>
@@ -5898,9 +5772,9 @@
                 <a:solidFill>
                   <a:srgbClr val="0E2A33"/>
                 </a:solidFill>
-                <a:latin typeface="Cambria" pitchFamily="34" charset="0"/>
-                <a:ea typeface="Cambria" pitchFamily="34" charset="-122"/>
-                <a:cs typeface="Cambria" pitchFamily="34" charset="-120"/>
+                <a:latin typeface="Cambria" panose="02040503050406030204" pitchFamily="34" charset="0"/>
+                <a:ea typeface="Cambria" panose="02040503050406030204" pitchFamily="34" charset="-122"/>
+                <a:cs typeface="Cambria" panose="02040503050406030204" pitchFamily="34" charset="-120"/>
               </a:rPr>
               <a:t>Arquitetura</a:t>
             </a:r>
@@ -5923,13 +5797,12 @@
             <a:avLst/>
           </a:prstGeom>
           <a:noFill/>
-          <a:ln/>
         </p:spPr>
         <p:txBody>
           <a:bodyPr wrap="square" lIns="0" tIns="0" rIns="0" bIns="0" rtlCol="0" anchor="t"/>
           <a:lstStyle/>
           <a:p>
-            <a:pPr indent="0" marL="0">
+            <a:pPr marL="0" indent="0">
               <a:buNone/>
             </a:pPr>
             <a:r>
@@ -5937,9 +5810,9 @@
                 <a:solidFill>
                   <a:srgbClr val="5F7278"/>
                 </a:solidFill>
-                <a:latin typeface="Calibri" pitchFamily="34" charset="0"/>
-                <a:ea typeface="Calibri" pitchFamily="34" charset="-122"/>
-                <a:cs typeface="Calibri" pitchFamily="34" charset="-120"/>
+                <a:latin typeface="Calibri" panose="020F0502020204030204" pitchFamily="34" charset="0"/>
+                <a:ea typeface="Calibri" panose="020F0502020204030204" pitchFamily="34" charset="-122"/>
+                <a:cs typeface="Calibri" panose="020F0502020204030204" pitchFamily="34" charset="-120"/>
               </a:rPr>
               <a:t>Cluster Kubernetes local provisionado por Terraform, do arquivo ao analista.</a:t>
             </a:r>
@@ -5982,20 +5855,19 @@
         </p:nvSpPr>
         <p:spPr>
           <a:xfrm>
-            <a:off x="731520" y="3127248"/>
+            <a:off x="731520" y="3209163"/>
             <a:ext cx="1874520" cy="310896"/>
           </a:xfrm>
           <a:prstGeom prst="rect">
             <a:avLst/>
           </a:prstGeom>
           <a:noFill/>
-          <a:ln/>
-        </p:spPr>
-        <p:txBody>
-          <a:bodyPr wrap="square" lIns="0" tIns="0" rIns="0" bIns="0" rtlCol="0" anchor="ctr"/>
-          <a:lstStyle/>
-          <a:p>
-            <a:pPr algn="ctr" indent="0" marL="0">
+        </p:spPr>
+        <p:txBody>
+          <a:bodyPr wrap="square" lIns="0" tIns="0" rIns="0" bIns="0" rtlCol="0" anchor="ctr"/>
+          <a:lstStyle/>
+          <a:p>
+            <a:pPr marL="0" indent="0" algn="ctr">
               <a:buNone/>
             </a:pPr>
             <a:r>
@@ -6003,9 +5875,9 @@
                 <a:solidFill>
                   <a:srgbClr val="FFFFFF"/>
                 </a:solidFill>
-                <a:latin typeface="Calibri" pitchFamily="34" charset="0"/>
-                <a:ea typeface="Calibri" pitchFamily="34" charset="-122"/>
-                <a:cs typeface="Calibri" pitchFamily="34" charset="-120"/>
+                <a:latin typeface="Calibri" panose="020F0502020204030204" pitchFamily="34" charset="0"/>
+                <a:ea typeface="Calibri" panose="020F0502020204030204" pitchFamily="34" charset="-122"/>
+                <a:cs typeface="Calibri" panose="020F0502020204030204" pitchFamily="34" charset="-120"/>
               </a:rPr>
               <a:t>Arquivos do ERP</a:t>
             </a:r>
@@ -6021,20 +5893,19 @@
         </p:nvSpPr>
         <p:spPr>
           <a:xfrm>
-            <a:off x="731520" y="3419856"/>
-            <a:ext cx="1874520" cy="548640"/>
-          </a:xfrm>
-          <a:prstGeom prst="rect">
-            <a:avLst/>
-          </a:prstGeom>
-          <a:noFill/>
-          <a:ln/>
+            <a:off x="731520" y="3502025"/>
+            <a:ext cx="1874520" cy="441960"/>
+          </a:xfrm>
+          <a:prstGeom prst="rect">
+            <a:avLst/>
+          </a:prstGeom>
+          <a:noFill/>
         </p:spPr>
         <p:txBody>
           <a:bodyPr wrap="square" lIns="0" tIns="0" rIns="0" bIns="0" rtlCol="0" anchor="t"/>
           <a:lstStyle/>
           <a:p>
-            <a:pPr algn="ctr" indent="0" marL="0">
+            <a:pPr marL="0" indent="0" algn="ctr">
               <a:buNone/>
             </a:pPr>
             <a:r>
@@ -6042,16 +5913,16 @@
                 <a:solidFill>
                   <a:srgbClr val="C8E3E6"/>
                 </a:solidFill>
-                <a:latin typeface="Calibri" pitchFamily="34" charset="0"/>
-                <a:ea typeface="Calibri" pitchFamily="34" charset="-122"/>
-                <a:cs typeface="Calibri" pitchFamily="34" charset="-120"/>
+                <a:latin typeface="Calibri" panose="020F0502020204030204" pitchFamily="34" charset="0"/>
+                <a:ea typeface="Calibri" panose="020F0502020204030204" pitchFamily="34" charset="-122"/>
+                <a:cs typeface="Calibri" panose="020F0502020204030204" pitchFamily="34" charset="-120"/>
               </a:rPr>
               <a:t>landing zone</a:t>
             </a:r>
             <a:endParaRPr lang="en-US" sz="1050" dirty="0"/>
           </a:p>
           <a:p>
-            <a:pPr algn="ctr" indent="0" marL="0">
+            <a:pPr marL="0" indent="0" algn="ctr">
               <a:buNone/>
             </a:pPr>
             <a:r>
@@ -6059,9 +5930,9 @@
                 <a:solidFill>
                   <a:srgbClr val="C8E3E6"/>
                 </a:solidFill>
-                <a:latin typeface="Calibri" pitchFamily="34" charset="0"/>
-                <a:ea typeface="Calibri" pitchFamily="34" charset="-122"/>
-                <a:cs typeface="Calibri" pitchFamily="34" charset="-120"/>
+                <a:latin typeface="Calibri" panose="020F0502020204030204" pitchFamily="34" charset="0"/>
+                <a:ea typeface="Calibri" panose="020F0502020204030204" pitchFamily="34" charset="-122"/>
+                <a:cs typeface="Calibri" panose="020F0502020204030204" pitchFamily="34" charset="-120"/>
               </a:rPr>
               <a:t>somente leitura</a:t>
             </a:r>
@@ -6128,20 +5999,19 @@
         </p:nvSpPr>
         <p:spPr>
           <a:xfrm>
-            <a:off x="3474720" y="2944368"/>
+            <a:off x="3474720" y="3227578"/>
             <a:ext cx="2103120" cy="310896"/>
           </a:xfrm>
           <a:prstGeom prst="rect">
             <a:avLst/>
           </a:prstGeom>
           <a:noFill/>
-          <a:ln/>
-        </p:spPr>
-        <p:txBody>
-          <a:bodyPr wrap="square" lIns="0" tIns="0" rIns="0" bIns="0" rtlCol="0" anchor="ctr"/>
-          <a:lstStyle/>
-          <a:p>
-            <a:pPr algn="ctr" indent="0" marL="0">
+        </p:spPr>
+        <p:txBody>
+          <a:bodyPr wrap="square" lIns="0" tIns="0" rIns="0" bIns="0" rtlCol="0" anchor="ctr"/>
+          <a:lstStyle/>
+          <a:p>
+            <a:pPr marL="0" indent="0" algn="ctr">
               <a:buNone/>
             </a:pPr>
             <a:r>
@@ -6149,9 +6019,9 @@
                 <a:solidFill>
                   <a:srgbClr val="FFFFFF"/>
                 </a:solidFill>
-                <a:latin typeface="Calibri" pitchFamily="34" charset="0"/>
-                <a:ea typeface="Calibri" pitchFamily="34" charset="-122"/>
-                <a:cs typeface="Calibri" pitchFamily="34" charset="-120"/>
+                <a:latin typeface="Calibri" panose="020F0502020204030204" pitchFamily="34" charset="0"/>
+                <a:ea typeface="Calibri" panose="020F0502020204030204" pitchFamily="34" charset="-122"/>
+                <a:cs typeface="Calibri" panose="020F0502020204030204" pitchFamily="34" charset="-120"/>
               </a:rPr>
               <a:t>Apache Airflow</a:t>
             </a:r>
@@ -6167,20 +6037,19 @@
         </p:nvSpPr>
         <p:spPr>
           <a:xfrm>
-            <a:off x="3474720" y="3236976"/>
-            <a:ext cx="2103120" cy="914400"/>
-          </a:xfrm>
-          <a:prstGeom prst="rect">
-            <a:avLst/>
-          </a:prstGeom>
-          <a:noFill/>
-          <a:ln/>
+            <a:off x="3474720" y="3520440"/>
+            <a:ext cx="2103120" cy="466090"/>
+          </a:xfrm>
+          <a:prstGeom prst="rect">
+            <a:avLst/>
+          </a:prstGeom>
+          <a:noFill/>
         </p:spPr>
         <p:txBody>
           <a:bodyPr wrap="square" lIns="0" tIns="0" rIns="0" bIns="0" rtlCol="0" anchor="t"/>
           <a:lstStyle/>
           <a:p>
-            <a:pPr algn="ctr" indent="0" marL="0">
+            <a:pPr marL="0" indent="0" algn="ctr">
               <a:buNone/>
             </a:pPr>
             <a:r>
@@ -6188,16 +6057,16 @@
                 <a:solidFill>
                   <a:srgbClr val="C8E3E6"/>
                 </a:solidFill>
-                <a:latin typeface="Calibri" pitchFamily="34" charset="0"/>
-                <a:ea typeface="Calibri" pitchFamily="34" charset="-122"/>
-                <a:cs typeface="Calibri" pitchFamily="34" charset="-120"/>
+                <a:latin typeface="Calibri" panose="020F0502020204030204" pitchFamily="34" charset="0"/>
+                <a:ea typeface="Calibri" panose="020F0502020204030204" pitchFamily="34" charset="-122"/>
+                <a:cs typeface="Calibri" panose="020F0502020204030204" pitchFamily="34" charset="-120"/>
               </a:rPr>
               <a:t>KubernetesExecutor</a:t>
             </a:r>
             <a:endParaRPr lang="en-US" sz="1050" dirty="0"/>
           </a:p>
           <a:p>
-            <a:pPr algn="ctr" indent="0" marL="0">
+            <a:pPr marL="0" indent="0" algn="ctr">
               <a:buNone/>
             </a:pPr>
             <a:r>
@@ -6205,9 +6074,9 @@
                 <a:solidFill>
                   <a:srgbClr val="C8E3E6"/>
                 </a:solidFill>
-                <a:latin typeface="Calibri" pitchFamily="34" charset="0"/>
-                <a:ea typeface="Calibri" pitchFamily="34" charset="-122"/>
-                <a:cs typeface="Calibri" pitchFamily="34" charset="-120"/>
+                <a:latin typeface="Calibri" panose="020F0502020204030204" pitchFamily="34" charset="0"/>
+                <a:ea typeface="Calibri" panose="020F0502020204030204" pitchFamily="34" charset="-122"/>
+                <a:cs typeface="Calibri" panose="020F0502020204030204" pitchFamily="34" charset="-120"/>
               </a:rPr>
               <a:t>uma task = um pod</a:t>
             </a:r>
@@ -6222,9 +6091,9 @@
           <p:nvPr/>
         </p:nvSpPr>
         <p:spPr>
-          <a:xfrm>
-            <a:off x="5760720" y="3538728"/>
-            <a:ext cx="411480" cy="-594360"/>
+          <a:xfrm flipV="1">
+            <a:off x="5760720" y="2618105"/>
+            <a:ext cx="441960" cy="764540"/>
           </a:xfrm>
           <a:prstGeom prst="line">
             <a:avLst/>
@@ -6247,8 +6116,8 @@
         </p:nvSpPr>
         <p:spPr>
           <a:xfrm>
-            <a:off x="5760720" y="3538728"/>
-            <a:ext cx="411480" cy="594360"/>
+            <a:off x="5757545" y="3703955"/>
+            <a:ext cx="412115" cy="764540"/>
           </a:xfrm>
           <a:prstGeom prst="line">
             <a:avLst/>
@@ -6298,20 +6167,19 @@
         </p:nvSpPr>
         <p:spPr>
           <a:xfrm>
-            <a:off x="6355080" y="2441448"/>
+            <a:off x="6355080" y="2541778"/>
             <a:ext cx="2468880" cy="310896"/>
           </a:xfrm>
           <a:prstGeom prst="rect">
             <a:avLst/>
           </a:prstGeom>
           <a:noFill/>
-          <a:ln/>
-        </p:spPr>
-        <p:txBody>
-          <a:bodyPr wrap="square" lIns="0" tIns="0" rIns="0" bIns="0" rtlCol="0" anchor="ctr"/>
-          <a:lstStyle/>
-          <a:p>
-            <a:pPr algn="ctr" indent="0" marL="0">
+        </p:spPr>
+        <p:txBody>
+          <a:bodyPr wrap="square" lIns="0" tIns="0" rIns="0" bIns="0" rtlCol="0" anchor="ctr"/>
+          <a:lstStyle/>
+          <a:p>
+            <a:pPr marL="0" indent="0" algn="ctr">
               <a:buNone/>
             </a:pPr>
             <a:r>
@@ -6319,9 +6187,9 @@
                 <a:solidFill>
                   <a:srgbClr val="07352C"/>
                 </a:solidFill>
-                <a:latin typeface="Calibri" pitchFamily="34" charset="0"/>
-                <a:ea typeface="Calibri" pitchFamily="34" charset="-122"/>
-                <a:cs typeface="Calibri" pitchFamily="34" charset="-120"/>
+                <a:latin typeface="Calibri" panose="020F0502020204030204" pitchFamily="34" charset="0"/>
+                <a:ea typeface="Calibri" panose="020F0502020204030204" pitchFamily="34" charset="-122"/>
+                <a:cs typeface="Calibri" panose="020F0502020204030204" pitchFamily="34" charset="-120"/>
               </a:rPr>
               <a:t>MinIO — Data Lake</a:t>
             </a:r>
@@ -6337,20 +6205,19 @@
         </p:nvSpPr>
         <p:spPr>
           <a:xfrm>
-            <a:off x="6355080" y="2734056"/>
-            <a:ext cx="2468880" cy="548640"/>
-          </a:xfrm>
-          <a:prstGeom prst="rect">
-            <a:avLst/>
-          </a:prstGeom>
-          <a:noFill/>
-          <a:ln/>
+            <a:off x="6355080" y="2834640"/>
+            <a:ext cx="2468880" cy="311785"/>
+          </a:xfrm>
+          <a:prstGeom prst="rect">
+            <a:avLst/>
+          </a:prstGeom>
+          <a:noFill/>
         </p:spPr>
         <p:txBody>
           <a:bodyPr wrap="square" lIns="0" tIns="0" rIns="0" bIns="0" rtlCol="0" anchor="t"/>
           <a:lstStyle/>
           <a:p>
-            <a:pPr algn="ctr" indent="0" marL="0">
+            <a:pPr marL="0" indent="0" algn="ctr">
               <a:buNone/>
             </a:pPr>
             <a:r>
@@ -6358,9 +6225,9 @@
                 <a:solidFill>
                   <a:srgbClr val="0B4438"/>
                 </a:solidFill>
-                <a:latin typeface="Calibri" pitchFamily="34" charset="0"/>
-                <a:ea typeface="Calibri" pitchFamily="34" charset="-122"/>
-                <a:cs typeface="Calibri" pitchFamily="34" charset="-120"/>
+                <a:latin typeface="Calibri" panose="020F0502020204030204" pitchFamily="34" charset="0"/>
+                <a:ea typeface="Calibri" panose="020F0502020204030204" pitchFamily="34" charset="-122"/>
+                <a:cs typeface="Calibri" panose="020F0502020204030204" pitchFamily="34" charset="-120"/>
               </a:rPr>
               <a:t>cópia bruta particionada por data</a:t>
             </a:r>
@@ -6403,20 +6270,19 @@
         </p:nvSpPr>
         <p:spPr>
           <a:xfrm>
-            <a:off x="6355080" y="3813048"/>
+            <a:off x="6355080" y="3958463"/>
             <a:ext cx="2468880" cy="310896"/>
           </a:xfrm>
           <a:prstGeom prst="rect">
             <a:avLst/>
           </a:prstGeom>
           <a:noFill/>
-          <a:ln/>
-        </p:spPr>
-        <p:txBody>
-          <a:bodyPr wrap="square" lIns="0" tIns="0" rIns="0" bIns="0" rtlCol="0" anchor="ctr"/>
-          <a:lstStyle/>
-          <a:p>
-            <a:pPr algn="ctr" indent="0" marL="0">
+        </p:spPr>
+        <p:txBody>
+          <a:bodyPr wrap="square" lIns="0" tIns="0" rIns="0" bIns="0" rtlCol="0" anchor="ctr"/>
+          <a:lstStyle/>
+          <a:p>
+            <a:pPr marL="0" indent="0" algn="ctr">
               <a:buNone/>
             </a:pPr>
             <a:r>
@@ -6424,9 +6290,9 @@
                 <a:solidFill>
                   <a:srgbClr val="FFFFFF"/>
                 </a:solidFill>
-                <a:latin typeface="Calibri" pitchFamily="34" charset="0"/>
-                <a:ea typeface="Calibri" pitchFamily="34" charset="-122"/>
-                <a:cs typeface="Calibri" pitchFamily="34" charset="-120"/>
+                <a:latin typeface="Calibri" panose="020F0502020204030204" pitchFamily="34" charset="0"/>
+                <a:ea typeface="Calibri" panose="020F0502020204030204" pitchFamily="34" charset="-122"/>
+                <a:cs typeface="Calibri" panose="020F0502020204030204" pitchFamily="34" charset="-120"/>
               </a:rPr>
               <a:t>PostgreSQL — DW</a:t>
             </a:r>
@@ -6442,20 +6308,19 @@
         </p:nvSpPr>
         <p:spPr>
           <a:xfrm>
-            <a:off x="6355080" y="4105656"/>
-            <a:ext cx="2468880" cy="548640"/>
-          </a:xfrm>
-          <a:prstGeom prst="rect">
-            <a:avLst/>
-          </a:prstGeom>
-          <a:noFill/>
-          <a:ln/>
+            <a:off x="6355080" y="4251325"/>
+            <a:ext cx="2468880" cy="250190"/>
+          </a:xfrm>
+          <a:prstGeom prst="rect">
+            <a:avLst/>
+          </a:prstGeom>
+          <a:noFill/>
         </p:spPr>
         <p:txBody>
           <a:bodyPr wrap="square" lIns="0" tIns="0" rIns="0" bIns="0" rtlCol="0" anchor="t"/>
           <a:lstStyle/>
           <a:p>
-            <a:pPr algn="ctr" indent="0" marL="0">
+            <a:pPr marL="0" indent="0" algn="ctr">
               <a:buNone/>
             </a:pPr>
             <a:r>
@@ -6463,9 +6328,9 @@
                 <a:solidFill>
                   <a:srgbClr val="C8E3E6"/>
                 </a:solidFill>
-                <a:latin typeface="Calibri" pitchFamily="34" charset="0"/>
-                <a:ea typeface="Calibri" pitchFamily="34" charset="-122"/>
-                <a:cs typeface="Calibri" pitchFamily="34" charset="-120"/>
+                <a:latin typeface="Calibri" panose="020F0502020204030204" pitchFamily="34" charset="0"/>
+                <a:ea typeface="Calibri" panose="020F0502020204030204" pitchFamily="34" charset="-122"/>
+                <a:cs typeface="Calibri" panose="020F0502020204030204" pitchFamily="34" charset="-120"/>
               </a:rPr>
               <a:t>schema raw carregado pelo Meltano</a:t>
             </a:r>
@@ -6532,20 +6397,19 @@
         </p:nvSpPr>
         <p:spPr>
           <a:xfrm>
-            <a:off x="9646920" y="3127248"/>
+            <a:off x="9646920" y="3227578"/>
             <a:ext cx="1783080" cy="310896"/>
           </a:xfrm>
           <a:prstGeom prst="rect">
             <a:avLst/>
           </a:prstGeom>
           <a:noFill/>
-          <a:ln/>
-        </p:spPr>
-        <p:txBody>
-          <a:bodyPr wrap="square" lIns="0" tIns="0" rIns="0" bIns="0" rtlCol="0" anchor="ctr"/>
-          <a:lstStyle/>
-          <a:p>
-            <a:pPr algn="ctr" indent="0" marL="0">
+        </p:spPr>
+        <p:txBody>
+          <a:bodyPr wrap="square" lIns="0" tIns="0" rIns="0" bIns="0" rtlCol="0" anchor="ctr"/>
+          <a:lstStyle/>
+          <a:p>
+            <a:pPr marL="0" indent="0" algn="ctr">
               <a:buNone/>
             </a:pPr>
             <a:r>
@@ -6553,9 +6417,9 @@
                 <a:solidFill>
                   <a:srgbClr val="0E2A33"/>
                 </a:solidFill>
-                <a:latin typeface="Calibri" pitchFamily="34" charset="0"/>
-                <a:ea typeface="Calibri" pitchFamily="34" charset="-122"/>
-                <a:cs typeface="Calibri" pitchFamily="34" charset="-120"/>
+                <a:latin typeface="Calibri" panose="020F0502020204030204" pitchFamily="34" charset="0"/>
+                <a:ea typeface="Calibri" panose="020F0502020204030204" pitchFamily="34" charset="-122"/>
+                <a:cs typeface="Calibri" panose="020F0502020204030204" pitchFamily="34" charset="-120"/>
               </a:rPr>
               <a:t>Analistas</a:t>
             </a:r>
@@ -6571,20 +6435,19 @@
         </p:nvSpPr>
         <p:spPr>
           <a:xfrm>
-            <a:off x="9646920" y="3419856"/>
-            <a:ext cx="1783080" cy="548640"/>
-          </a:xfrm>
-          <a:prstGeom prst="rect">
-            <a:avLst/>
-          </a:prstGeom>
-          <a:noFill/>
-          <a:ln/>
+            <a:off x="9646920" y="3520440"/>
+            <a:ext cx="1783080" cy="312420"/>
+          </a:xfrm>
+          <a:prstGeom prst="rect">
+            <a:avLst/>
+          </a:prstGeom>
+          <a:noFill/>
         </p:spPr>
         <p:txBody>
           <a:bodyPr wrap="square" lIns="0" tIns="0" rIns="0" bIns="0" rtlCol="0" anchor="t"/>
           <a:lstStyle/>
           <a:p>
-            <a:pPr algn="ctr" indent="0" marL="0">
+            <a:pPr marL="0" indent="0" algn="ctr">
               <a:buNone/>
             </a:pPr>
             <a:r>
@@ -6592,9 +6455,9 @@
                 <a:solidFill>
                   <a:srgbClr val="5F7278"/>
                 </a:solidFill>
-                <a:latin typeface="Calibri" pitchFamily="34" charset="0"/>
-                <a:ea typeface="Calibri" pitchFamily="34" charset="-122"/>
-                <a:cs typeface="Calibri" pitchFamily="34" charset="-120"/>
+                <a:latin typeface="Calibri" panose="020F0502020204030204" pitchFamily="34" charset="0"/>
+                <a:ea typeface="Calibri" panose="020F0502020204030204" pitchFamily="34" charset="-122"/>
+                <a:cs typeface="Calibri" panose="020F0502020204030204" pitchFamily="34" charset="-120"/>
               </a:rPr>
               <a:t>dbt · BI · ad-hoc</a:t>
             </a:r>
@@ -6644,13 +6507,12 @@
             <a:avLst/>
           </a:prstGeom>
           <a:noFill/>
-          <a:ln/>
-        </p:spPr>
-        <p:txBody>
-          <a:bodyPr wrap="square" lIns="0" tIns="0" rIns="0" bIns="0" rtlCol="0" anchor="ctr"/>
-          <a:lstStyle/>
-          <a:p>
-            <a:pPr indent="0" marL="0">
+        </p:spPr>
+        <p:txBody>
+          <a:bodyPr wrap="square" lIns="0" tIns="0" rIns="0" bIns="0" rtlCol="0" anchor="ctr"/>
+          <a:lstStyle/>
+          <a:p>
+            <a:pPr marL="0" indent="0">
               <a:buNone/>
             </a:pPr>
             <a:r>
@@ -6658,9 +6520,9 @@
                 <a:solidFill>
                   <a:srgbClr val="17414D"/>
                 </a:solidFill>
-                <a:latin typeface="Calibri" pitchFamily="34" charset="0"/>
-                <a:ea typeface="Calibri" pitchFamily="34" charset="-122"/>
-                <a:cs typeface="Calibri" pitchFamily="34" charset="-120"/>
+                <a:latin typeface="Calibri" panose="020F0502020204030204" pitchFamily="34" charset="0"/>
+                <a:ea typeface="Calibri" panose="020F0502020204030204" pitchFamily="34" charset="-122"/>
+                <a:cs typeface="Calibri" panose="020F0502020204030204" pitchFamily="34" charset="-120"/>
               </a:rPr>
               <a:t>Terraform provisiona namespace, Secrets, volumes, PostgreSQL, MinIO e o release Helm do Airflow. Um comando recria o ambiente do zero.</a:t>
             </a:r>
@@ -6683,13 +6545,12 @@
             <a:avLst/>
           </a:prstGeom>
           <a:noFill/>
-          <a:ln/>
-        </p:spPr>
-        <p:txBody>
-          <a:bodyPr wrap="square" lIns="0" tIns="0" rIns="0" bIns="0" rtlCol="0" anchor="ctr"/>
-          <a:lstStyle/>
-          <a:p>
-            <a:pPr algn="r" indent="0" marL="0">
+        </p:spPr>
+        <p:txBody>
+          <a:bodyPr wrap="square" lIns="0" tIns="0" rIns="0" bIns="0" rtlCol="0" anchor="ctr"/>
+          <a:lstStyle/>
+          <a:p>
+            <a:pPr marL="0" indent="0" algn="r">
               <a:buNone/>
             </a:pPr>
             <a:r>
@@ -6697,9 +6558,9 @@
                 <a:solidFill>
                   <a:srgbClr val="5F7278"/>
                 </a:solidFill>
-                <a:latin typeface="Calibri" pitchFamily="34" charset="0"/>
-                <a:ea typeface="Calibri" pitchFamily="34" charset="-122"/>
-                <a:cs typeface="Calibri" pitchFamily="34" charset="-120"/>
+                <a:latin typeface="Calibri" panose="020F0502020204030204" pitchFamily="34" charset="0"/>
+                <a:ea typeface="Calibri" panose="020F0502020204030204" pitchFamily="34" charset="-122"/>
+                <a:cs typeface="Calibri" panose="020F0502020204030204" pitchFamily="34" charset="-120"/>
               </a:rPr>
               <a:t>4</a:t>
             </a:r>
@@ -6717,12 +6578,13 @@
 
 <file path=ppt/slides/slide5.xml><?xml version="1.0" encoding="utf-8"?>
 <p:sld xmlns:a="http://schemas.openxmlformats.org/drawingml/2006/main" xmlns:r="http://schemas.openxmlformats.org/officeDocument/2006/relationships" xmlns:p="http://schemas.openxmlformats.org/presentationml/2006/main">
-  <p:cSld name="Slide 5">
+  <p:cSld>
     <p:bg>
       <p:bgPr>
         <a:solidFill>
           <a:srgbClr val="FFFFFF"/>
         </a:solidFill>
+        <a:effectLst/>
       </p:bgPr>
     </p:bg>
     <p:spTree>
@@ -6754,13 +6616,12 @@
             <a:avLst/>
           </a:prstGeom>
           <a:noFill/>
-          <a:ln/>
-        </p:spPr>
-        <p:txBody>
-          <a:bodyPr wrap="square" lIns="0" tIns="0" rIns="0" bIns="0" rtlCol="0" anchor="ctr"/>
-          <a:lstStyle/>
-          <a:p>
-            <a:pPr indent="0" marL="0">
+        </p:spPr>
+        <p:txBody>
+          <a:bodyPr wrap="square" lIns="0" tIns="0" rIns="0" bIns="0" rtlCol="0" anchor="ctr"/>
+          <a:lstStyle/>
+          <a:p>
+            <a:pPr marL="0" indent="0">
               <a:buNone/>
             </a:pPr>
             <a:r>
@@ -6768,9 +6629,9 @@
                 <a:solidFill>
                   <a:srgbClr val="0E2A33"/>
                 </a:solidFill>
-                <a:latin typeface="Cambria" pitchFamily="34" charset="0"/>
-                <a:ea typeface="Cambria" pitchFamily="34" charset="-122"/>
-                <a:cs typeface="Cambria" pitchFamily="34" charset="-120"/>
+                <a:latin typeface="Cambria" panose="02040503050406030204" pitchFamily="34" charset="0"/>
+                <a:ea typeface="Cambria" panose="02040503050406030204" pitchFamily="34" charset="-122"/>
+                <a:cs typeface="Cambria" panose="02040503050406030204" pitchFamily="34" charset="-120"/>
               </a:rPr>
               <a:t>Stack e por quê</a:t>
             </a:r>
@@ -6793,13 +6654,12 @@
             <a:avLst/>
           </a:prstGeom>
           <a:noFill/>
-          <a:ln/>
         </p:spPr>
         <p:txBody>
           <a:bodyPr wrap="square" lIns="0" tIns="0" rIns="0" bIns="0" rtlCol="0" anchor="t"/>
           <a:lstStyle/>
           <a:p>
-            <a:pPr indent="0" marL="0">
+            <a:pPr marL="0" indent="0">
               <a:buNone/>
             </a:pPr>
             <a:r>
@@ -6807,9 +6667,9 @@
                 <a:solidFill>
                   <a:srgbClr val="5F7278"/>
                 </a:solidFill>
-                <a:latin typeface="Calibri" pitchFamily="34" charset="0"/>
-                <a:ea typeface="Calibri" pitchFamily="34" charset="-122"/>
-                <a:cs typeface="Calibri" pitchFamily="34" charset="-120"/>
+                <a:latin typeface="Calibri" panose="020F0502020204030204" pitchFamily="34" charset="0"/>
+                <a:ea typeface="Calibri" panose="020F0502020204030204" pitchFamily="34" charset="-122"/>
+                <a:cs typeface="Calibri" panose="020F0502020204030204" pitchFamily="34" charset="-120"/>
               </a:rPr>
               <a:t>Cada escolha resolve um problema concreto da POC.</a:t>
             </a:r>
@@ -6859,13 +6719,12 @@
             <a:avLst/>
           </a:prstGeom>
           <a:noFill/>
-          <a:ln/>
-        </p:spPr>
-        <p:txBody>
-          <a:bodyPr wrap="square" lIns="0" tIns="0" rIns="0" bIns="0" rtlCol="0" anchor="ctr"/>
-          <a:lstStyle/>
-          <a:p>
-            <a:pPr indent="0" marL="0">
+        </p:spPr>
+        <p:txBody>
+          <a:bodyPr wrap="square" lIns="0" tIns="0" rIns="0" bIns="0" rtlCol="0" anchor="ctr"/>
+          <a:lstStyle/>
+          <a:p>
+            <a:pPr marL="0" indent="0">
               <a:buNone/>
             </a:pPr>
             <a:r>
@@ -6873,9 +6732,9 @@
                 <a:solidFill>
                   <a:srgbClr val="028090"/>
                 </a:solidFill>
-                <a:latin typeface="Calibri" pitchFamily="34" charset="0"/>
-                <a:ea typeface="Calibri" pitchFamily="34" charset="-122"/>
-                <a:cs typeface="Calibri" pitchFamily="34" charset="-120"/>
+                <a:latin typeface="Calibri" panose="020F0502020204030204" pitchFamily="34" charset="0"/>
+                <a:ea typeface="Calibri" panose="020F0502020204030204" pitchFamily="34" charset="-122"/>
+                <a:cs typeface="Calibri" panose="020F0502020204030204" pitchFamily="34" charset="-120"/>
               </a:rPr>
               <a:t>kind</a:t>
             </a:r>
@@ -6898,13 +6757,12 @@
             <a:avLst/>
           </a:prstGeom>
           <a:noFill/>
-          <a:ln/>
-        </p:spPr>
-        <p:txBody>
-          <a:bodyPr wrap="square" lIns="0" tIns="0" rIns="0" bIns="0" rtlCol="0" anchor="ctr"/>
-          <a:lstStyle/>
-          <a:p>
-            <a:pPr indent="0" marL="0">
+        </p:spPr>
+        <p:txBody>
+          <a:bodyPr wrap="square" lIns="0" tIns="0" rIns="0" bIns="0" rtlCol="0" anchor="ctr"/>
+          <a:lstStyle/>
+          <a:p>
+            <a:pPr marL="0" indent="0">
               <a:buNone/>
             </a:pPr>
             <a:r>
@@ -6912,9 +6770,9 @@
                 <a:solidFill>
                   <a:srgbClr val="0E2A33"/>
                 </a:solidFill>
-                <a:latin typeface="Calibri" pitchFamily="34" charset="0"/>
-                <a:ea typeface="Calibri" pitchFamily="34" charset="-122"/>
-                <a:cs typeface="Calibri" pitchFamily="34" charset="-120"/>
+                <a:latin typeface="Calibri" panose="020F0502020204030204" pitchFamily="34" charset="0"/>
+                <a:ea typeface="Calibri" panose="020F0502020204030204" pitchFamily="34" charset="-122"/>
+                <a:cs typeface="Calibri" panose="020F0502020204030204" pitchFamily="34" charset="-120"/>
               </a:rPr>
               <a:t>Cluster Kubernetes local</a:t>
             </a:r>
@@ -6937,13 +6795,12 @@
             <a:avLst/>
           </a:prstGeom>
           <a:noFill/>
-          <a:ln/>
-        </p:spPr>
-        <p:txBody>
-          <a:bodyPr wrap="square" lIns="0" tIns="0" rIns="0" bIns="0" rtlCol="0" anchor="ctr"/>
-          <a:lstStyle/>
-          <a:p>
-            <a:pPr indent="0" marL="0">
+        </p:spPr>
+        <p:txBody>
+          <a:bodyPr wrap="square" lIns="0" tIns="0" rIns="0" bIns="0" rtlCol="0" anchor="ctr"/>
+          <a:lstStyle/>
+          <a:p>
+            <a:pPr marL="0" indent="0">
               <a:buNone/>
             </a:pPr>
             <a:r>
@@ -6951,9 +6808,9 @@
                 <a:solidFill>
                   <a:srgbClr val="5F7278"/>
                 </a:solidFill>
-                <a:latin typeface="Calibri" pitchFamily="34" charset="0"/>
-                <a:ea typeface="Calibri" pitchFamily="34" charset="-122"/>
-                <a:cs typeface="Calibri" pitchFamily="34" charset="-120"/>
+                <a:latin typeface="Calibri" panose="020F0502020204030204" pitchFamily="34" charset="0"/>
+                <a:ea typeface="Calibri" panose="020F0502020204030204" pitchFamily="34" charset="-122"/>
+                <a:cs typeface="Calibri" panose="020F0502020204030204" pitchFamily="34" charset="-120"/>
               </a:rPr>
               <a:t>Sobe em container, leve, publica as portas do nó direto no host</a:t>
             </a:r>
@@ -6976,13 +6833,12 @@
             <a:avLst/>
           </a:prstGeom>
           <a:noFill/>
-          <a:ln/>
-        </p:spPr>
-        <p:txBody>
-          <a:bodyPr wrap="square" lIns="0" tIns="0" rIns="0" bIns="0" rtlCol="0" anchor="ctr"/>
-          <a:lstStyle/>
-          <a:p>
-            <a:pPr indent="0" marL="0">
+        </p:spPr>
+        <p:txBody>
+          <a:bodyPr wrap="square" lIns="0" tIns="0" rIns="0" bIns="0" rtlCol="0" anchor="ctr"/>
+          <a:lstStyle/>
+          <a:p>
+            <a:pPr marL="0" indent="0">
               <a:buNone/>
             </a:pPr>
             <a:r>
@@ -6990,9 +6846,9 @@
                 <a:solidFill>
                   <a:srgbClr val="028090"/>
                 </a:solidFill>
-                <a:latin typeface="Calibri" pitchFamily="34" charset="0"/>
-                <a:ea typeface="Calibri" pitchFamily="34" charset="-122"/>
-                <a:cs typeface="Calibri" pitchFamily="34" charset="-120"/>
+                <a:latin typeface="Calibri" panose="020F0502020204030204" pitchFamily="34" charset="0"/>
+                <a:ea typeface="Calibri" panose="020F0502020204030204" pitchFamily="34" charset="-122"/>
+                <a:cs typeface="Calibri" panose="020F0502020204030204" pitchFamily="34" charset="-120"/>
               </a:rPr>
               <a:t>Terraform</a:t>
             </a:r>
@@ -7015,13 +6871,12 @@
             <a:avLst/>
           </a:prstGeom>
           <a:noFill/>
-          <a:ln/>
-        </p:spPr>
-        <p:txBody>
-          <a:bodyPr wrap="square" lIns="0" tIns="0" rIns="0" bIns="0" rtlCol="0" anchor="ctr"/>
-          <a:lstStyle/>
-          <a:p>
-            <a:pPr indent="0" marL="0">
+        </p:spPr>
+        <p:txBody>
+          <a:bodyPr wrap="square" lIns="0" tIns="0" rIns="0" bIns="0" rtlCol="0" anchor="ctr"/>
+          <a:lstStyle/>
+          <a:p>
+            <a:pPr marL="0" indent="0">
               <a:buNone/>
             </a:pPr>
             <a:r>
@@ -7029,9 +6884,9 @@
                 <a:solidFill>
                   <a:srgbClr val="0E2A33"/>
                 </a:solidFill>
-                <a:latin typeface="Calibri" pitchFamily="34" charset="0"/>
-                <a:ea typeface="Calibri" pitchFamily="34" charset="-122"/>
-                <a:cs typeface="Calibri" pitchFamily="34" charset="-120"/>
+                <a:latin typeface="Calibri" panose="020F0502020204030204" pitchFamily="34" charset="0"/>
+                <a:ea typeface="Calibri" panose="020F0502020204030204" pitchFamily="34" charset="-122"/>
+                <a:cs typeface="Calibri" panose="020F0502020204030204" pitchFamily="34" charset="-120"/>
               </a:rPr>
               <a:t>Infraestrutura como código</a:t>
             </a:r>
@@ -7054,13 +6909,12 @@
             <a:avLst/>
           </a:prstGeom>
           <a:noFill/>
-          <a:ln/>
-        </p:spPr>
-        <p:txBody>
-          <a:bodyPr wrap="square" lIns="0" tIns="0" rIns="0" bIns="0" rtlCol="0" anchor="ctr"/>
-          <a:lstStyle/>
-          <a:p>
-            <a:pPr indent="0" marL="0">
+        </p:spPr>
+        <p:txBody>
+          <a:bodyPr wrap="square" lIns="0" tIns="0" rIns="0" bIns="0" rtlCol="0" anchor="ctr"/>
+          <a:lstStyle/>
+          <a:p>
+            <a:pPr marL="0" indent="0">
               <a:buNone/>
             </a:pPr>
             <a:r>
@@ -7068,9 +6922,9 @@
                 <a:solidFill>
                   <a:srgbClr val="5F7278"/>
                 </a:solidFill>
-                <a:latin typeface="Calibri" pitchFamily="34" charset="0"/>
-                <a:ea typeface="Calibri" pitchFamily="34" charset="-122"/>
-                <a:cs typeface="Calibri" pitchFamily="34" charset="-120"/>
+                <a:latin typeface="Calibri" panose="020F0502020204030204" pitchFamily="34" charset="0"/>
+                <a:ea typeface="Calibri" panose="020F0502020204030204" pitchFamily="34" charset="-122"/>
+                <a:cs typeface="Calibri" panose="020F0502020204030204" pitchFamily="34" charset="-120"/>
               </a:rPr>
               <a:t>Um apply recria o ambiente inteiro; estado explícito</a:t>
             </a:r>
@@ -7120,13 +6974,12 @@
             <a:avLst/>
           </a:prstGeom>
           <a:noFill/>
-          <a:ln/>
-        </p:spPr>
-        <p:txBody>
-          <a:bodyPr wrap="square" lIns="0" tIns="0" rIns="0" bIns="0" rtlCol="0" anchor="ctr"/>
-          <a:lstStyle/>
-          <a:p>
-            <a:pPr indent="0" marL="0">
+        </p:spPr>
+        <p:txBody>
+          <a:bodyPr wrap="square" lIns="0" tIns="0" rIns="0" bIns="0" rtlCol="0" anchor="ctr"/>
+          <a:lstStyle/>
+          <a:p>
+            <a:pPr marL="0" indent="0">
               <a:buNone/>
             </a:pPr>
             <a:r>
@@ -7134,9 +6987,9 @@
                 <a:solidFill>
                   <a:srgbClr val="028090"/>
                 </a:solidFill>
-                <a:latin typeface="Calibri" pitchFamily="34" charset="0"/>
-                <a:ea typeface="Calibri" pitchFamily="34" charset="-122"/>
-                <a:cs typeface="Calibri" pitchFamily="34" charset="-120"/>
+                <a:latin typeface="Calibri" panose="020F0502020204030204" pitchFamily="34" charset="0"/>
+                <a:ea typeface="Calibri" panose="020F0502020204030204" pitchFamily="34" charset="-122"/>
+                <a:cs typeface="Calibri" panose="020F0502020204030204" pitchFamily="34" charset="-120"/>
               </a:rPr>
               <a:t>Airflow 2.10</a:t>
             </a:r>
@@ -7159,13 +7012,12 @@
             <a:avLst/>
           </a:prstGeom>
           <a:noFill/>
-          <a:ln/>
-        </p:spPr>
-        <p:txBody>
-          <a:bodyPr wrap="square" lIns="0" tIns="0" rIns="0" bIns="0" rtlCol="0" anchor="ctr"/>
-          <a:lstStyle/>
-          <a:p>
-            <a:pPr indent="0" marL="0">
+        </p:spPr>
+        <p:txBody>
+          <a:bodyPr wrap="square" lIns="0" tIns="0" rIns="0" bIns="0" rtlCol="0" anchor="ctr"/>
+          <a:lstStyle/>
+          <a:p>
+            <a:pPr marL="0" indent="0">
               <a:buNone/>
             </a:pPr>
             <a:r>
@@ -7173,9 +7025,9 @@
                 <a:solidFill>
                   <a:srgbClr val="0E2A33"/>
                 </a:solidFill>
-                <a:latin typeface="Calibri" pitchFamily="34" charset="0"/>
-                <a:ea typeface="Calibri" pitchFamily="34" charset="-122"/>
-                <a:cs typeface="Calibri" pitchFamily="34" charset="-120"/>
+                <a:latin typeface="Calibri" panose="020F0502020204030204" pitchFamily="34" charset="0"/>
+                <a:ea typeface="Calibri" panose="020F0502020204030204" pitchFamily="34" charset="-122"/>
+                <a:cs typeface="Calibri" panose="020F0502020204030204" pitchFamily="34" charset="-120"/>
               </a:rPr>
               <a:t>Orquestração</a:t>
             </a:r>
@@ -7198,13 +7050,12 @@
             <a:avLst/>
           </a:prstGeom>
           <a:noFill/>
-          <a:ln/>
-        </p:spPr>
-        <p:txBody>
-          <a:bodyPr wrap="square" lIns="0" tIns="0" rIns="0" bIns="0" rtlCol="0" anchor="ctr"/>
-          <a:lstStyle/>
-          <a:p>
-            <a:pPr indent="0" marL="0">
+        </p:spPr>
+        <p:txBody>
+          <a:bodyPr wrap="square" lIns="0" tIns="0" rIns="0" bIns="0" rtlCol="0" anchor="ctr"/>
+          <a:lstStyle/>
+          <a:p>
+            <a:pPr marL="0" indent="0">
               <a:buNone/>
             </a:pPr>
             <a:r>
@@ -7212,9 +7063,9 @@
                 <a:solidFill>
                   <a:srgbClr val="5F7278"/>
                 </a:solidFill>
-                <a:latin typeface="Calibri" pitchFamily="34" charset="0"/>
-                <a:ea typeface="Calibri" pitchFamily="34" charset="-122"/>
-                <a:cs typeface="Calibri" pitchFamily="34" charset="-120"/>
+                <a:latin typeface="Calibri" panose="020F0502020204030204" pitchFamily="34" charset="0"/>
+                <a:ea typeface="Calibri" panose="020F0502020204030204" pitchFamily="34" charset="-122"/>
+                <a:cs typeface="Calibri" panose="020F0502020204030204" pitchFamily="34" charset="-120"/>
               </a:rPr>
               <a:t>KubernetesExecutor: cada task é um pod, sem Celery nem Redis</a:t>
             </a:r>
@@ -7237,13 +7088,12 @@
             <a:avLst/>
           </a:prstGeom>
           <a:noFill/>
-          <a:ln/>
-        </p:spPr>
-        <p:txBody>
-          <a:bodyPr wrap="square" lIns="0" tIns="0" rIns="0" bIns="0" rtlCol="0" anchor="ctr"/>
-          <a:lstStyle/>
-          <a:p>
-            <a:pPr indent="0" marL="0">
+        </p:spPr>
+        <p:txBody>
+          <a:bodyPr wrap="square" lIns="0" tIns="0" rIns="0" bIns="0" rtlCol="0" anchor="ctr"/>
+          <a:lstStyle/>
+          <a:p>
+            <a:pPr marL="0" indent="0">
               <a:buNone/>
             </a:pPr>
             <a:r>
@@ -7251,9 +7101,9 @@
                 <a:solidFill>
                   <a:srgbClr val="028090"/>
                 </a:solidFill>
-                <a:latin typeface="Calibri" pitchFamily="34" charset="0"/>
-                <a:ea typeface="Calibri" pitchFamily="34" charset="-122"/>
-                <a:cs typeface="Calibri" pitchFamily="34" charset="-120"/>
+                <a:latin typeface="Calibri" panose="020F0502020204030204" pitchFamily="34" charset="0"/>
+                <a:ea typeface="Calibri" panose="020F0502020204030204" pitchFamily="34" charset="-122"/>
+                <a:cs typeface="Calibri" panose="020F0502020204030204" pitchFamily="34" charset="-120"/>
               </a:rPr>
               <a:t>Meltano</a:t>
             </a:r>
@@ -7276,13 +7126,12 @@
             <a:avLst/>
           </a:prstGeom>
           <a:noFill/>
-          <a:ln/>
-        </p:spPr>
-        <p:txBody>
-          <a:bodyPr wrap="square" lIns="0" tIns="0" rIns="0" bIns="0" rtlCol="0" anchor="ctr"/>
-          <a:lstStyle/>
-          <a:p>
-            <a:pPr indent="0" marL="0">
+        </p:spPr>
+        <p:txBody>
+          <a:bodyPr wrap="square" lIns="0" tIns="0" rIns="0" bIns="0" rtlCol="0" anchor="ctr"/>
+          <a:lstStyle/>
+          <a:p>
+            <a:pPr marL="0" indent="0">
               <a:buNone/>
             </a:pPr>
             <a:r>
@@ -7290,9 +7139,9 @@
                 <a:solidFill>
                   <a:srgbClr val="0E2A33"/>
                 </a:solidFill>
-                <a:latin typeface="Calibri" pitchFamily="34" charset="0"/>
-                <a:ea typeface="Calibri" pitchFamily="34" charset="-122"/>
-                <a:cs typeface="Calibri" pitchFamily="34" charset="-120"/>
+                <a:latin typeface="Calibri" panose="020F0502020204030204" pitchFamily="34" charset="0"/>
+                <a:ea typeface="Calibri" panose="020F0502020204030204" pitchFamily="34" charset="-122"/>
+                <a:cs typeface="Calibri" panose="020F0502020204030204" pitchFamily="34" charset="-120"/>
               </a:rPr>
               <a:t>Extract e Load</a:t>
             </a:r>
@@ -7315,13 +7164,12 @@
             <a:avLst/>
           </a:prstGeom>
           <a:noFill/>
-          <a:ln/>
-        </p:spPr>
-        <p:txBody>
-          <a:bodyPr wrap="square" lIns="0" tIns="0" rIns="0" bIns="0" rtlCol="0" anchor="ctr"/>
-          <a:lstStyle/>
-          <a:p>
-            <a:pPr indent="0" marL="0">
+        </p:spPr>
+        <p:txBody>
+          <a:bodyPr wrap="square" lIns="0" tIns="0" rIns="0" bIns="0" rtlCol="0" anchor="ctr"/>
+          <a:lstStyle/>
+          <a:p>
+            <a:pPr marL="0" indent="0">
               <a:buNone/>
             </a:pPr>
             <a:r>
@@ -7329,9 +7177,9 @@
                 <a:solidFill>
                   <a:srgbClr val="5F7278"/>
                 </a:solidFill>
-                <a:latin typeface="Calibri" pitchFamily="34" charset="0"/>
-                <a:ea typeface="Calibri" pitchFamily="34" charset="-122"/>
-                <a:cs typeface="Calibri" pitchFamily="34" charset="-120"/>
+                <a:latin typeface="Calibri" panose="020F0502020204030204" pitchFamily="34" charset="0"/>
+                <a:ea typeface="Calibri" panose="020F0502020204030204" pitchFamily="34" charset="-122"/>
+                <a:cs typeface="Calibri" panose="020F0502020204030204" pitchFamily="34" charset="-120"/>
               </a:rPr>
               <a:t>Padrão Singer, configuração declarativa, MERGE por chave</a:t>
             </a:r>
@@ -7381,13 +7229,12 @@
             <a:avLst/>
           </a:prstGeom>
           <a:noFill/>
-          <a:ln/>
-        </p:spPr>
-        <p:txBody>
-          <a:bodyPr wrap="square" lIns="0" tIns="0" rIns="0" bIns="0" rtlCol="0" anchor="ctr"/>
-          <a:lstStyle/>
-          <a:p>
-            <a:pPr indent="0" marL="0">
+        </p:spPr>
+        <p:txBody>
+          <a:bodyPr wrap="square" lIns="0" tIns="0" rIns="0" bIns="0" rtlCol="0" anchor="ctr"/>
+          <a:lstStyle/>
+          <a:p>
+            <a:pPr marL="0" indent="0">
               <a:buNone/>
             </a:pPr>
             <a:r>
@@ -7395,9 +7242,9 @@
                 <a:solidFill>
                   <a:srgbClr val="028090"/>
                 </a:solidFill>
-                <a:latin typeface="Calibri" pitchFamily="34" charset="0"/>
-                <a:ea typeface="Calibri" pitchFamily="34" charset="-122"/>
-                <a:cs typeface="Calibri" pitchFamily="34" charset="-120"/>
+                <a:latin typeface="Calibri" panose="020F0502020204030204" pitchFamily="34" charset="0"/>
+                <a:ea typeface="Calibri" panose="020F0502020204030204" pitchFamily="34" charset="-122"/>
+                <a:cs typeface="Calibri" panose="020F0502020204030204" pitchFamily="34" charset="-120"/>
               </a:rPr>
               <a:t>MinIO</a:t>
             </a:r>
@@ -7420,13 +7267,12 @@
             <a:avLst/>
           </a:prstGeom>
           <a:noFill/>
-          <a:ln/>
-        </p:spPr>
-        <p:txBody>
-          <a:bodyPr wrap="square" lIns="0" tIns="0" rIns="0" bIns="0" rtlCol="0" anchor="ctr"/>
-          <a:lstStyle/>
-          <a:p>
-            <a:pPr indent="0" marL="0">
+        </p:spPr>
+        <p:txBody>
+          <a:bodyPr wrap="square" lIns="0" tIns="0" rIns="0" bIns="0" rtlCol="0" anchor="ctr"/>
+          <a:lstStyle/>
+          <a:p>
+            <a:pPr marL="0" indent="0">
               <a:buNone/>
             </a:pPr>
             <a:r>
@@ -7434,9 +7280,9 @@
                 <a:solidFill>
                   <a:srgbClr val="0E2A33"/>
                 </a:solidFill>
-                <a:latin typeface="Calibri" pitchFamily="34" charset="0"/>
-                <a:ea typeface="Calibri" pitchFamily="34" charset="-122"/>
-                <a:cs typeface="Calibri" pitchFamily="34" charset="-120"/>
+                <a:latin typeface="Calibri" panose="020F0502020204030204" pitchFamily="34" charset="0"/>
+                <a:ea typeface="Calibri" panose="020F0502020204030204" pitchFamily="34" charset="-122"/>
+                <a:cs typeface="Calibri" panose="020F0502020204030204" pitchFamily="34" charset="-120"/>
               </a:rPr>
               <a:t>Data Lake</a:t>
             </a:r>
@@ -7459,13 +7305,12 @@
             <a:avLst/>
           </a:prstGeom>
           <a:noFill/>
-          <a:ln/>
-        </p:spPr>
-        <p:txBody>
-          <a:bodyPr wrap="square" lIns="0" tIns="0" rIns="0" bIns="0" rtlCol="0" anchor="ctr"/>
-          <a:lstStyle/>
-          <a:p>
-            <a:pPr indent="0" marL="0">
+        </p:spPr>
+        <p:txBody>
+          <a:bodyPr wrap="square" lIns="0" tIns="0" rIns="0" bIns="0" rtlCol="0" anchor="ctr"/>
+          <a:lstStyle/>
+          <a:p>
+            <a:pPr marL="0" indent="0">
               <a:buNone/>
             </a:pPr>
             <a:r>
@@ -7473,11 +7318,33 @@
                 <a:solidFill>
                   <a:srgbClr val="5F7278"/>
                 </a:solidFill>
-                <a:latin typeface="Calibri" pitchFamily="34" charset="0"/>
-                <a:ea typeface="Calibri" pitchFamily="34" charset="-122"/>
-                <a:cs typeface="Calibri" pitchFamily="34" charset="-120"/>
-              </a:rPr>
-              <a:t>API S3 — mesma interface que a nuvem</a:t>
+                <a:latin typeface="Calibri" panose="020F0502020204030204" pitchFamily="34" charset="0"/>
+                <a:ea typeface="Calibri" panose="020F0502020204030204" pitchFamily="34" charset="-122"/>
+                <a:cs typeface="Calibri" panose="020F0502020204030204" pitchFamily="34" charset="-120"/>
+              </a:rPr>
+              <a:t>API S3 </a:t>
+            </a:r>
+            <a:r>
+              <a:rPr lang="pt-BR" altLang="en-US" sz="1250" dirty="0">
+                <a:solidFill>
+                  <a:srgbClr val="5F7278"/>
+                </a:solidFill>
+                <a:latin typeface="Calibri" panose="020F0502020204030204" pitchFamily="34" charset="0"/>
+                <a:ea typeface="Calibri" panose="020F0502020204030204" pitchFamily="34" charset="-122"/>
+                <a:cs typeface="Calibri" panose="020F0502020204030204" pitchFamily="34" charset="-120"/>
+              </a:rPr>
+              <a:t>--&gt;</a:t>
+            </a:r>
+            <a:r>
+              <a:rPr lang="en-US" sz="1250" dirty="0">
+                <a:solidFill>
+                  <a:srgbClr val="5F7278"/>
+                </a:solidFill>
+                <a:latin typeface="Calibri" panose="020F0502020204030204" pitchFamily="34" charset="0"/>
+                <a:ea typeface="Calibri" panose="020F0502020204030204" pitchFamily="34" charset="-122"/>
+                <a:cs typeface="Calibri" panose="020F0502020204030204" pitchFamily="34" charset="-120"/>
+              </a:rPr>
+              <a:t> mesma interface que a nuvem</a:t>
             </a:r>
             <a:endParaRPr lang="en-US" sz="1250" dirty="0"/>
           </a:p>
@@ -7498,13 +7365,12 @@
             <a:avLst/>
           </a:prstGeom>
           <a:noFill/>
-          <a:ln/>
-        </p:spPr>
-        <p:txBody>
-          <a:bodyPr wrap="square" lIns="0" tIns="0" rIns="0" bIns="0" rtlCol="0" anchor="ctr"/>
-          <a:lstStyle/>
-          <a:p>
-            <a:pPr indent="0" marL="0">
+        </p:spPr>
+        <p:txBody>
+          <a:bodyPr wrap="square" lIns="0" tIns="0" rIns="0" bIns="0" rtlCol="0" anchor="ctr"/>
+          <a:lstStyle/>
+          <a:p>
+            <a:pPr marL="0" indent="0">
               <a:buNone/>
             </a:pPr>
             <a:r>
@@ -7512,9 +7378,9 @@
                 <a:solidFill>
                   <a:srgbClr val="028090"/>
                 </a:solidFill>
-                <a:latin typeface="Calibri" pitchFamily="34" charset="0"/>
-                <a:ea typeface="Calibri" pitchFamily="34" charset="-122"/>
-                <a:cs typeface="Calibri" pitchFamily="34" charset="-120"/>
+                <a:latin typeface="Calibri" panose="020F0502020204030204" pitchFamily="34" charset="0"/>
+                <a:ea typeface="Calibri" panose="020F0502020204030204" pitchFamily="34" charset="-122"/>
+                <a:cs typeface="Calibri" panose="020F0502020204030204" pitchFamily="34" charset="-120"/>
               </a:rPr>
               <a:t>PostgreSQL 16</a:t>
             </a:r>
@@ -7537,13 +7403,12 @@
             <a:avLst/>
           </a:prstGeom>
           <a:noFill/>
-          <a:ln/>
-        </p:spPr>
-        <p:txBody>
-          <a:bodyPr wrap="square" lIns="0" tIns="0" rIns="0" bIns="0" rtlCol="0" anchor="ctr"/>
-          <a:lstStyle/>
-          <a:p>
-            <a:pPr indent="0" marL="0">
+        </p:spPr>
+        <p:txBody>
+          <a:bodyPr wrap="square" lIns="0" tIns="0" rIns="0" bIns="0" rtlCol="0" anchor="ctr"/>
+          <a:lstStyle/>
+          <a:p>
+            <a:pPr marL="0" indent="0">
               <a:buNone/>
             </a:pPr>
             <a:r>
@@ -7551,9 +7416,9 @@
                 <a:solidFill>
                   <a:srgbClr val="0E2A33"/>
                 </a:solidFill>
-                <a:latin typeface="Calibri" pitchFamily="34" charset="0"/>
-                <a:ea typeface="Calibri" pitchFamily="34" charset="-122"/>
-                <a:cs typeface="Calibri" pitchFamily="34" charset="-120"/>
+                <a:latin typeface="Calibri" panose="020F0502020204030204" pitchFamily="34" charset="0"/>
+                <a:ea typeface="Calibri" panose="020F0502020204030204" pitchFamily="34" charset="-122"/>
+                <a:cs typeface="Calibri" panose="020F0502020204030204" pitchFamily="34" charset="-120"/>
               </a:rPr>
               <a:t>Data Warehouse</a:t>
             </a:r>
@@ -7576,13 +7441,12 @@
             <a:avLst/>
           </a:prstGeom>
           <a:noFill/>
-          <a:ln/>
-        </p:spPr>
-        <p:txBody>
-          <a:bodyPr wrap="square" lIns="0" tIns="0" rIns="0" bIns="0" rtlCol="0" anchor="ctr"/>
-          <a:lstStyle/>
-          <a:p>
-            <a:pPr indent="0" marL="0">
+        </p:spPr>
+        <p:txBody>
+          <a:bodyPr wrap="square" lIns="0" tIns="0" rIns="0" bIns="0" rtlCol="0" anchor="ctr"/>
+          <a:lstStyle/>
+          <a:p>
+            <a:pPr marL="0" indent="0">
               <a:buNone/>
             </a:pPr>
             <a:r>
@@ -7590,9 +7454,9 @@
                 <a:solidFill>
                   <a:srgbClr val="5F7278"/>
                 </a:solidFill>
-                <a:latin typeface="Calibri" pitchFamily="34" charset="0"/>
-                <a:ea typeface="Calibri" pitchFamily="34" charset="-122"/>
-                <a:cs typeface="Calibri" pitchFamily="34" charset="-120"/>
+                <a:latin typeface="Calibri" panose="020F0502020204030204" pitchFamily="34" charset="0"/>
+                <a:ea typeface="Calibri" panose="020F0502020204030204" pitchFamily="34" charset="-122"/>
+                <a:cs typeface="Calibri" panose="020F0502020204030204" pitchFamily="34" charset="-120"/>
               </a:rPr>
               <a:t>Destino analítico simples e conhecido pelo time</a:t>
             </a:r>
@@ -7615,13 +7479,12 @@
             <a:avLst/>
           </a:prstGeom>
           <a:noFill/>
-          <a:ln/>
-        </p:spPr>
-        <p:txBody>
-          <a:bodyPr wrap="square" lIns="0" tIns="0" rIns="0" bIns="0" rtlCol="0" anchor="ctr"/>
-          <a:lstStyle/>
-          <a:p>
-            <a:pPr algn="r" indent="0" marL="0">
+        </p:spPr>
+        <p:txBody>
+          <a:bodyPr wrap="square" lIns="0" tIns="0" rIns="0" bIns="0" rtlCol="0" anchor="ctr"/>
+          <a:lstStyle/>
+          <a:p>
+            <a:pPr marL="0" indent="0" algn="r">
               <a:buNone/>
             </a:pPr>
             <a:r>
@@ -7629,9 +7492,9 @@
                 <a:solidFill>
                   <a:srgbClr val="5F7278"/>
                 </a:solidFill>
-                <a:latin typeface="Calibri" pitchFamily="34" charset="0"/>
-                <a:ea typeface="Calibri" pitchFamily="34" charset="-122"/>
-                <a:cs typeface="Calibri" pitchFamily="34" charset="-120"/>
+                <a:latin typeface="Calibri" panose="020F0502020204030204" pitchFamily="34" charset="0"/>
+                <a:ea typeface="Calibri" panose="020F0502020204030204" pitchFamily="34" charset="-122"/>
+                <a:cs typeface="Calibri" panose="020F0502020204030204" pitchFamily="34" charset="-120"/>
               </a:rPr>
               <a:t>5</a:t>
             </a:r>
@@ -7649,12 +7512,13 @@
 
 <file path=ppt/slides/slide6.xml><?xml version="1.0" encoding="utf-8"?>
 <p:sld xmlns:a="http://schemas.openxmlformats.org/drawingml/2006/main" xmlns:r="http://schemas.openxmlformats.org/officeDocument/2006/relationships" xmlns:p="http://schemas.openxmlformats.org/presentationml/2006/main">
-  <p:cSld name="Slide 6">
+  <p:cSld>
     <p:bg>
       <p:bgPr>
         <a:solidFill>
           <a:srgbClr val="FFFFFF"/>
         </a:solidFill>
+        <a:effectLst/>
       </p:bgPr>
     </p:bg>
     <p:spTree>
@@ -7686,13 +7550,12 @@
             <a:avLst/>
           </a:prstGeom>
           <a:noFill/>
-          <a:ln/>
-        </p:spPr>
-        <p:txBody>
-          <a:bodyPr wrap="square" lIns="0" tIns="0" rIns="0" bIns="0" rtlCol="0" anchor="ctr"/>
-          <a:lstStyle/>
-          <a:p>
-            <a:pPr indent="0" marL="0">
+        </p:spPr>
+        <p:txBody>
+          <a:bodyPr wrap="square" lIns="0" tIns="0" rIns="0" bIns="0" rtlCol="0" anchor="ctr"/>
+          <a:lstStyle/>
+          <a:p>
+            <a:pPr marL="0" indent="0">
               <a:buNone/>
             </a:pPr>
             <a:r>
@@ -7700,9 +7563,9 @@
                 <a:solidFill>
                   <a:srgbClr val="0E2A33"/>
                 </a:solidFill>
-                <a:latin typeface="Cambria" pitchFamily="34" charset="0"/>
-                <a:ea typeface="Cambria" pitchFamily="34" charset="-122"/>
-                <a:cs typeface="Cambria" pitchFamily="34" charset="-120"/>
+                <a:latin typeface="Cambria" panose="02040503050406030204" pitchFamily="34" charset="0"/>
+                <a:ea typeface="Cambria" panose="02040503050406030204" pitchFamily="34" charset="-122"/>
+                <a:cs typeface="Cambria" panose="02040503050406030204" pitchFamily="34" charset="-120"/>
               </a:rPr>
               <a:t>Estratégia de ingestão</a:t>
             </a:r>
@@ -7725,13 +7588,12 @@
             <a:avLst/>
           </a:prstGeom>
           <a:noFill/>
-          <a:ln/>
         </p:spPr>
         <p:txBody>
           <a:bodyPr wrap="square" lIns="0" tIns="0" rIns="0" bIns="0" rtlCol="0" anchor="t"/>
           <a:lstStyle/>
           <a:p>
-            <a:pPr indent="0" marL="0">
+            <a:pPr marL="0" indent="0">
               <a:buNone/>
             </a:pPr>
             <a:r>
@@ -7739,9 +7601,9 @@
                 <a:solidFill>
                   <a:srgbClr val="5F7278"/>
                 </a:solidFill>
-                <a:latin typeface="Calibri" pitchFamily="34" charset="0"/>
-                <a:ea typeface="Calibri" pitchFamily="34" charset="-122"/>
-                <a:cs typeface="Calibri" pitchFamily="34" charset="-120"/>
+                <a:latin typeface="Calibri" panose="020F0502020204030204" pitchFamily="34" charset="0"/>
+                <a:ea typeface="Calibri" panose="020F0502020204030204" pitchFamily="34" charset="-122"/>
+                <a:cs typeface="Calibri" panose="020F0502020204030204" pitchFamily="34" charset="-120"/>
               </a:rPr>
               <a:t>ELT: carrega primeiro, transforma depois. Dois destinos, propósitos diferentes.</a:t>
             </a:r>
@@ -7791,13 +7653,12 @@
             <a:avLst/>
           </a:prstGeom>
           <a:noFill/>
-          <a:ln/>
-        </p:spPr>
-        <p:txBody>
-          <a:bodyPr wrap="square" lIns="0" tIns="0" rIns="0" bIns="0" rtlCol="0" anchor="ctr"/>
-          <a:lstStyle/>
-          <a:p>
-            <a:pPr indent="0" marL="0">
+        </p:spPr>
+        <p:txBody>
+          <a:bodyPr wrap="square" lIns="0" tIns="0" rIns="0" bIns="0" rtlCol="0" anchor="ctr"/>
+          <a:lstStyle/>
+          <a:p>
+            <a:pPr marL="0" indent="0">
               <a:buNone/>
             </a:pPr>
             <a:r>
@@ -7805,9 +7666,9 @@
                 <a:solidFill>
                   <a:srgbClr val="028090"/>
                 </a:solidFill>
-                <a:latin typeface="Cambria" pitchFamily="34" charset="0"/>
-                <a:ea typeface="Cambria" pitchFamily="34" charset="-122"/>
-                <a:cs typeface="Cambria" pitchFamily="34" charset="-120"/>
+                <a:latin typeface="Cambria" panose="02040503050406030204" pitchFamily="34" charset="0"/>
+                <a:ea typeface="Cambria" panose="02040503050406030204" pitchFamily="34" charset="-122"/>
+                <a:cs typeface="Cambria" panose="02040503050406030204" pitchFamily="34" charset="-120"/>
               </a:rPr>
               <a:t>Data Lake</a:t>
             </a:r>
@@ -7830,13 +7691,12 @@
             <a:avLst/>
           </a:prstGeom>
           <a:noFill/>
-          <a:ln/>
-        </p:spPr>
-        <p:txBody>
-          <a:bodyPr wrap="square" lIns="0" tIns="0" rIns="0" bIns="0" rtlCol="0" anchor="ctr"/>
-          <a:lstStyle/>
-          <a:p>
-            <a:pPr indent="0" marL="0">
+        </p:spPr>
+        <p:txBody>
+          <a:bodyPr wrap="square" lIns="0" tIns="0" rIns="0" bIns="0" rtlCol="0" anchor="ctr"/>
+          <a:lstStyle/>
+          <a:p>
+            <a:pPr marL="0" indent="0">
               <a:buNone/>
             </a:pPr>
             <a:r>
@@ -7844,9 +7704,9 @@
                 <a:solidFill>
                   <a:srgbClr val="1C2B30"/>
                 </a:solidFill>
-                <a:latin typeface="Calibri" pitchFamily="34" charset="0"/>
-                <a:ea typeface="Calibri" pitchFamily="34" charset="-122"/>
-                <a:cs typeface="Calibri" pitchFamily="34" charset="-120"/>
+                <a:latin typeface="Calibri" panose="020F0502020204030204" pitchFamily="34" charset="0"/>
+                <a:ea typeface="Calibri" panose="020F0502020204030204" pitchFamily="34" charset="-122"/>
+                <a:cs typeface="Calibri" panose="020F0502020204030204" pitchFamily="34" charset="-120"/>
               </a:rPr>
               <a:t>Cópia byte a byte, particionada por data de referência.</a:t>
             </a:r>
@@ -7869,13 +7729,12 @@
             <a:avLst/>
           </a:prstGeom>
           <a:noFill/>
-          <a:ln/>
-        </p:spPr>
-        <p:txBody>
-          <a:bodyPr wrap="square" lIns="0" tIns="0" rIns="0" bIns="0" rtlCol="0" anchor="ctr"/>
-          <a:lstStyle/>
-          <a:p>
-            <a:pPr indent="0" marL="0">
+        </p:spPr>
+        <p:txBody>
+          <a:bodyPr wrap="square" lIns="0" tIns="0" rIns="0" bIns="0" rtlCol="0" anchor="ctr"/>
+          <a:lstStyle/>
+          <a:p>
+            <a:pPr marL="0" indent="0">
               <a:buNone/>
             </a:pPr>
             <a:r>
@@ -7883,9 +7742,9 @@
                 <a:solidFill>
                   <a:srgbClr val="17414D"/>
                 </a:solidFill>
-                <a:latin typeface="Courier New" pitchFamily="34" charset="0"/>
-                <a:ea typeface="Courier New" pitchFamily="34" charset="-122"/>
-                <a:cs typeface="Courier New" pitchFamily="34" charset="-120"/>
+                <a:latin typeface="Courier New" panose="02070309020205020404" pitchFamily="34" charset="0"/>
+                <a:ea typeface="Courier New" panose="02070309020205020404" pitchFamily="34" charset="-122"/>
+                <a:cs typeface="Courier New" panose="02070309020205020404" pitchFamily="34" charset="-120"/>
               </a:rPr>
               <a:t>raw/erp/&lt;tabela&gt;/data_referencia=&lt;ds&gt;/</a:t>
             </a:r>
@@ -7908,13 +7767,12 @@
             <a:avLst/>
           </a:prstGeom>
           <a:noFill/>
-          <a:ln/>
-        </p:spPr>
-        <p:txBody>
-          <a:bodyPr wrap="square" lIns="0" tIns="0" rIns="0" bIns="0" rtlCol="0" anchor="ctr"/>
-          <a:lstStyle/>
-          <a:p>
-            <a:pPr indent="0" marL="0">
+        </p:spPr>
+        <p:txBody>
+          <a:bodyPr wrap="square" lIns="0" tIns="0" rIns="0" bIns="0" rtlCol="0" anchor="ctr"/>
+          <a:lstStyle/>
+          <a:p>
+            <a:pPr marL="0" indent="0">
               <a:buNone/>
             </a:pPr>
             <a:r>
@@ -7922,9 +7780,9 @@
                 <a:solidFill>
                   <a:srgbClr val="5F7278"/>
                 </a:solidFill>
-                <a:latin typeface="Calibri" pitchFamily="34" charset="0"/>
-                <a:ea typeface="Calibri" pitchFamily="34" charset="-122"/>
-                <a:cs typeface="Calibri" pitchFamily="34" charset="-120"/>
+                <a:latin typeface="Calibri" panose="020F0502020204030204" pitchFamily="34" charset="0"/>
+                <a:ea typeface="Calibri" panose="020F0502020204030204" pitchFamily="34" charset="-122"/>
+                <a:cs typeface="Calibri" panose="020F0502020204030204" pitchFamily="34" charset="-120"/>
               </a:rPr>
               <a:t>Registro imutável do que foi recebido. Permite reprocessar qualquer data sem voltar ao ERP.</a:t>
             </a:r>
@@ -7974,13 +7832,12 @@
             <a:avLst/>
           </a:prstGeom>
           <a:noFill/>
-          <a:ln/>
-        </p:spPr>
-        <p:txBody>
-          <a:bodyPr wrap="square" lIns="0" tIns="0" rIns="0" bIns="0" rtlCol="0" anchor="ctr"/>
-          <a:lstStyle/>
-          <a:p>
-            <a:pPr indent="0" marL="0">
+        </p:spPr>
+        <p:txBody>
+          <a:bodyPr wrap="square" lIns="0" tIns="0" rIns="0" bIns="0" rtlCol="0" anchor="ctr"/>
+          <a:lstStyle/>
+          <a:p>
+            <a:pPr marL="0" indent="0">
               <a:buNone/>
             </a:pPr>
             <a:r>
@@ -7988,9 +7845,9 @@
                 <a:solidFill>
                   <a:srgbClr val="028090"/>
                 </a:solidFill>
-                <a:latin typeface="Cambria" pitchFamily="34" charset="0"/>
-                <a:ea typeface="Cambria" pitchFamily="34" charset="-122"/>
-                <a:cs typeface="Cambria" pitchFamily="34" charset="-120"/>
+                <a:latin typeface="Cambria" panose="02040503050406030204" pitchFamily="34" charset="0"/>
+                <a:ea typeface="Cambria" panose="02040503050406030204" pitchFamily="34" charset="-122"/>
+                <a:cs typeface="Cambria" panose="02040503050406030204" pitchFamily="34" charset="-120"/>
               </a:rPr>
               <a:t>Data Warehouse</a:t>
             </a:r>
@@ -8013,13 +7870,12 @@
             <a:avLst/>
           </a:prstGeom>
           <a:noFill/>
-          <a:ln/>
-        </p:spPr>
-        <p:txBody>
-          <a:bodyPr wrap="square" lIns="0" tIns="0" rIns="0" bIns="0" rtlCol="0" anchor="ctr"/>
-          <a:lstStyle/>
-          <a:p>
-            <a:pPr indent="0" marL="0">
+        </p:spPr>
+        <p:txBody>
+          <a:bodyPr wrap="square" lIns="0" tIns="0" rIns="0" bIns="0" rtlCol="0" anchor="ctr"/>
+          <a:lstStyle/>
+          <a:p>
+            <a:pPr marL="0" indent="0">
               <a:buNone/>
             </a:pPr>
             <a:r>
@@ -8027,9 +7883,9 @@
                 <a:solidFill>
                   <a:srgbClr val="1C2B30"/>
                 </a:solidFill>
-                <a:latin typeface="Calibri" pitchFamily="34" charset="0"/>
-                <a:ea typeface="Calibri" pitchFamily="34" charset="-122"/>
-                <a:cs typeface="Calibri" pitchFamily="34" charset="-120"/>
+                <a:latin typeface="Calibri" panose="020F0502020204030204" pitchFamily="34" charset="0"/>
+                <a:ea typeface="Calibri" panose="020F0502020204030204" pitchFamily="34" charset="-122"/>
+                <a:cs typeface="Calibri" panose="020F0502020204030204" pitchFamily="34" charset="-120"/>
               </a:rPr>
               <a:t>Schema raw carregado pelo Meltano.</a:t>
             </a:r>
@@ -8052,13 +7908,12 @@
             <a:avLst/>
           </a:prstGeom>
           <a:noFill/>
-          <a:ln/>
-        </p:spPr>
-        <p:txBody>
-          <a:bodyPr wrap="square" lIns="0" tIns="0" rIns="0" bIns="0" rtlCol="0" anchor="ctr"/>
-          <a:lstStyle/>
-          <a:p>
-            <a:pPr indent="0" marL="0">
+        </p:spPr>
+        <p:txBody>
+          <a:bodyPr wrap="square" lIns="0" tIns="0" rIns="0" bIns="0" rtlCol="0" anchor="ctr"/>
+          <a:lstStyle/>
+          <a:p>
+            <a:pPr marL="0" indent="0">
               <a:buNone/>
             </a:pPr>
             <a:r>
@@ -8066,9 +7921,9 @@
                 <a:solidFill>
                   <a:srgbClr val="17414D"/>
                 </a:solidFill>
-                <a:latin typeface="Courier New" pitchFamily="34" charset="0"/>
-                <a:ea typeface="Courier New" pitchFamily="34" charset="-122"/>
-                <a:cs typeface="Courier New" pitchFamily="34" charset="-120"/>
+                <a:latin typeface="Courier New" panose="02070309020205020404" pitchFamily="34" charset="0"/>
+                <a:ea typeface="Courier New" panose="02070309020205020404" pitchFamily="34" charset="-122"/>
+                <a:cs typeface="Courier New" panose="02070309020205020404" pitchFamily="34" charset="-120"/>
               </a:rPr>
               <a:t>tap-csv  →  target-postgres</a:t>
             </a:r>
@@ -8091,13 +7946,12 @@
             <a:avLst/>
           </a:prstGeom>
           <a:noFill/>
-          <a:ln/>
-        </p:spPr>
-        <p:txBody>
-          <a:bodyPr wrap="square" lIns="0" tIns="0" rIns="0" bIns="0" rtlCol="0" anchor="ctr"/>
-          <a:lstStyle/>
-          <a:p>
-            <a:pPr indent="0" marL="0">
+        </p:spPr>
+        <p:txBody>
+          <a:bodyPr wrap="square" lIns="0" tIns="0" rIns="0" bIns="0" rtlCol="0" anchor="ctr"/>
+          <a:lstStyle/>
+          <a:p>
+            <a:pPr marL="0" indent="0">
               <a:buNone/>
             </a:pPr>
             <a:r>
@@ -8105,9 +7959,9 @@
                 <a:solidFill>
                   <a:srgbClr val="5F7278"/>
                 </a:solidFill>
-                <a:latin typeface="Calibri" pitchFamily="34" charset="0"/>
-                <a:ea typeface="Calibri" pitchFamily="34" charset="-122"/>
-                <a:cs typeface="Calibri" pitchFamily="34" charset="-120"/>
+                <a:latin typeface="Calibri" panose="020F0502020204030204" pitchFamily="34" charset="0"/>
+                <a:ea typeface="Calibri" panose="020F0502020204030204" pitchFamily="34" charset="-122"/>
+                <a:cs typeface="Calibri" panose="020F0502020204030204" pitchFamily="34" charset="-120"/>
               </a:rPr>
               <a:t>Chave primária declarada por tabela e colunas _sdc_* de rastreabilidade de origem.</a:t>
             </a:r>
@@ -8157,13 +8011,12 @@
             <a:avLst/>
           </a:prstGeom>
           <a:noFill/>
-          <a:ln/>
-        </p:spPr>
-        <p:txBody>
-          <a:bodyPr wrap="square" lIns="0" tIns="0" rIns="0" bIns="0" rtlCol="0" anchor="ctr"/>
-          <a:lstStyle/>
-          <a:p>
-            <a:pPr indent="0" marL="0">
+        </p:spPr>
+        <p:txBody>
+          <a:bodyPr wrap="square" lIns="0" tIns="0" rIns="0" bIns="0" rtlCol="0" anchor="ctr"/>
+          <a:lstStyle/>
+          <a:p>
+            <a:pPr marL="0" indent="0">
               <a:buNone/>
             </a:pPr>
             <a:r>
@@ -8171,9 +8024,9 @@
                 <a:solidFill>
                   <a:srgbClr val="02C39A"/>
                 </a:solidFill>
-                <a:latin typeface="Cambria" pitchFamily="34" charset="0"/>
-                <a:ea typeface="Cambria" pitchFamily="34" charset="-122"/>
-                <a:cs typeface="Cambria" pitchFamily="34" charset="-120"/>
+                <a:latin typeface="Cambria" panose="02040503050406030204" pitchFamily="34" charset="0"/>
+                <a:ea typeface="Cambria" panose="02040503050406030204" pitchFamily="34" charset="-122"/>
+                <a:cs typeface="Cambria" panose="02040503050406030204" pitchFamily="34" charset="-120"/>
               </a:rPr>
               <a:t>Idempotência</a:t>
             </a:r>
@@ -8196,13 +8049,12 @@
             <a:avLst/>
           </a:prstGeom>
           <a:noFill/>
-          <a:ln/>
-        </p:spPr>
-        <p:txBody>
-          <a:bodyPr wrap="square" lIns="0" tIns="0" rIns="0" bIns="0" rtlCol="0" anchor="ctr"/>
-          <a:lstStyle/>
-          <a:p>
-            <a:pPr indent="0" marL="0">
+        </p:spPr>
+        <p:txBody>
+          <a:bodyPr wrap="square" lIns="0" tIns="0" rIns="0" bIns="0" rtlCol="0" anchor="ctr"/>
+          <a:lstStyle/>
+          <a:p>
+            <a:pPr marL="0" indent="0">
               <a:buNone/>
             </a:pPr>
             <a:r>
@@ -8210,11 +8062,101 @@
                 <a:solidFill>
                   <a:srgbClr val="B9D6DA"/>
                 </a:solidFill>
-                <a:latin typeface="Calibri" pitchFamily="34" charset="0"/>
-                <a:ea typeface="Calibri" pitchFamily="34" charset="-122"/>
-                <a:cs typeface="Calibri" pitchFamily="34" charset="-120"/>
-              </a:rPr>
-              <a:t>A partição do Data Lake é sobrescrita e o target-postgres faz MERGE em vez de INSERT. Reprocessar a mesma data não duplica nada — verificado em três execuções seguidas.</a:t>
+                <a:latin typeface="Calibri" panose="020F0502020204030204" pitchFamily="34" charset="0"/>
+                <a:ea typeface="Calibri" panose="020F0502020204030204" pitchFamily="34" charset="-122"/>
+                <a:cs typeface="Calibri" panose="020F0502020204030204" pitchFamily="34" charset="-120"/>
+              </a:rPr>
+              <a:t>A partição do Data Lake é sobrescrita e o target-postgres faz MERGE em vez de INSERT. Reprocessar a mesma data não duplica nada</a:t>
+            </a:r>
+            <a:r>
+              <a:rPr lang="pt-BR" altLang="en-US" sz="1350" dirty="0">
+                <a:solidFill>
+                  <a:srgbClr val="B9D6DA"/>
+                </a:solidFill>
+                <a:latin typeface="Calibri" panose="020F0502020204030204" pitchFamily="34" charset="0"/>
+                <a:ea typeface="Calibri" panose="020F0502020204030204" pitchFamily="34" charset="-122"/>
+                <a:cs typeface="Calibri" panose="020F0502020204030204" pitchFamily="34" charset="-120"/>
+              </a:rPr>
+              <a:t>.</a:t>
+            </a:r>
+            <a:endParaRPr lang="pt-BR" altLang="en-US" sz="1350" dirty="0">
+              <a:solidFill>
+                <a:srgbClr val="B9D6DA"/>
+              </a:solidFill>
+              <a:latin typeface="Calibri" panose="020F0502020204030204" pitchFamily="34" charset="0"/>
+              <a:ea typeface="Calibri" panose="020F0502020204030204" pitchFamily="34" charset="-122"/>
+              <a:cs typeface="Calibri" panose="020F0502020204030204" pitchFamily="34" charset="-120"/>
+            </a:endParaRPr>
+          </a:p>
+          <a:p>
+            <a:pPr marL="0" indent="0">
+              <a:buNone/>
+            </a:pPr>
+            <a:r>
+              <a:rPr lang="pt-BR" altLang="en-US" sz="1350" dirty="0">
+                <a:solidFill>
+                  <a:srgbClr val="B9D6DA"/>
+                </a:solidFill>
+                <a:latin typeface="Calibri" panose="020F0502020204030204" pitchFamily="34" charset="0"/>
+                <a:ea typeface="Calibri" panose="020F0502020204030204" pitchFamily="34" charset="-122"/>
+                <a:cs typeface="Calibri" panose="020F0502020204030204" pitchFamily="34" charset="-120"/>
+              </a:rPr>
+              <a:t>OBS:</a:t>
+            </a:r>
+            <a:r>
+              <a:rPr lang="en-US" sz="1350" dirty="0">
+                <a:solidFill>
+                  <a:srgbClr val="B9D6DA"/>
+                </a:solidFill>
+                <a:latin typeface="Calibri" panose="020F0502020204030204" pitchFamily="34" charset="0"/>
+                <a:ea typeface="Calibri" panose="020F0502020204030204" pitchFamily="34" charset="-122"/>
+                <a:cs typeface="Calibri" panose="020F0502020204030204" pitchFamily="34" charset="-120"/>
+              </a:rPr>
+              <a:t> </a:t>
+            </a:r>
+            <a:r>
+              <a:rPr lang="pt-BR" altLang="en-US" sz="1350" dirty="0">
+                <a:solidFill>
+                  <a:srgbClr val="B9D6DA"/>
+                </a:solidFill>
+                <a:latin typeface="Calibri" panose="020F0502020204030204" pitchFamily="34" charset="0"/>
+                <a:ea typeface="Calibri" panose="020F0502020204030204" pitchFamily="34" charset="-122"/>
+                <a:cs typeface="Calibri" panose="020F0502020204030204" pitchFamily="34" charset="-120"/>
+              </a:rPr>
+              <a:t>V</a:t>
+            </a:r>
+            <a:r>
+              <a:rPr lang="en-US" sz="1350" dirty="0">
+                <a:solidFill>
+                  <a:srgbClr val="B9D6DA"/>
+                </a:solidFill>
+                <a:latin typeface="Calibri" panose="020F0502020204030204" pitchFamily="34" charset="0"/>
+                <a:ea typeface="Calibri" panose="020F0502020204030204" pitchFamily="34" charset="-122"/>
+                <a:cs typeface="Calibri" panose="020F0502020204030204" pitchFamily="34" charset="-120"/>
+              </a:rPr>
+              <a:t>erificado em </a:t>
+            </a:r>
+            <a:r>
+              <a:rPr lang="pt-BR" altLang="en-US" sz="1350" dirty="0">
+                <a:solidFill>
+                  <a:srgbClr val="B9D6DA"/>
+                </a:solidFill>
+                <a:latin typeface="Calibri" panose="020F0502020204030204" pitchFamily="34" charset="0"/>
+                <a:ea typeface="Calibri" panose="020F0502020204030204" pitchFamily="34" charset="-122"/>
+                <a:cs typeface="Calibri" panose="020F0502020204030204" pitchFamily="34" charset="-120"/>
+              </a:rPr>
+              <a:t>mais de </a:t>
+            </a:r>
+            <a:r>
+              <a:rPr lang="en-US" sz="1350" dirty="0">
+                <a:solidFill>
+                  <a:srgbClr val="B9D6DA"/>
+                </a:solidFill>
+                <a:latin typeface="Calibri" panose="020F0502020204030204" pitchFamily="34" charset="0"/>
+                <a:ea typeface="Calibri" panose="020F0502020204030204" pitchFamily="34" charset="-122"/>
+                <a:cs typeface="Calibri" panose="020F0502020204030204" pitchFamily="34" charset="-120"/>
+              </a:rPr>
+              <a:t>três execuções seguidas.</a:t>
             </a:r>
             <a:endParaRPr lang="en-US" sz="1350" dirty="0"/>
           </a:p>
@@ -8235,13 +8177,12 @@
             <a:avLst/>
           </a:prstGeom>
           <a:noFill/>
-          <a:ln/>
-        </p:spPr>
-        <p:txBody>
-          <a:bodyPr wrap="square" lIns="0" tIns="0" rIns="0" bIns="0" rtlCol="0" anchor="ctr"/>
-          <a:lstStyle/>
-          <a:p>
-            <a:pPr algn="r" indent="0" marL="0">
+        </p:spPr>
+        <p:txBody>
+          <a:bodyPr wrap="square" lIns="0" tIns="0" rIns="0" bIns="0" rtlCol="0" anchor="ctr"/>
+          <a:lstStyle/>
+          <a:p>
+            <a:pPr marL="0" indent="0" algn="r">
               <a:buNone/>
             </a:pPr>
             <a:r>
@@ -8249,9 +8190,9 @@
                 <a:solidFill>
                   <a:srgbClr val="5F7278"/>
                 </a:solidFill>
-                <a:latin typeface="Calibri" pitchFamily="34" charset="0"/>
-                <a:ea typeface="Calibri" pitchFamily="34" charset="-122"/>
-                <a:cs typeface="Calibri" pitchFamily="34" charset="-120"/>
+                <a:latin typeface="Calibri" panose="020F0502020204030204" pitchFamily="34" charset="0"/>
+                <a:ea typeface="Calibri" panose="020F0502020204030204" pitchFamily="34" charset="-122"/>
+                <a:cs typeface="Calibri" panose="020F0502020204030204" pitchFamily="34" charset="-120"/>
               </a:rPr>
               <a:t>6</a:t>
             </a:r>
@@ -8269,12 +8210,13 @@
 
 <file path=ppt/slides/slide7.xml><?xml version="1.0" encoding="utf-8"?>
 <p:sld xmlns:a="http://schemas.openxmlformats.org/drawingml/2006/main" xmlns:r="http://schemas.openxmlformats.org/officeDocument/2006/relationships" xmlns:p="http://schemas.openxmlformats.org/presentationml/2006/main">
-  <p:cSld name="Slide 7">
+  <p:cSld>
     <p:bg>
       <p:bgPr>
         <a:solidFill>
           <a:srgbClr val="FFFFFF"/>
         </a:solidFill>
+        <a:effectLst/>
       </p:bgPr>
     </p:bg>
     <p:spTree>
@@ -8306,13 +8248,12 @@
             <a:avLst/>
           </a:prstGeom>
           <a:noFill/>
-          <a:ln/>
-        </p:spPr>
-        <p:txBody>
-          <a:bodyPr wrap="square" lIns="0" tIns="0" rIns="0" bIns="0" rtlCol="0" anchor="ctr"/>
-          <a:lstStyle/>
-          <a:p>
-            <a:pPr indent="0" marL="0">
+        </p:spPr>
+        <p:txBody>
+          <a:bodyPr wrap="square" lIns="0" tIns="0" rIns="0" bIns="0" rtlCol="0" anchor="ctr"/>
+          <a:lstStyle/>
+          <a:p>
+            <a:pPr marL="0" indent="0">
               <a:buNone/>
             </a:pPr>
             <a:r>
@@ -8320,9 +8261,9 @@
                 <a:solidFill>
                   <a:srgbClr val="0E2A33"/>
                 </a:solidFill>
-                <a:latin typeface="Cambria" pitchFamily="34" charset="0"/>
-                <a:ea typeface="Cambria" pitchFamily="34" charset="-122"/>
-                <a:cs typeface="Cambria" pitchFamily="34" charset="-120"/>
+                <a:latin typeface="Cambria" panose="02040503050406030204" pitchFamily="34" charset="0"/>
+                <a:ea typeface="Cambria" panose="02040503050406030204" pitchFamily="34" charset="-122"/>
+                <a:cs typeface="Cambria" panose="02040503050406030204" pitchFamily="34" charset="-120"/>
               </a:rPr>
               <a:t>A DAG</a:t>
             </a:r>
@@ -8345,13 +8286,12 @@
             <a:avLst/>
           </a:prstGeom>
           <a:noFill/>
-          <a:ln/>
         </p:spPr>
         <p:txBody>
           <a:bodyPr wrap="square" lIns="0" tIns="0" rIns="0" bIns="0" rtlCol="0" anchor="t"/>
           <a:lstStyle/>
           <a:p>
-            <a:pPr indent="0" marL="0">
+            <a:pPr marL="0" indent="0">
               <a:buNone/>
             </a:pPr>
             <a:r>
@@ -8359,9 +8299,9 @@
                 <a:solidFill>
                   <a:srgbClr val="5F7278"/>
                 </a:solidFill>
-                <a:latin typeface="Calibri" pitchFamily="34" charset="0"/>
-                <a:ea typeface="Calibri" pitchFamily="34" charset="-122"/>
-                <a:cs typeface="Calibri" pitchFamily="34" charset="-120"/>
+                <a:latin typeface="Calibri" panose="020F0502020204030204" pitchFamily="34" charset="0"/>
+                <a:ea typeface="Calibri" panose="020F0502020204030204" pitchFamily="34" charset="-122"/>
+                <a:cs typeface="Calibri" panose="020F0502020204030204" pitchFamily="34" charset="-120"/>
               </a:rPr>
               <a:t>banvic_erp_ingestao · diária às 04:35 · sem catchup · execução única simultânea</a:t>
             </a:r>
@@ -8411,13 +8351,12 @@
             <a:avLst/>
           </a:prstGeom>
           <a:noFill/>
-          <a:ln/>
-        </p:spPr>
-        <p:txBody>
-          <a:bodyPr wrap="square" lIns="0" tIns="0" rIns="0" bIns="0" rtlCol="0" anchor="ctr"/>
-          <a:lstStyle/>
-          <a:p>
-            <a:pPr algn="ctr" indent="0" marL="0">
+        </p:spPr>
+        <p:txBody>
+          <a:bodyPr wrap="square" lIns="0" tIns="0" rIns="0" bIns="0" rtlCol="0" anchor="ctr"/>
+          <a:lstStyle/>
+          <a:p>
+            <a:pPr marL="0" indent="0" algn="ctr">
               <a:buNone/>
             </a:pPr>
             <a:r>
@@ -8425,9 +8364,9 @@
                 <a:solidFill>
                   <a:srgbClr val="FFFFFF"/>
                 </a:solidFill>
-                <a:latin typeface="Calibri" pitchFamily="34" charset="0"/>
-                <a:ea typeface="Calibri" pitchFamily="34" charset="-122"/>
-                <a:cs typeface="Calibri" pitchFamily="34" charset="-120"/>
+                <a:latin typeface="Calibri" panose="020F0502020204030204" pitchFamily="34" charset="0"/>
+                <a:ea typeface="Calibri" panose="020F0502020204030204" pitchFamily="34" charset="-122"/>
+                <a:cs typeface="Calibri" panose="020F0502020204030204" pitchFamily="34" charset="-120"/>
               </a:rPr>
               <a:t>Sensores</a:t>
             </a:r>
@@ -8450,13 +8389,12 @@
             <a:avLst/>
           </a:prstGeom>
           <a:noFill/>
-          <a:ln/>
         </p:spPr>
         <p:txBody>
           <a:bodyPr wrap="square" lIns="0" tIns="0" rIns="0" bIns="0" rtlCol="0" anchor="t"/>
           <a:lstStyle/>
           <a:p>
-            <a:pPr algn="ctr" indent="0" marL="0">
+            <a:pPr marL="0" indent="0" algn="ctr">
               <a:buNone/>
             </a:pPr>
             <a:r>
@@ -8464,9 +8402,9 @@
                 <a:solidFill>
                   <a:srgbClr val="C8E3E6"/>
                 </a:solidFill>
-                <a:latin typeface="Calibri" pitchFamily="34" charset="0"/>
-                <a:ea typeface="Calibri" pitchFamily="34" charset="-122"/>
-                <a:cs typeface="Calibri" pitchFamily="34" charset="-120"/>
+                <a:latin typeface="Calibri" panose="020F0502020204030204" pitchFamily="34" charset="0"/>
+                <a:ea typeface="Calibri" panose="020F0502020204030204" pitchFamily="34" charset="-122"/>
+                <a:cs typeface="Calibri" panose="020F0502020204030204" pitchFamily="34" charset="-120"/>
               </a:rPr>
               <a:t>1 por tabela</a:t>
             </a:r>
@@ -8540,13 +8478,12 @@
             <a:avLst/>
           </a:prstGeom>
           <a:noFill/>
-          <a:ln/>
-        </p:spPr>
-        <p:txBody>
-          <a:bodyPr wrap="square" lIns="0" tIns="0" rIns="0" bIns="0" rtlCol="0" anchor="ctr"/>
-          <a:lstStyle/>
-          <a:p>
-            <a:pPr algn="ctr" indent="0" marL="0">
+        </p:spPr>
+        <p:txBody>
+          <a:bodyPr wrap="square" lIns="0" tIns="0" rIns="0" bIns="0" rtlCol="0" anchor="ctr"/>
+          <a:lstStyle/>
+          <a:p>
+            <a:pPr marL="0" indent="0" algn="ctr">
               <a:buNone/>
             </a:pPr>
             <a:r>
@@ -8554,9 +8491,9 @@
                 <a:solidFill>
                   <a:srgbClr val="FFFFFF"/>
                 </a:solidFill>
-                <a:latin typeface="Calibri" pitchFamily="34" charset="0"/>
-                <a:ea typeface="Calibri" pitchFamily="34" charset="-122"/>
-                <a:cs typeface="Calibri" pitchFamily="34" charset="-120"/>
+                <a:latin typeface="Calibri" panose="020F0502020204030204" pitchFamily="34" charset="0"/>
+                <a:ea typeface="Calibri" panose="020F0502020204030204" pitchFamily="34" charset="-122"/>
+                <a:cs typeface="Calibri" panose="020F0502020204030204" pitchFamily="34" charset="-120"/>
               </a:rPr>
               <a:t>Preparo do DW</a:t>
             </a:r>
@@ -8579,13 +8516,12 @@
             <a:avLst/>
           </a:prstGeom>
           <a:noFill/>
-          <a:ln/>
         </p:spPr>
         <p:txBody>
           <a:bodyPr wrap="square" lIns="0" tIns="0" rIns="0" bIns="0" rtlCol="0" anchor="t"/>
           <a:lstStyle/>
           <a:p>
-            <a:pPr algn="ctr" indent="0" marL="0">
+            <a:pPr marL="0" indent="0" algn="ctr">
               <a:buNone/>
             </a:pPr>
             <a:r>
@@ -8593,9 +8529,9 @@
                 <a:solidFill>
                   <a:srgbClr val="C8E3E6"/>
                 </a:solidFill>
-                <a:latin typeface="Calibri" pitchFamily="34" charset="0"/>
-                <a:ea typeface="Calibri" pitchFamily="34" charset="-122"/>
-                <a:cs typeface="Calibri" pitchFamily="34" charset="-120"/>
+                <a:latin typeface="Calibri" panose="020F0502020204030204" pitchFamily="34" charset="0"/>
+                <a:ea typeface="Calibri" panose="020F0502020204030204" pitchFamily="34" charset="-122"/>
+                <a:cs typeface="Calibri" panose="020F0502020204030204" pitchFamily="34" charset="-120"/>
               </a:rPr>
               <a:t>DDL idempotente</a:t>
             </a:r>
@@ -8610,9 +8546,9 @@
           <p:nvPr/>
         </p:nvSpPr>
         <p:spPr>
-          <a:xfrm>
-            <a:off x="4800600" y="3268980"/>
-            <a:ext cx="365760" cy="-868680"/>
+          <a:xfrm flipV="1">
+            <a:off x="4799965" y="2192020"/>
+            <a:ext cx="366395" cy="999490"/>
           </a:xfrm>
           <a:prstGeom prst="line">
             <a:avLst/>
@@ -8693,13 +8629,12 @@
             <a:avLst/>
           </a:prstGeom>
           <a:noFill/>
-          <a:ln/>
-        </p:spPr>
-        <p:txBody>
-          <a:bodyPr wrap="square" lIns="0" tIns="0" rIns="0" bIns="0" rtlCol="0" anchor="ctr"/>
-          <a:lstStyle/>
-          <a:p>
-            <a:pPr algn="ctr" indent="0" marL="0">
+        </p:spPr>
+        <p:txBody>
+          <a:bodyPr wrap="square" lIns="0" tIns="0" rIns="0" bIns="0" rtlCol="0" anchor="ctr"/>
+          <a:lstStyle/>
+          <a:p>
+            <a:pPr marL="0" indent="0" algn="ctr">
               <a:buNone/>
             </a:pPr>
             <a:r>
@@ -8707,9 +8642,9 @@
                 <a:solidFill>
                   <a:srgbClr val="07352C"/>
                 </a:solidFill>
-                <a:latin typeface="Calibri" pitchFamily="34" charset="0"/>
-                <a:ea typeface="Calibri" pitchFamily="34" charset="-122"/>
-                <a:cs typeface="Calibri" pitchFamily="34" charset="-120"/>
+                <a:latin typeface="Calibri" panose="020F0502020204030204" pitchFamily="34" charset="0"/>
+                <a:ea typeface="Calibri" panose="020F0502020204030204" pitchFamily="34" charset="-122"/>
+                <a:cs typeface="Calibri" panose="020F0502020204030204" pitchFamily="34" charset="-120"/>
               </a:rPr>
               <a:t>Carga no Data Lake</a:t>
             </a:r>
@@ -8732,13 +8667,12 @@
             <a:avLst/>
           </a:prstGeom>
           <a:noFill/>
-          <a:ln/>
         </p:spPr>
         <p:txBody>
           <a:bodyPr wrap="square" lIns="0" tIns="0" rIns="0" bIns="0" rtlCol="0" anchor="t"/>
           <a:lstStyle/>
           <a:p>
-            <a:pPr algn="ctr" indent="0" marL="0">
+            <a:pPr marL="0" indent="0" algn="ctr">
               <a:buNone/>
             </a:pPr>
             <a:r>
@@ -8746,9 +8680,9 @@
                 <a:solidFill>
                   <a:srgbClr val="0B4438"/>
                 </a:solidFill>
-                <a:latin typeface="Calibri" pitchFamily="34" charset="0"/>
-                <a:ea typeface="Calibri" pitchFamily="34" charset="-122"/>
-                <a:cs typeface="Calibri" pitchFamily="34" charset="-120"/>
+                <a:latin typeface="Calibri" panose="020F0502020204030204" pitchFamily="34" charset="0"/>
+                <a:ea typeface="Calibri" panose="020F0502020204030204" pitchFamily="34" charset="-122"/>
+                <a:cs typeface="Calibri" panose="020F0502020204030204" pitchFamily="34" charset="-120"/>
               </a:rPr>
               <a:t>7 uploads em paralelo</a:t>
             </a:r>
@@ -8798,13 +8732,12 @@
             <a:avLst/>
           </a:prstGeom>
           <a:noFill/>
-          <a:ln/>
-        </p:spPr>
-        <p:txBody>
-          <a:bodyPr wrap="square" lIns="0" tIns="0" rIns="0" bIns="0" rtlCol="0" anchor="ctr"/>
-          <a:lstStyle/>
-          <a:p>
-            <a:pPr algn="ctr" indent="0" marL="0">
+        </p:spPr>
+        <p:txBody>
+          <a:bodyPr wrap="square" lIns="0" tIns="0" rIns="0" bIns="0" rtlCol="0" anchor="ctr"/>
+          <a:lstStyle/>
+          <a:p>
+            <a:pPr marL="0" indent="0" algn="ctr">
               <a:buNone/>
             </a:pPr>
             <a:r>
@@ -8812,9 +8745,9 @@
                 <a:solidFill>
                   <a:srgbClr val="FFFFFF"/>
                 </a:solidFill>
-                <a:latin typeface="Calibri" pitchFamily="34" charset="0"/>
-                <a:ea typeface="Calibri" pitchFamily="34" charset="-122"/>
-                <a:cs typeface="Calibri" pitchFamily="34" charset="-120"/>
+                <a:latin typeface="Calibri" panose="020F0502020204030204" pitchFamily="34" charset="0"/>
+                <a:ea typeface="Calibri" panose="020F0502020204030204" pitchFamily="34" charset="-122"/>
+                <a:cs typeface="Calibri" panose="020F0502020204030204" pitchFamily="34" charset="-120"/>
               </a:rPr>
               <a:t>Carga no DW</a:t>
             </a:r>
@@ -8837,13 +8770,12 @@
             <a:avLst/>
           </a:prstGeom>
           <a:noFill/>
-          <a:ln/>
         </p:spPr>
         <p:txBody>
           <a:bodyPr wrap="square" lIns="0" tIns="0" rIns="0" bIns="0" rtlCol="0" anchor="t"/>
           <a:lstStyle/>
           <a:p>
-            <a:pPr algn="ctr" indent="0" marL="0">
+            <a:pPr marL="0" indent="0" algn="ctr">
               <a:buNone/>
             </a:pPr>
             <a:r>
@@ -8851,9 +8783,9 @@
                 <a:solidFill>
                   <a:srgbClr val="C8E3E6"/>
                 </a:solidFill>
-                <a:latin typeface="Calibri" pitchFamily="34" charset="0"/>
-                <a:ea typeface="Calibri" pitchFamily="34" charset="-122"/>
-                <a:cs typeface="Calibri" pitchFamily="34" charset="-120"/>
+                <a:latin typeface="Calibri" panose="020F0502020204030204" pitchFamily="34" charset="0"/>
+                <a:ea typeface="Calibri" panose="020F0502020204030204" pitchFamily="34" charset="-122"/>
+                <a:cs typeface="Calibri" panose="020F0502020204030204" pitchFamily="34" charset="-120"/>
               </a:rPr>
               <a:t>Meltano em pod dedicado</a:t>
             </a:r>
@@ -8927,13 +8859,12 @@
             <a:avLst/>
           </a:prstGeom>
           <a:noFill/>
-          <a:ln/>
-        </p:spPr>
-        <p:txBody>
-          <a:bodyPr wrap="square" lIns="0" tIns="0" rIns="0" bIns="0" rtlCol="0" anchor="ctr"/>
-          <a:lstStyle/>
-          <a:p>
-            <a:pPr algn="ctr" indent="0" marL="0">
+        </p:spPr>
+        <p:txBody>
+          <a:bodyPr wrap="square" lIns="0" tIns="0" rIns="0" bIns="0" rtlCol="0" anchor="ctr"/>
+          <a:lstStyle/>
+          <a:p>
+            <a:pPr marL="0" indent="0" algn="ctr">
               <a:buNone/>
             </a:pPr>
             <a:r>
@@ -8941,9 +8872,9 @@
                 <a:solidFill>
                   <a:srgbClr val="FFFFFF"/>
                 </a:solidFill>
-                <a:latin typeface="Calibri" pitchFamily="34" charset="0"/>
-                <a:ea typeface="Calibri" pitchFamily="34" charset="-122"/>
-                <a:cs typeface="Calibri" pitchFamily="34" charset="-120"/>
+                <a:latin typeface="Calibri" panose="020F0502020204030204" pitchFamily="34" charset="0"/>
+                <a:ea typeface="Calibri" panose="020F0502020204030204" pitchFamily="34" charset="-122"/>
+                <a:cs typeface="Calibri" panose="020F0502020204030204" pitchFamily="34" charset="-120"/>
               </a:rPr>
               <a:t>Validação</a:t>
             </a:r>
@@ -8966,13 +8897,12 @@
             <a:avLst/>
           </a:prstGeom>
           <a:noFill/>
-          <a:ln/>
         </p:spPr>
         <p:txBody>
           <a:bodyPr wrap="square" lIns="0" tIns="0" rIns="0" bIns="0" rtlCol="0" anchor="t"/>
           <a:lstStyle/>
           <a:p>
-            <a:pPr algn="ctr" indent="0" marL="0">
+            <a:pPr marL="0" indent="0" algn="ctr">
               <a:buNone/>
             </a:pPr>
             <a:r>
@@ -8980,9 +8910,9 @@
                 <a:solidFill>
                   <a:srgbClr val="C8E3E6"/>
                 </a:solidFill>
-                <a:latin typeface="Calibri" pitchFamily="34" charset="0"/>
-                <a:ea typeface="Calibri" pitchFamily="34" charset="-122"/>
-                <a:cs typeface="Calibri" pitchFamily="34" charset="-120"/>
+                <a:latin typeface="Calibri" panose="020F0502020204030204" pitchFamily="34" charset="0"/>
+                <a:ea typeface="Calibri" panose="020F0502020204030204" pitchFamily="34" charset="-122"/>
+                <a:cs typeface="Calibri" panose="020F0502020204030204" pitchFamily="34" charset="-120"/>
               </a:rPr>
               <a:t>origem x destino</a:t>
             </a:r>
@@ -9148,13 +9078,12 @@
             <a:avLst/>
           </a:prstGeom>
           <a:noFill/>
-          <a:ln/>
-        </p:spPr>
-        <p:txBody>
-          <a:bodyPr wrap="square" lIns="0" tIns="0" rIns="0" bIns="0" rtlCol="0" anchor="ctr"/>
-          <a:lstStyle/>
-          <a:p>
-            <a:pPr algn="ctr" indent="0" marL="0">
+        </p:spPr>
+        <p:txBody>
+          <a:bodyPr wrap="square" lIns="0" tIns="0" rIns="0" bIns="0" rtlCol="0" anchor="ctr"/>
+          <a:lstStyle/>
+          <a:p>
+            <a:pPr marL="0" indent="0" algn="ctr">
               <a:buNone/>
             </a:pPr>
             <a:r>
@@ -9162,9 +9091,9 @@
                 <a:solidFill>
                   <a:srgbClr val="0E2A33"/>
                 </a:solidFill>
-                <a:latin typeface="Calibri" pitchFamily="34" charset="0"/>
-                <a:ea typeface="Calibri" pitchFamily="34" charset="-122"/>
-                <a:cs typeface="Calibri" pitchFamily="34" charset="-120"/>
+                <a:latin typeface="Calibri" panose="020F0502020204030204" pitchFamily="34" charset="0"/>
+                <a:ea typeface="Calibri" panose="020F0502020204030204" pitchFamily="34" charset="-122"/>
+                <a:cs typeface="Calibri" panose="020F0502020204030204" pitchFamily="34" charset="-120"/>
               </a:rPr>
               <a:t>Auditoria</a:t>
             </a:r>
@@ -9187,13 +9116,12 @@
             <a:avLst/>
           </a:prstGeom>
           <a:noFill/>
-          <a:ln/>
         </p:spPr>
         <p:txBody>
           <a:bodyPr wrap="square" lIns="0" tIns="0" rIns="0" bIns="0" rtlCol="0" anchor="t"/>
           <a:lstStyle/>
           <a:p>
-            <a:pPr algn="ctr" indent="0" marL="0">
+            <a:pPr marL="0" indent="0" algn="ctr">
               <a:buNone/>
             </a:pPr>
             <a:r>
@@ -9201,9 +9129,9 @@
                 <a:solidFill>
                   <a:srgbClr val="5F7278"/>
                 </a:solidFill>
-                <a:latin typeface="Calibri" pitchFamily="34" charset="0"/>
-                <a:ea typeface="Calibri" pitchFamily="34" charset="-122"/>
-                <a:cs typeface="Calibri" pitchFamily="34" charset="-120"/>
+                <a:latin typeface="Calibri" panose="020F0502020204030204" pitchFamily="34" charset="0"/>
+                <a:ea typeface="Calibri" panose="020F0502020204030204" pitchFamily="34" charset="-122"/>
+                <a:cs typeface="Calibri" panose="020F0502020204030204" pitchFamily="34" charset="-120"/>
               </a:rPr>
               <a:t>registro da execução</a:t>
             </a:r>
@@ -9219,7 +9147,7 @@
         </p:nvSpPr>
         <p:spPr>
           <a:xfrm>
-            <a:off x="640080" y="5349240"/>
+            <a:off x="767080" y="5520690"/>
             <a:ext cx="310896" cy="310896"/>
           </a:xfrm>
           <a:prstGeom prst="ellipse">
@@ -9244,20 +9172,19 @@
         </p:nvSpPr>
         <p:spPr>
           <a:xfrm>
-            <a:off x="640080" y="5349240"/>
+            <a:off x="767080" y="5520690"/>
             <a:ext cx="310896" cy="310896"/>
           </a:xfrm>
           <a:prstGeom prst="rect">
             <a:avLst/>
           </a:prstGeom>
           <a:noFill/>
-          <a:ln/>
-        </p:spPr>
-        <p:txBody>
-          <a:bodyPr wrap="square" lIns="0" tIns="0" rIns="0" bIns="0" rtlCol="0" anchor="ctr"/>
-          <a:lstStyle/>
-          <a:p>
-            <a:pPr algn="ctr" indent="0" marL="0">
+        </p:spPr>
+        <p:txBody>
+          <a:bodyPr wrap="square" lIns="0" tIns="0" rIns="0" bIns="0" rtlCol="0" anchor="ctr"/>
+          <a:lstStyle/>
+          <a:p>
+            <a:pPr marL="0" indent="0" algn="ctr">
               <a:buNone/>
             </a:pPr>
             <a:r>
@@ -9265,9 +9192,9 @@
                 <a:solidFill>
                   <a:srgbClr val="028090"/>
                 </a:solidFill>
-                <a:latin typeface="Calibri" pitchFamily="34" charset="0"/>
-                <a:ea typeface="Calibri" pitchFamily="34" charset="-122"/>
-                <a:cs typeface="Calibri" pitchFamily="34" charset="-120"/>
+                <a:latin typeface="Calibri" panose="020F0502020204030204" pitchFamily="34" charset="0"/>
+                <a:ea typeface="Calibri" panose="020F0502020204030204" pitchFamily="34" charset="-122"/>
+                <a:cs typeface="Calibri" panose="020F0502020204030204" pitchFamily="34" charset="-120"/>
               </a:rPr>
               <a:t>•</a:t>
             </a:r>
@@ -9290,13 +9217,12 @@
             <a:avLst/>
           </a:prstGeom>
           <a:noFill/>
-          <a:ln/>
-        </p:spPr>
-        <p:txBody>
-          <a:bodyPr wrap="square" lIns="0" tIns="0" rIns="0" bIns="0" rtlCol="0" anchor="ctr"/>
-          <a:lstStyle/>
-          <a:p>
-            <a:pPr indent="0" marL="0">
+        </p:spPr>
+        <p:txBody>
+          <a:bodyPr wrap="square" lIns="0" tIns="0" rIns="0" bIns="0" rtlCol="0" anchor="ctr"/>
+          <a:lstStyle/>
+          <a:p>
+            <a:pPr marL="0" indent="0">
               <a:buNone/>
             </a:pPr>
             <a:r>
@@ -9304,9 +9230,9 @@
                 <a:solidFill>
                   <a:srgbClr val="5F7278"/>
                 </a:solidFill>
-                <a:latin typeface="Calibri" pitchFamily="34" charset="0"/>
-                <a:ea typeface="Calibri" pitchFamily="34" charset="-122"/>
-                <a:cs typeface="Calibri" pitchFamily="34" charset="-120"/>
+                <a:latin typeface="Calibri" panose="020F0502020204030204" pitchFamily="34" charset="0"/>
+                <a:ea typeface="Calibri" panose="020F0502020204030204" pitchFamily="34" charset="-122"/>
+                <a:cs typeface="Calibri" panose="020F0502020204030204" pitchFamily="34" charset="-120"/>
               </a:rPr>
               <a:t>Sensores garantem que nada comece com fonte incompleta.</a:t>
             </a:r>
@@ -9322,7 +9248,7 @@
         </p:nvSpPr>
         <p:spPr>
           <a:xfrm>
-            <a:off x="4343400" y="5349240"/>
+            <a:off x="4488815" y="5520690"/>
             <a:ext cx="310896" cy="310896"/>
           </a:xfrm>
           <a:prstGeom prst="ellipse">
@@ -9347,20 +9273,19 @@
         </p:nvSpPr>
         <p:spPr>
           <a:xfrm>
-            <a:off x="4343400" y="5349240"/>
+            <a:off x="4488815" y="5520690"/>
             <a:ext cx="310896" cy="310896"/>
           </a:xfrm>
           <a:prstGeom prst="rect">
             <a:avLst/>
           </a:prstGeom>
           <a:noFill/>
-          <a:ln/>
-        </p:spPr>
-        <p:txBody>
-          <a:bodyPr wrap="square" lIns="0" tIns="0" rIns="0" bIns="0" rtlCol="0" anchor="ctr"/>
-          <a:lstStyle/>
-          <a:p>
-            <a:pPr algn="ctr" indent="0" marL="0">
+        </p:spPr>
+        <p:txBody>
+          <a:bodyPr wrap="square" lIns="0" tIns="0" rIns="0" bIns="0" rtlCol="0" anchor="ctr"/>
+          <a:lstStyle/>
+          <a:p>
+            <a:pPr marL="0" indent="0" algn="ctr">
               <a:buNone/>
             </a:pPr>
             <a:r>
@@ -9368,9 +9293,9 @@
                 <a:solidFill>
                   <a:srgbClr val="028090"/>
                 </a:solidFill>
-                <a:latin typeface="Calibri" pitchFamily="34" charset="0"/>
-                <a:ea typeface="Calibri" pitchFamily="34" charset="-122"/>
-                <a:cs typeface="Calibri" pitchFamily="34" charset="-120"/>
+                <a:latin typeface="Calibri" panose="020F0502020204030204" pitchFamily="34" charset="0"/>
+                <a:ea typeface="Calibri" panose="020F0502020204030204" pitchFamily="34" charset="-122"/>
+                <a:cs typeface="Calibri" panose="020F0502020204030204" pitchFamily="34" charset="-120"/>
               </a:rPr>
               <a:t>•</a:t>
             </a:r>
@@ -9393,13 +9318,12 @@
             <a:avLst/>
           </a:prstGeom>
           <a:noFill/>
-          <a:ln/>
-        </p:spPr>
-        <p:txBody>
-          <a:bodyPr wrap="square" lIns="0" tIns="0" rIns="0" bIns="0" rtlCol="0" anchor="ctr"/>
-          <a:lstStyle/>
-          <a:p>
-            <a:pPr indent="0" marL="0">
+        </p:spPr>
+        <p:txBody>
+          <a:bodyPr wrap="square" lIns="0" tIns="0" rIns="0" bIns="0" rtlCol="0" anchor="ctr"/>
+          <a:lstStyle/>
+          <a:p>
+            <a:pPr marL="0" indent="0">
               <a:buNone/>
             </a:pPr>
             <a:r>
@@ -9407,9 +9331,9 @@
                 <a:solidFill>
                   <a:srgbClr val="5F7278"/>
                 </a:solidFill>
-                <a:latin typeface="Calibri" pitchFamily="34" charset="0"/>
-                <a:ea typeface="Calibri" pitchFamily="34" charset="-122"/>
-                <a:cs typeface="Calibri" pitchFamily="34" charset="-120"/>
+                <a:latin typeface="Calibri" panose="020F0502020204030204" pitchFamily="34" charset="0"/>
+                <a:ea typeface="Calibri" panose="020F0502020204030204" pitchFamily="34" charset="-122"/>
+                <a:cs typeface="Calibri" panose="020F0502020204030204" pitchFamily="34" charset="-120"/>
               </a:rPr>
               <a:t>Dois ramos paralelos: não dependem um do outro.</a:t>
             </a:r>
@@ -9425,7 +9349,7 @@
         </p:nvSpPr>
         <p:spPr>
           <a:xfrm>
-            <a:off x="8046720" y="5349240"/>
+            <a:off x="8192770" y="5520690"/>
             <a:ext cx="310896" cy="310896"/>
           </a:xfrm>
           <a:prstGeom prst="ellipse">
@@ -9450,20 +9374,19 @@
         </p:nvSpPr>
         <p:spPr>
           <a:xfrm>
-            <a:off x="8046720" y="5349240"/>
+            <a:off x="8192770" y="5520690"/>
             <a:ext cx="310896" cy="310896"/>
           </a:xfrm>
           <a:prstGeom prst="rect">
             <a:avLst/>
           </a:prstGeom>
           <a:noFill/>
-          <a:ln/>
-        </p:spPr>
-        <p:txBody>
-          <a:bodyPr wrap="square" lIns="0" tIns="0" rIns="0" bIns="0" rtlCol="0" anchor="ctr"/>
-          <a:lstStyle/>
-          <a:p>
-            <a:pPr algn="ctr" indent="0" marL="0">
+        </p:spPr>
+        <p:txBody>
+          <a:bodyPr wrap="square" lIns="0" tIns="0" rIns="0" bIns="0" rtlCol="0" anchor="ctr"/>
+          <a:lstStyle/>
+          <a:p>
+            <a:pPr marL="0" indent="0" algn="ctr">
               <a:buNone/>
             </a:pPr>
             <a:r>
@@ -9471,9 +9394,9 @@
                 <a:solidFill>
                   <a:srgbClr val="028090"/>
                 </a:solidFill>
-                <a:latin typeface="Calibri" pitchFamily="34" charset="0"/>
-                <a:ea typeface="Calibri" pitchFamily="34" charset="-122"/>
-                <a:cs typeface="Calibri" pitchFamily="34" charset="-120"/>
+                <a:latin typeface="Calibri" panose="020F0502020204030204" pitchFamily="34" charset="0"/>
+                <a:ea typeface="Calibri" panose="020F0502020204030204" pitchFamily="34" charset="-122"/>
+                <a:cs typeface="Calibri" panose="020F0502020204030204" pitchFamily="34" charset="-120"/>
               </a:rPr>
               <a:t>•</a:t>
             </a:r>
@@ -9496,13 +9419,12 @@
             <a:avLst/>
           </a:prstGeom>
           <a:noFill/>
-          <a:ln/>
-        </p:spPr>
-        <p:txBody>
-          <a:bodyPr wrap="square" lIns="0" tIns="0" rIns="0" bIns="0" rtlCol="0" anchor="ctr"/>
-          <a:lstStyle/>
-          <a:p>
-            <a:pPr indent="0" marL="0">
+        </p:spPr>
+        <p:txBody>
+          <a:bodyPr wrap="square" lIns="0" tIns="0" rIns="0" bIns="0" rtlCol="0" anchor="ctr"/>
+          <a:lstStyle/>
+          <a:p>
+            <a:pPr marL="0" indent="0">
               <a:buNone/>
             </a:pPr>
             <a:r>
@@ -9510,9 +9432,9 @@
                 <a:solidFill>
                   <a:srgbClr val="5F7278"/>
                 </a:solidFill>
-                <a:latin typeface="Calibri" pitchFamily="34" charset="0"/>
-                <a:ea typeface="Calibri" pitchFamily="34" charset="-122"/>
-                <a:cs typeface="Calibri" pitchFamily="34" charset="-120"/>
+                <a:latin typeface="Calibri" panose="020F0502020204030204" pitchFamily="34" charset="0"/>
+                <a:ea typeface="Calibri" panose="020F0502020204030204" pitchFamily="34" charset="-122"/>
+                <a:cs typeface="Calibri" panose="020F0502020204030204" pitchFamily="34" charset="-120"/>
               </a:rPr>
               <a:t>A validação só roda depois do Meltano — dependência real.</a:t>
             </a:r>
@@ -9535,13 +9457,12 @@
             <a:avLst/>
           </a:prstGeom>
           <a:noFill/>
-          <a:ln/>
-        </p:spPr>
-        <p:txBody>
-          <a:bodyPr wrap="square" lIns="0" tIns="0" rIns="0" bIns="0" rtlCol="0" anchor="ctr"/>
-          <a:lstStyle/>
-          <a:p>
-            <a:pPr algn="r" indent="0" marL="0">
+        </p:spPr>
+        <p:txBody>
+          <a:bodyPr wrap="square" lIns="0" tIns="0" rIns="0" bIns="0" rtlCol="0" anchor="ctr"/>
+          <a:lstStyle/>
+          <a:p>
+            <a:pPr marL="0" indent="0" algn="r">
               <a:buNone/>
             </a:pPr>
             <a:r>
@@ -9549,9 +9470,9 @@
                 <a:solidFill>
                   <a:srgbClr val="5F7278"/>
                 </a:solidFill>
-                <a:latin typeface="Calibri" pitchFamily="34" charset="0"/>
-                <a:ea typeface="Calibri" pitchFamily="34" charset="-122"/>
-                <a:cs typeface="Calibri" pitchFamily="34" charset="-120"/>
+                <a:latin typeface="Calibri" panose="020F0502020204030204" pitchFamily="34" charset="0"/>
+                <a:ea typeface="Calibri" panose="020F0502020204030204" pitchFamily="34" charset="-122"/>
+                <a:cs typeface="Calibri" panose="020F0502020204030204" pitchFamily="34" charset="-120"/>
               </a:rPr>
               <a:t>7</a:t>
             </a:r>
@@ -9569,12 +9490,13 @@
 
 <file path=ppt/slides/slide8.xml><?xml version="1.0" encoding="utf-8"?>
 <p:sld xmlns:a="http://schemas.openxmlformats.org/drawingml/2006/main" xmlns:r="http://schemas.openxmlformats.org/officeDocument/2006/relationships" xmlns:p="http://schemas.openxmlformats.org/presentationml/2006/main">
-  <p:cSld name="Slide 8">
+  <p:cSld>
     <p:bg>
       <p:bgPr>
         <a:solidFill>
           <a:srgbClr val="FFFFFF"/>
         </a:solidFill>
+        <a:effectLst/>
       </p:bgPr>
     </p:bg>
     <p:spTree>
@@ -9606,13 +9528,12 @@
             <a:avLst/>
           </a:prstGeom>
           <a:noFill/>
-          <a:ln/>
-        </p:spPr>
-        <p:txBody>
-          <a:bodyPr wrap="square" lIns="0" tIns="0" rIns="0" bIns="0" rtlCol="0" anchor="ctr"/>
-          <a:lstStyle/>
-          <a:p>
-            <a:pPr indent="0" marL="0">
+        </p:spPr>
+        <p:txBody>
+          <a:bodyPr wrap="square" lIns="0" tIns="0" rIns="0" bIns="0" rtlCol="0" anchor="ctr"/>
+          <a:lstStyle/>
+          <a:p>
+            <a:pPr marL="0" indent="0">
               <a:buNone/>
             </a:pPr>
             <a:r>
@@ -9620,9 +9541,9 @@
                 <a:solidFill>
                   <a:srgbClr val="0E2A33"/>
                 </a:solidFill>
-                <a:latin typeface="Cambria" pitchFamily="34" charset="0"/>
-                <a:ea typeface="Cambria" pitchFamily="34" charset="-122"/>
-                <a:cs typeface="Cambria" pitchFamily="34" charset="-120"/>
+                <a:latin typeface="Cambria" panose="02040503050406030204" pitchFamily="34" charset="0"/>
+                <a:ea typeface="Cambria" panose="02040503050406030204" pitchFamily="34" charset="-122"/>
+                <a:cs typeface="Cambria" panose="02040503050406030204" pitchFamily="34" charset="-120"/>
               </a:rPr>
               <a:t>Resiliência</a:t>
             </a:r>
@@ -9645,13 +9566,12 @@
             <a:avLst/>
           </a:prstGeom>
           <a:noFill/>
-          <a:ln/>
         </p:spPr>
         <p:txBody>
           <a:bodyPr wrap="square" lIns="0" tIns="0" rIns="0" bIns="0" rtlCol="0" anchor="t"/>
           <a:lstStyle/>
           <a:p>
-            <a:pPr indent="0" marL="0">
+            <a:pPr marL="0" indent="0">
               <a:buNone/>
             </a:pPr>
             <a:r>
@@ -9659,9 +9579,9 @@
                 <a:solidFill>
                   <a:srgbClr val="5F7278"/>
                 </a:solidFill>
-                <a:latin typeface="Calibri" pitchFamily="34" charset="0"/>
-                <a:ea typeface="Calibri" pitchFamily="34" charset="-122"/>
-                <a:cs typeface="Calibri" pitchFamily="34" charset="-120"/>
+                <a:latin typeface="Calibri" panose="020F0502020204030204" pitchFamily="34" charset="0"/>
+                <a:ea typeface="Calibri" panose="020F0502020204030204" pitchFamily="34" charset="-122"/>
+                <a:cs typeface="Calibri" panose="020F0502020204030204" pitchFamily="34" charset="-120"/>
               </a:rPr>
               <a:t>Erro transitório e erro de dado são tratados de formas diferentes.</a:t>
             </a:r>
@@ -9711,13 +9631,12 @@
             <a:avLst/>
           </a:prstGeom>
           <a:noFill/>
-          <a:ln/>
-        </p:spPr>
-        <p:txBody>
-          <a:bodyPr wrap="square" lIns="0" tIns="0" rIns="0" bIns="0" rtlCol="0" anchor="ctr"/>
-          <a:lstStyle/>
-          <a:p>
-            <a:pPr indent="0" marL="0">
+        </p:spPr>
+        <p:txBody>
+          <a:bodyPr wrap="square" lIns="0" tIns="0" rIns="0" bIns="0" rtlCol="0" anchor="ctr"/>
+          <a:lstStyle/>
+          <a:p>
+            <a:pPr marL="0" indent="0">
               <a:buNone/>
             </a:pPr>
             <a:r>
@@ -9725,9 +9644,9 @@
                 <a:solidFill>
                   <a:srgbClr val="0E2A33"/>
                 </a:solidFill>
-                <a:latin typeface="Calibri" pitchFamily="34" charset="0"/>
-                <a:ea typeface="Calibri" pitchFamily="34" charset="-122"/>
-                <a:cs typeface="Calibri" pitchFamily="34" charset="-120"/>
+                <a:latin typeface="Calibri" panose="020F0502020204030204" pitchFamily="34" charset="0"/>
+                <a:ea typeface="Calibri" panose="020F0502020204030204" pitchFamily="34" charset="-122"/>
+                <a:cs typeface="Calibri" panose="020F0502020204030204" pitchFamily="34" charset="-120"/>
               </a:rPr>
               <a:t>Pod demora a subir, banco reiniciando</a:t>
             </a:r>
@@ -9750,13 +9669,12 @@
             <a:avLst/>
           </a:prstGeom>
           <a:noFill/>
-          <a:ln/>
-        </p:spPr>
-        <p:txBody>
-          <a:bodyPr wrap="square" lIns="0" tIns="0" rIns="0" bIns="0" rtlCol="0" anchor="ctr"/>
-          <a:lstStyle/>
-          <a:p>
-            <a:pPr indent="0" marL="0">
+        </p:spPr>
+        <p:txBody>
+          <a:bodyPr wrap="square" lIns="0" tIns="0" rIns="0" bIns="0" rtlCol="0" anchor="ctr"/>
+          <a:lstStyle/>
+          <a:p>
+            <a:pPr marL="0" indent="0">
               <a:buNone/>
             </a:pPr>
             <a:r>
@@ -9764,9 +9682,9 @@
                 <a:solidFill>
                   <a:srgbClr val="028090"/>
                 </a:solidFill>
-                <a:latin typeface="Calibri" pitchFamily="34" charset="0"/>
-                <a:ea typeface="Calibri" pitchFamily="34" charset="-122"/>
-                <a:cs typeface="Calibri" pitchFamily="34" charset="-120"/>
+                <a:latin typeface="Calibri" panose="020F0502020204030204" pitchFamily="34" charset="0"/>
+                <a:ea typeface="Calibri" panose="020F0502020204030204" pitchFamily="34" charset="-122"/>
+                <a:cs typeface="Calibri" panose="020F0502020204030204" pitchFamily="34" charset="-120"/>
               </a:rPr>
               <a:t>retries=3 com backoff exponencial, teto de 10 min</a:t>
             </a:r>
@@ -9789,13 +9707,12 @@
             <a:avLst/>
           </a:prstGeom>
           <a:noFill/>
-          <a:ln/>
-        </p:spPr>
-        <p:txBody>
-          <a:bodyPr wrap="square" lIns="0" tIns="0" rIns="0" bIns="0" rtlCol="0" anchor="ctr"/>
-          <a:lstStyle/>
-          <a:p>
-            <a:pPr indent="0" marL="0">
+        </p:spPr>
+        <p:txBody>
+          <a:bodyPr wrap="square" lIns="0" tIns="0" rIns="0" bIns="0" rtlCol="0" anchor="ctr"/>
+          <a:lstStyle/>
+          <a:p>
+            <a:pPr marL="0" indent="0">
               <a:buNone/>
             </a:pPr>
             <a:r>
@@ -9803,9 +9720,9 @@
                 <a:solidFill>
                   <a:srgbClr val="0E2A33"/>
                 </a:solidFill>
-                <a:latin typeface="Calibri" pitchFamily="34" charset="0"/>
-                <a:ea typeface="Calibri" pitchFamily="34" charset="-122"/>
-                <a:cs typeface="Calibri" pitchFamily="34" charset="-120"/>
+                <a:latin typeface="Calibri" panose="020F0502020204030204" pitchFamily="34" charset="0"/>
+                <a:ea typeface="Calibri" panose="020F0502020204030204" pitchFamily="34" charset="-122"/>
+                <a:cs typeface="Calibri" panose="020F0502020204030204" pitchFamily="34" charset="-120"/>
               </a:rPr>
               <a:t>Arquivo ausente ou vazio</a:t>
             </a:r>
@@ -9828,13 +9745,12 @@
             <a:avLst/>
           </a:prstGeom>
           <a:noFill/>
-          <a:ln/>
-        </p:spPr>
-        <p:txBody>
-          <a:bodyPr wrap="square" lIns="0" tIns="0" rIns="0" bIns="0" rtlCol="0" anchor="ctr"/>
-          <a:lstStyle/>
-          <a:p>
-            <a:pPr indent="0" marL="0">
+        </p:spPr>
+        <p:txBody>
+          <a:bodyPr wrap="square" lIns="0" tIns="0" rIns="0" bIns="0" rtlCol="0" anchor="ctr"/>
+          <a:lstStyle/>
+          <a:p>
+            <a:pPr marL="0" indent="0">
               <a:buNone/>
             </a:pPr>
             <a:r>
@@ -9842,11 +9758,33 @@
                 <a:solidFill>
                   <a:srgbClr val="028090"/>
                 </a:solidFill>
-                <a:latin typeface="Calibri" pitchFamily="34" charset="0"/>
-                <a:ea typeface="Calibri" pitchFamily="34" charset="-122"/>
-                <a:cs typeface="Calibri" pitchFamily="34" charset="-120"/>
-              </a:rPr>
-              <a:t>AirflowFailException — falha imediata, sem gastar retry</a:t>
+                <a:latin typeface="Calibri" panose="020F0502020204030204" pitchFamily="34" charset="0"/>
+                <a:ea typeface="Calibri" panose="020F0502020204030204" pitchFamily="34" charset="-122"/>
+                <a:cs typeface="Calibri" panose="020F0502020204030204" pitchFamily="34" charset="-120"/>
+              </a:rPr>
+              <a:t>AirflowFailException </a:t>
+            </a:r>
+            <a:r>
+              <a:rPr lang="pt-BR" altLang="en-US" sz="1300" b="1" dirty="0">
+                <a:solidFill>
+                  <a:srgbClr val="028090"/>
+                </a:solidFill>
+                <a:latin typeface="Calibri" panose="020F0502020204030204" pitchFamily="34" charset="0"/>
+                <a:ea typeface="Calibri" panose="020F0502020204030204" pitchFamily="34" charset="-122"/>
+                <a:cs typeface="Calibri" panose="020F0502020204030204" pitchFamily="34" charset="-120"/>
+              </a:rPr>
+              <a:t>--&gt;</a:t>
+            </a:r>
+            <a:r>
+              <a:rPr lang="en-US" sz="1300" b="1" dirty="0">
+                <a:solidFill>
+                  <a:srgbClr val="028090"/>
+                </a:solidFill>
+                <a:latin typeface="Calibri" panose="020F0502020204030204" pitchFamily="34" charset="0"/>
+                <a:ea typeface="Calibri" panose="020F0502020204030204" pitchFamily="34" charset="-122"/>
+                <a:cs typeface="Calibri" panose="020F0502020204030204" pitchFamily="34" charset="-120"/>
+              </a:rPr>
+              <a:t> falha imediata, sem gastar retry</a:t>
             </a:r>
             <a:endParaRPr lang="en-US" sz="1300" dirty="0"/>
           </a:p>
@@ -9894,13 +9832,12 @@
             <a:avLst/>
           </a:prstGeom>
           <a:noFill/>
-          <a:ln/>
-        </p:spPr>
-        <p:txBody>
-          <a:bodyPr wrap="square" lIns="0" tIns="0" rIns="0" bIns="0" rtlCol="0" anchor="ctr"/>
-          <a:lstStyle/>
-          <a:p>
-            <a:pPr indent="0" marL="0">
+        </p:spPr>
+        <p:txBody>
+          <a:bodyPr wrap="square" lIns="0" tIns="0" rIns="0" bIns="0" rtlCol="0" anchor="ctr"/>
+          <a:lstStyle/>
+          <a:p>
+            <a:pPr marL="0" indent="0">
               <a:buNone/>
             </a:pPr>
             <a:r>
@@ -9908,9 +9845,9 @@
                 <a:solidFill>
                   <a:srgbClr val="0E2A33"/>
                 </a:solidFill>
-                <a:latin typeface="Calibri" pitchFamily="34" charset="0"/>
-                <a:ea typeface="Calibri" pitchFamily="34" charset="-122"/>
-                <a:cs typeface="Calibri" pitchFamily="34" charset="-120"/>
+                <a:latin typeface="Calibri" panose="020F0502020204030204" pitchFamily="34" charset="0"/>
+                <a:ea typeface="Calibri" panose="020F0502020204030204" pitchFamily="34" charset="-122"/>
+                <a:cs typeface="Calibri" panose="020F0502020204030204" pitchFamily="34" charset="-120"/>
               </a:rPr>
               <a:t>Contagem divergente, chave nula ou duplicada</a:t>
             </a:r>
@@ -9933,13 +9870,12 @@
             <a:avLst/>
           </a:prstGeom>
           <a:noFill/>
-          <a:ln/>
-        </p:spPr>
-        <p:txBody>
-          <a:bodyPr wrap="square" lIns="0" tIns="0" rIns="0" bIns="0" rtlCol="0" anchor="ctr"/>
-          <a:lstStyle/>
-          <a:p>
-            <a:pPr indent="0" marL="0">
+        </p:spPr>
+        <p:txBody>
+          <a:bodyPr wrap="square" lIns="0" tIns="0" rIns="0" bIns="0" rtlCol="0" anchor="ctr"/>
+          <a:lstStyle/>
+          <a:p>
+            <a:pPr marL="0" indent="0">
               <a:buNone/>
             </a:pPr>
             <a:r>
@@ -9947,9 +9883,9 @@
                 <a:solidFill>
                   <a:srgbClr val="028090"/>
                 </a:solidFill>
-                <a:latin typeface="Calibri" pitchFamily="34" charset="0"/>
-                <a:ea typeface="Calibri" pitchFamily="34" charset="-122"/>
-                <a:cs typeface="Calibri" pitchFamily="34" charset="-120"/>
+                <a:latin typeface="Calibri" panose="020F0502020204030204" pitchFamily="34" charset="0"/>
+                <a:ea typeface="Calibri" panose="020F0502020204030204" pitchFamily="34" charset="-122"/>
+                <a:cs typeface="Calibri" panose="020F0502020204030204" pitchFamily="34" charset="-120"/>
               </a:rPr>
               <a:t>Validação por tabela derruba a execução</a:t>
             </a:r>
@@ -9972,13 +9908,12 @@
             <a:avLst/>
           </a:prstGeom>
           <a:noFill/>
-          <a:ln/>
-        </p:spPr>
-        <p:txBody>
-          <a:bodyPr wrap="square" lIns="0" tIns="0" rIns="0" bIns="0" rtlCol="0" anchor="ctr"/>
-          <a:lstStyle/>
-          <a:p>
-            <a:pPr indent="0" marL="0">
+        </p:spPr>
+        <p:txBody>
+          <a:bodyPr wrap="square" lIns="0" tIns="0" rIns="0" bIns="0" rtlCol="0" anchor="ctr"/>
+          <a:lstStyle/>
+          <a:p>
+            <a:pPr marL="0" indent="0">
               <a:buNone/>
             </a:pPr>
             <a:r>
@@ -9986,9 +9921,9 @@
                 <a:solidFill>
                   <a:srgbClr val="0E2A33"/>
                 </a:solidFill>
-                <a:latin typeface="Calibri" pitchFamily="34" charset="0"/>
-                <a:ea typeface="Calibri" pitchFamily="34" charset="-122"/>
-                <a:cs typeface="Calibri" pitchFamily="34" charset="-120"/>
+                <a:latin typeface="Calibri" panose="020F0502020204030204" pitchFamily="34" charset="0"/>
+                <a:ea typeface="Calibri" panose="020F0502020204030204" pitchFamily="34" charset="-122"/>
+                <a:cs typeface="Calibri" panose="020F0502020204030204" pitchFamily="34" charset="-120"/>
               </a:rPr>
               <a:t>Task travada</a:t>
             </a:r>
@@ -10011,13 +9946,12 @@
             <a:avLst/>
           </a:prstGeom>
           <a:noFill/>
-          <a:ln/>
-        </p:spPr>
-        <p:txBody>
-          <a:bodyPr wrap="square" lIns="0" tIns="0" rIns="0" bIns="0" rtlCol="0" anchor="ctr"/>
-          <a:lstStyle/>
-          <a:p>
-            <a:pPr indent="0" marL="0">
+        </p:spPr>
+        <p:txBody>
+          <a:bodyPr wrap="square" lIns="0" tIns="0" rIns="0" bIns="0" rtlCol="0" anchor="ctr"/>
+          <a:lstStyle/>
+          <a:p>
+            <a:pPr marL="0" indent="0">
               <a:buNone/>
             </a:pPr>
             <a:r>
@@ -10025,9 +9959,9 @@
                 <a:solidFill>
                   <a:srgbClr val="028090"/>
                 </a:solidFill>
-                <a:latin typeface="Calibri" pitchFamily="34" charset="0"/>
-                <a:ea typeface="Calibri" pitchFamily="34" charset="-122"/>
-                <a:cs typeface="Calibri" pitchFamily="34" charset="-120"/>
+                <a:latin typeface="Calibri" panose="020F0502020204030204" pitchFamily="34" charset="0"/>
+                <a:ea typeface="Calibri" panose="020F0502020204030204" pitchFamily="34" charset="-122"/>
+                <a:cs typeface="Calibri" panose="020F0502020204030204" pitchFamily="34" charset="-120"/>
               </a:rPr>
               <a:t>execution_timeout de 30 min (45 min no Meltano)</a:t>
             </a:r>
@@ -10077,13 +10011,12 @@
             <a:avLst/>
           </a:prstGeom>
           <a:noFill/>
-          <a:ln/>
-        </p:spPr>
-        <p:txBody>
-          <a:bodyPr wrap="square" lIns="0" tIns="0" rIns="0" bIns="0" rtlCol="0" anchor="ctr"/>
-          <a:lstStyle/>
-          <a:p>
-            <a:pPr indent="0" marL="0">
+        </p:spPr>
+        <p:txBody>
+          <a:bodyPr wrap="square" lIns="0" tIns="0" rIns="0" bIns="0" rtlCol="0" anchor="ctr"/>
+          <a:lstStyle/>
+          <a:p>
+            <a:pPr marL="0" indent="0">
               <a:buNone/>
             </a:pPr>
             <a:r>
@@ -10091,9 +10024,9 @@
                 <a:solidFill>
                   <a:srgbClr val="0E2A33"/>
                 </a:solidFill>
-                <a:latin typeface="Calibri" pitchFamily="34" charset="0"/>
-                <a:ea typeface="Calibri" pitchFamily="34" charset="-122"/>
-                <a:cs typeface="Calibri" pitchFamily="34" charset="-120"/>
+                <a:latin typeface="Calibri" panose="020F0502020204030204" pitchFamily="34" charset="0"/>
+                <a:ea typeface="Calibri" panose="020F0502020204030204" pitchFamily="34" charset="-122"/>
+                <a:cs typeface="Calibri" panose="020F0502020204030204" pitchFamily="34" charset="-120"/>
               </a:rPr>
               <a:t>Pod destruído com o log dentro</a:t>
             </a:r>
@@ -10116,13 +10049,12 @@
             <a:avLst/>
           </a:prstGeom>
           <a:noFill/>
-          <a:ln/>
-        </p:spPr>
-        <p:txBody>
-          <a:bodyPr wrap="square" lIns="0" tIns="0" rIns="0" bIns="0" rtlCol="0" anchor="ctr"/>
-          <a:lstStyle/>
-          <a:p>
-            <a:pPr indent="0" marL="0">
+        </p:spPr>
+        <p:txBody>
+          <a:bodyPr wrap="square" lIns="0" tIns="0" rIns="0" bIns="0" rtlCol="0" anchor="ctr"/>
+          <a:lstStyle/>
+          <a:p>
+            <a:pPr marL="0" indent="0">
               <a:buNone/>
             </a:pPr>
             <a:r>
@@ -10130,9 +10062,9 @@
                 <a:solidFill>
                   <a:srgbClr val="028090"/>
                 </a:solidFill>
-                <a:latin typeface="Calibri" pitchFamily="34" charset="0"/>
-                <a:ea typeface="Calibri" pitchFamily="34" charset="-122"/>
-                <a:cs typeface="Calibri" pitchFamily="34" charset="-120"/>
+                <a:latin typeface="Calibri" panose="020F0502020204030204" pitchFamily="34" charset="0"/>
+                <a:ea typeface="Calibri" panose="020F0502020204030204" pitchFamily="34" charset="-122"/>
+                <a:cs typeface="Calibri" panose="020F0502020204030204" pitchFamily="34" charset="-120"/>
               </a:rPr>
               <a:t>Log remoto no MinIO</a:t>
             </a:r>
@@ -10155,13 +10087,12 @@
             <a:avLst/>
           </a:prstGeom>
           <a:noFill/>
-          <a:ln/>
-        </p:spPr>
-        <p:txBody>
-          <a:bodyPr wrap="square" lIns="0" tIns="0" rIns="0" bIns="0" rtlCol="0" anchor="ctr"/>
-          <a:lstStyle/>
-          <a:p>
-            <a:pPr indent="0" marL="0">
+        </p:spPr>
+        <p:txBody>
+          <a:bodyPr wrap="square" lIns="0" tIns="0" rIns="0" bIns="0" rtlCol="0" anchor="ctr"/>
+          <a:lstStyle/>
+          <a:p>
+            <a:pPr marL="0" indent="0">
               <a:buNone/>
             </a:pPr>
             <a:r>
@@ -10169,9 +10100,9 @@
                 <a:solidFill>
                   <a:srgbClr val="0E2A33"/>
                 </a:solidFill>
-                <a:latin typeface="Calibri" pitchFamily="34" charset="0"/>
-                <a:ea typeface="Calibri" pitchFamily="34" charset="-122"/>
-                <a:cs typeface="Calibri" pitchFamily="34" charset="-120"/>
+                <a:latin typeface="Calibri" panose="020F0502020204030204" pitchFamily="34" charset="0"/>
+                <a:ea typeface="Calibri" panose="020F0502020204030204" pitchFamily="34" charset="-122"/>
+                <a:cs typeface="Calibri" panose="020F0502020204030204" pitchFamily="34" charset="-120"/>
               </a:rPr>
               <a:t>Falha em produção</a:t>
             </a:r>
@@ -10194,13 +10125,12 @@
             <a:avLst/>
           </a:prstGeom>
           <a:noFill/>
-          <a:ln/>
-        </p:spPr>
-        <p:txBody>
-          <a:bodyPr wrap="square" lIns="0" tIns="0" rIns="0" bIns="0" rtlCol="0" anchor="ctr"/>
-          <a:lstStyle/>
-          <a:p>
-            <a:pPr indent="0" marL="0">
+        </p:spPr>
+        <p:txBody>
+          <a:bodyPr wrap="square" lIns="0" tIns="0" rIns="0" bIns="0" rtlCol="0" anchor="ctr"/>
+          <a:lstStyle/>
+          <a:p>
+            <a:pPr marL="0" indent="0">
               <a:buNone/>
             </a:pPr>
             <a:r>
@@ -10208,9 +10138,9 @@
                 <a:solidFill>
                   <a:srgbClr val="028090"/>
                 </a:solidFill>
-                <a:latin typeface="Calibri" pitchFamily="34" charset="0"/>
-                <a:ea typeface="Calibri" pitchFamily="34" charset="-122"/>
-                <a:cs typeface="Calibri" pitchFamily="34" charset="-120"/>
+                <a:latin typeface="Calibri" panose="020F0502020204030204" pitchFamily="34" charset="0"/>
+                <a:ea typeface="Calibri" panose="020F0502020204030204" pitchFamily="34" charset="-122"/>
+                <a:cs typeface="Calibri" panose="020F0502020204030204" pitchFamily="34" charset="-120"/>
               </a:rPr>
               <a:t>on_failure_callback grava status FALHA na auditoria</a:t>
             </a:r>
@@ -10233,13 +10163,12 @@
             <a:avLst/>
           </a:prstGeom>
           <a:noFill/>
-          <a:ln/>
-        </p:spPr>
-        <p:txBody>
-          <a:bodyPr wrap="square" lIns="0" tIns="0" rIns="0" bIns="0" rtlCol="0" anchor="ctr"/>
-          <a:lstStyle/>
-          <a:p>
-            <a:pPr indent="0" marL="0">
+        </p:spPr>
+        <p:txBody>
+          <a:bodyPr wrap="square" lIns="0" tIns="0" rIns="0" bIns="0" rtlCol="0" anchor="ctr"/>
+          <a:lstStyle/>
+          <a:p>
+            <a:pPr marL="0" indent="0">
               <a:buNone/>
             </a:pPr>
             <a:r>
@@ -10247,11 +10176,33 @@
                 <a:solidFill>
                   <a:srgbClr val="5F7278"/>
                 </a:solidFill>
-                <a:latin typeface="Calibri" pitchFamily="34" charset="0"/>
-                <a:ea typeface="Calibri" pitchFamily="34" charset="-122"/>
-                <a:cs typeface="Calibri" pitchFamily="34" charset="-120"/>
-              </a:rPr>
-              <a:t>Pods com falha não são removidos — ficam disponíveis para kubectl logs e describe no post-mortem.</a:t>
+                <a:latin typeface="Calibri" panose="020F0502020204030204" pitchFamily="34" charset="0"/>
+                <a:ea typeface="Calibri" panose="020F0502020204030204" pitchFamily="34" charset="-122"/>
+                <a:cs typeface="Calibri" panose="020F0502020204030204" pitchFamily="34" charset="-120"/>
+              </a:rPr>
+              <a:t>Pods com falha não são removidos</a:t>
+            </a:r>
+            <a:r>
+              <a:rPr lang="pt-BR" altLang="en-US" sz="1250" i="1" dirty="0">
+                <a:solidFill>
+                  <a:srgbClr val="5F7278"/>
+                </a:solidFill>
+                <a:latin typeface="Calibri" panose="020F0502020204030204" pitchFamily="34" charset="0"/>
+                <a:ea typeface="Calibri" panose="020F0502020204030204" pitchFamily="34" charset="-122"/>
+                <a:cs typeface="Calibri" panose="020F0502020204030204" pitchFamily="34" charset="-120"/>
+              </a:rPr>
+              <a:t>,</a:t>
+            </a:r>
+            <a:r>
+              <a:rPr lang="en-US" sz="1250" i="1" dirty="0">
+                <a:solidFill>
+                  <a:srgbClr val="5F7278"/>
+                </a:solidFill>
+                <a:latin typeface="Calibri" panose="020F0502020204030204" pitchFamily="34" charset="0"/>
+                <a:ea typeface="Calibri" panose="020F0502020204030204" pitchFamily="34" charset="-122"/>
+                <a:cs typeface="Calibri" panose="020F0502020204030204" pitchFamily="34" charset="-120"/>
+              </a:rPr>
+              <a:t> ficam disponíveis para kubectl logs e describe no post-mortem.</a:t>
             </a:r>
             <a:endParaRPr lang="en-US" sz="1250" dirty="0"/>
           </a:p>
@@ -10272,13 +10223,12 @@
             <a:avLst/>
           </a:prstGeom>
           <a:noFill/>
-          <a:ln/>
-        </p:spPr>
-        <p:txBody>
-          <a:bodyPr wrap="square" lIns="0" tIns="0" rIns="0" bIns="0" rtlCol="0" anchor="ctr"/>
-          <a:lstStyle/>
-          <a:p>
-            <a:pPr algn="r" indent="0" marL="0">
+        </p:spPr>
+        <p:txBody>
+          <a:bodyPr wrap="square" lIns="0" tIns="0" rIns="0" bIns="0" rtlCol="0" anchor="ctr"/>
+          <a:lstStyle/>
+          <a:p>
+            <a:pPr marL="0" indent="0" algn="r">
               <a:buNone/>
             </a:pPr>
             <a:r>
@@ -10286,9 +10236,9 @@
                 <a:solidFill>
                   <a:srgbClr val="5F7278"/>
                 </a:solidFill>
-                <a:latin typeface="Calibri" pitchFamily="34" charset="0"/>
-                <a:ea typeface="Calibri" pitchFamily="34" charset="-122"/>
-                <a:cs typeface="Calibri" pitchFamily="34" charset="-120"/>
+                <a:latin typeface="Calibri" panose="020F0502020204030204" pitchFamily="34" charset="0"/>
+                <a:ea typeface="Calibri" panose="020F0502020204030204" pitchFamily="34" charset="-122"/>
+                <a:cs typeface="Calibri" panose="020F0502020204030204" pitchFamily="34" charset="-120"/>
               </a:rPr>
               <a:t>8</a:t>
             </a:r>
@@ -10306,12 +10256,13 @@
 
 <file path=ppt/slides/slide9.xml><?xml version="1.0" encoding="utf-8"?>
 <p:sld xmlns:a="http://schemas.openxmlformats.org/drawingml/2006/main" xmlns:r="http://schemas.openxmlformats.org/officeDocument/2006/relationships" xmlns:p="http://schemas.openxmlformats.org/presentationml/2006/main">
-  <p:cSld name="Slide 9">
+  <p:cSld>
     <p:bg>
       <p:bgPr>
         <a:solidFill>
           <a:srgbClr val="0E2A33"/>
         </a:solidFill>
+        <a:effectLst/>
       </p:bgPr>
     </p:bg>
     <p:spTree>
@@ -10343,13 +10294,12 @@
             <a:avLst/>
           </a:prstGeom>
           <a:noFill/>
-          <a:ln/>
-        </p:spPr>
-        <p:txBody>
-          <a:bodyPr wrap="square" lIns="0" tIns="0" rIns="0" bIns="0" rtlCol="0" anchor="ctr"/>
-          <a:lstStyle/>
-          <a:p>
-            <a:pPr indent="0" marL="0">
+        </p:spPr>
+        <p:txBody>
+          <a:bodyPr wrap="square" lIns="0" tIns="0" rIns="0" bIns="0" rtlCol="0" anchor="ctr"/>
+          <a:lstStyle/>
+          <a:p>
+            <a:pPr marL="0" indent="0">
               <a:buNone/>
             </a:pPr>
             <a:r>
@@ -10357,9 +10307,9 @@
                 <a:solidFill>
                   <a:srgbClr val="FFFFFF"/>
                 </a:solidFill>
-                <a:latin typeface="Cambria" pitchFamily="34" charset="0"/>
-                <a:ea typeface="Cambria" pitchFamily="34" charset="-122"/>
-                <a:cs typeface="Cambria" pitchFamily="34" charset="-120"/>
+                <a:latin typeface="Cambria" panose="02040503050406030204" pitchFamily="34" charset="0"/>
+                <a:ea typeface="Cambria" panose="02040503050406030204" pitchFamily="34" charset="-122"/>
+                <a:cs typeface="Cambria" panose="02040503050406030204" pitchFamily="34" charset="-120"/>
               </a:rPr>
               <a:t>Segurança e segredos</a:t>
             </a:r>
@@ -10382,13 +10332,12 @@
             <a:avLst/>
           </a:prstGeom>
           <a:noFill/>
-          <a:ln/>
-        </p:spPr>
-        <p:txBody>
-          <a:bodyPr wrap="square" lIns="0" tIns="0" rIns="0" bIns="0" rtlCol="0" anchor="ctr"/>
-          <a:lstStyle/>
-          <a:p>
-            <a:pPr indent="0" marL="0">
+        </p:spPr>
+        <p:txBody>
+          <a:bodyPr wrap="square" lIns="0" tIns="0" rIns="0" bIns="0" rtlCol="0" anchor="ctr"/>
+          <a:lstStyle/>
+          <a:p>
+            <a:pPr marL="0" indent="0">
               <a:buNone/>
             </a:pPr>
             <a:r>
@@ -10396,9 +10345,9 @@
                 <a:solidFill>
                   <a:srgbClr val="02C39A"/>
                 </a:solidFill>
-                <a:latin typeface="Calibri" pitchFamily="34" charset="0"/>
-                <a:ea typeface="Calibri" pitchFamily="34" charset="-122"/>
-                <a:cs typeface="Calibri" pitchFamily="34" charset="-120"/>
+                <a:latin typeface="Calibri" panose="020F0502020204030204" pitchFamily="34" charset="0"/>
+                <a:ea typeface="Calibri" panose="020F0502020204030204" pitchFamily="34" charset="-122"/>
+                <a:cs typeface="Calibri" panose="020F0502020204030204" pitchFamily="34" charset="-120"/>
               </a:rPr>
               <a:t>Quem clona o repositório não recebe credencial nenhuma.</a:t>
             </a:r>
@@ -10446,13 +10395,12 @@
             <a:avLst/>
           </a:prstGeom>
           <a:noFill/>
-          <a:ln/>
-        </p:spPr>
-        <p:txBody>
-          <a:bodyPr wrap="square" lIns="0" tIns="0" rIns="0" bIns="0" rtlCol="0" anchor="ctr"/>
-          <a:lstStyle/>
-          <a:p>
-            <a:pPr algn="ctr" indent="0" marL="0">
+        </p:spPr>
+        <p:txBody>
+          <a:bodyPr wrap="square" lIns="0" tIns="0" rIns="0" bIns="0" rtlCol="0" anchor="ctr"/>
+          <a:lstStyle/>
+          <a:p>
+            <a:pPr marL="0" indent="0" algn="ctr">
               <a:buNone/>
             </a:pPr>
             <a:r>
@@ -10460,9 +10408,9 @@
                 <a:solidFill>
                   <a:srgbClr val="07352C"/>
                 </a:solidFill>
-                <a:latin typeface="Calibri" pitchFamily="34" charset="0"/>
-                <a:ea typeface="Calibri" pitchFamily="34" charset="-122"/>
-                <a:cs typeface="Calibri" pitchFamily="34" charset="-120"/>
+                <a:latin typeface="Calibri" panose="020F0502020204030204" pitchFamily="34" charset="0"/>
+                <a:ea typeface="Calibri" panose="020F0502020204030204" pitchFamily="34" charset="-122"/>
+                <a:cs typeface="Calibri" panose="020F0502020204030204" pitchFamily="34" charset="-120"/>
               </a:rPr>
               <a:t>1</a:t>
             </a:r>
@@ -10485,13 +10433,12 @@
             <a:avLst/>
           </a:prstGeom>
           <a:noFill/>
-          <a:ln/>
-        </p:spPr>
-        <p:txBody>
-          <a:bodyPr wrap="square" lIns="0" tIns="0" rIns="0" bIns="0" rtlCol="0" anchor="ctr"/>
-          <a:lstStyle/>
-          <a:p>
-            <a:pPr indent="0" marL="0">
+        </p:spPr>
+        <p:txBody>
+          <a:bodyPr wrap="square" lIns="0" tIns="0" rIns="0" bIns="0" rtlCol="0" anchor="ctr"/>
+          <a:lstStyle/>
+          <a:p>
+            <a:pPr marL="0" indent="0">
               <a:buNone/>
             </a:pPr>
             <a:r>
@@ -10499,9 +10446,9 @@
                 <a:solidFill>
                   <a:srgbClr val="FFFFFF"/>
                 </a:solidFill>
-                <a:latin typeface="Calibri" pitchFamily="34" charset="0"/>
-                <a:ea typeface="Calibri" pitchFamily="34" charset="-122"/>
-                <a:cs typeface="Calibri" pitchFamily="34" charset="-120"/>
+                <a:latin typeface="Calibri" panose="020F0502020204030204" pitchFamily="34" charset="0"/>
+                <a:ea typeface="Calibri" panose="020F0502020204030204" pitchFamily="34" charset="-122"/>
+                <a:cs typeface="Calibri" panose="020F0502020204030204" pitchFamily="34" charset="-120"/>
               </a:rPr>
               <a:t>Geradas na hora</a:t>
             </a:r>
@@ -10524,13 +10471,12 @@
             <a:avLst/>
           </a:prstGeom>
           <a:noFill/>
-          <a:ln/>
-        </p:spPr>
-        <p:txBody>
-          <a:bodyPr wrap="square" lIns="0" tIns="0" rIns="0" bIns="0" rtlCol="0" anchor="ctr"/>
-          <a:lstStyle/>
-          <a:p>
-            <a:pPr indent="0" marL="0">
+        </p:spPr>
+        <p:txBody>
+          <a:bodyPr wrap="square" lIns="0" tIns="0" rIns="0" bIns="0" rtlCol="0" anchor="ctr"/>
+          <a:lstStyle/>
+          <a:p>
+            <a:pPr marL="0" indent="0">
               <a:buNone/>
             </a:pPr>
             <a:r>
@@ -10538,9 +10484,9 @@
                 <a:solidFill>
                   <a:srgbClr val="9FC9CE"/>
                 </a:solidFill>
-                <a:latin typeface="Calibri" pitchFamily="34" charset="0"/>
-                <a:ea typeface="Calibri" pitchFamily="34" charset="-122"/>
-                <a:cs typeface="Calibri" pitchFamily="34" charset="-120"/>
+                <a:latin typeface="Calibri" panose="020F0502020204030204" pitchFamily="34" charset="0"/>
+                <a:ea typeface="Calibri" panose="020F0502020204030204" pitchFamily="34" charset="-122"/>
+                <a:cs typeface="Calibri" panose="020F0502020204030204" pitchFamily="34" charset="-120"/>
               </a:rPr>
               <a:t>openssl rand na primeira execução, em arquivo fora do versionamento</a:t>
             </a:r>
@@ -10588,13 +10534,12 @@
             <a:avLst/>
           </a:prstGeom>
           <a:noFill/>
-          <a:ln/>
-        </p:spPr>
-        <p:txBody>
-          <a:bodyPr wrap="square" lIns="0" tIns="0" rIns="0" bIns="0" rtlCol="0" anchor="ctr"/>
-          <a:lstStyle/>
-          <a:p>
-            <a:pPr algn="ctr" indent="0" marL="0">
+        </p:spPr>
+        <p:txBody>
+          <a:bodyPr wrap="square" lIns="0" tIns="0" rIns="0" bIns="0" rtlCol="0" anchor="ctr"/>
+          <a:lstStyle/>
+          <a:p>
+            <a:pPr marL="0" indent="0" algn="ctr">
               <a:buNone/>
             </a:pPr>
             <a:r>
@@ -10602,9 +10547,9 @@
                 <a:solidFill>
                   <a:srgbClr val="07352C"/>
                 </a:solidFill>
-                <a:latin typeface="Calibri" pitchFamily="34" charset="0"/>
-                <a:ea typeface="Calibri" pitchFamily="34" charset="-122"/>
-                <a:cs typeface="Calibri" pitchFamily="34" charset="-120"/>
+                <a:latin typeface="Calibri" panose="020F0502020204030204" pitchFamily="34" charset="0"/>
+                <a:ea typeface="Calibri" panose="020F0502020204030204" pitchFamily="34" charset="-122"/>
+                <a:cs typeface="Calibri" panose="020F0502020204030204" pitchFamily="34" charset="-120"/>
               </a:rPr>
               <a:t>2</a:t>
             </a:r>
@@ -10627,13 +10572,12 @@
             <a:avLst/>
           </a:prstGeom>
           <a:noFill/>
-          <a:ln/>
-        </p:spPr>
-        <p:txBody>
-          <a:bodyPr wrap="square" lIns="0" tIns="0" rIns="0" bIns="0" rtlCol="0" anchor="ctr"/>
-          <a:lstStyle/>
-          <a:p>
-            <a:pPr indent="0" marL="0">
+        </p:spPr>
+        <p:txBody>
+          <a:bodyPr wrap="square" lIns="0" tIns="0" rIns="0" bIns="0" rtlCol="0" anchor="ctr"/>
+          <a:lstStyle/>
+          <a:p>
+            <a:pPr marL="0" indent="0">
               <a:buNone/>
             </a:pPr>
             <a:r>
@@ -10641,9 +10585,9 @@
                 <a:solidFill>
                   <a:srgbClr val="FFFFFF"/>
                 </a:solidFill>
-                <a:latin typeface="Calibri" pitchFamily="34" charset="0"/>
-                <a:ea typeface="Calibri" pitchFamily="34" charset="-122"/>
-                <a:cs typeface="Calibri" pitchFamily="34" charset="-120"/>
+                <a:latin typeface="Calibri" panose="020F0502020204030204" pitchFamily="34" charset="0"/>
+                <a:ea typeface="Calibri" panose="020F0502020204030204" pitchFamily="34" charset="-122"/>
+                <a:cs typeface="Calibri" panose="020F0502020204030204" pitchFamily="34" charset="-120"/>
               </a:rPr>
               <a:t>Viram Secret</a:t>
             </a:r>
@@ -10666,13 +10610,12 @@
             <a:avLst/>
           </a:prstGeom>
           <a:noFill/>
-          <a:ln/>
-        </p:spPr>
-        <p:txBody>
-          <a:bodyPr wrap="square" lIns="0" tIns="0" rIns="0" bIns="0" rtlCol="0" anchor="ctr"/>
-          <a:lstStyle/>
-          <a:p>
-            <a:pPr indent="0" marL="0">
+        </p:spPr>
+        <p:txBody>
+          <a:bodyPr wrap="square" lIns="0" tIns="0" rIns="0" bIns="0" rtlCol="0" anchor="ctr"/>
+          <a:lstStyle/>
+          <a:p>
+            <a:pPr marL="0" indent="0">
               <a:buNone/>
             </a:pPr>
             <a:r>
@@ -10680,9 +10623,9 @@
                 <a:solidFill>
                   <a:srgbClr val="9FC9CE"/>
                 </a:solidFill>
-                <a:latin typeface="Calibri" pitchFamily="34" charset="0"/>
-                <a:ea typeface="Calibri" pitchFamily="34" charset="-122"/>
-                <a:cs typeface="Calibri" pitchFamily="34" charset="-120"/>
+                <a:latin typeface="Calibri" panose="020F0502020204030204" pitchFamily="34" charset="0"/>
+                <a:ea typeface="Calibri" panose="020F0502020204030204" pitchFamily="34" charset="-122"/>
+                <a:cs typeface="Calibri" panose="020F0502020204030204" pitchFamily="34" charset="-120"/>
               </a:rPr>
               <a:t>Terraform declara as variáveis como sensitive e cria Secrets do Kubernetes</a:t>
             </a:r>
@@ -10730,13 +10673,12 @@
             <a:avLst/>
           </a:prstGeom>
           <a:noFill/>
-          <a:ln/>
-        </p:spPr>
-        <p:txBody>
-          <a:bodyPr wrap="square" lIns="0" tIns="0" rIns="0" bIns="0" rtlCol="0" anchor="ctr"/>
-          <a:lstStyle/>
-          <a:p>
-            <a:pPr algn="ctr" indent="0" marL="0">
+        </p:spPr>
+        <p:txBody>
+          <a:bodyPr wrap="square" lIns="0" tIns="0" rIns="0" bIns="0" rtlCol="0" anchor="ctr"/>
+          <a:lstStyle/>
+          <a:p>
+            <a:pPr marL="0" indent="0" algn="ctr">
               <a:buNone/>
             </a:pPr>
             <a:r>
@@ -10744,9 +10686,9 @@
                 <a:solidFill>
                   <a:srgbClr val="07352C"/>
                 </a:solidFill>
-                <a:latin typeface="Calibri" pitchFamily="34" charset="0"/>
-                <a:ea typeface="Calibri" pitchFamily="34" charset="-122"/>
-                <a:cs typeface="Calibri" pitchFamily="34" charset="-120"/>
+                <a:latin typeface="Calibri" panose="020F0502020204030204" pitchFamily="34" charset="0"/>
+                <a:ea typeface="Calibri" panose="020F0502020204030204" pitchFamily="34" charset="-122"/>
+                <a:cs typeface="Calibri" panose="020F0502020204030204" pitchFamily="34" charset="-120"/>
               </a:rPr>
               <a:t>3</a:t>
             </a:r>
@@ -10769,13 +10711,12 @@
             <a:avLst/>
           </a:prstGeom>
           <a:noFill/>
-          <a:ln/>
-        </p:spPr>
-        <p:txBody>
-          <a:bodyPr wrap="square" lIns="0" tIns="0" rIns="0" bIns="0" rtlCol="0" anchor="ctr"/>
-          <a:lstStyle/>
-          <a:p>
-            <a:pPr indent="0" marL="0">
+        </p:spPr>
+        <p:txBody>
+          <a:bodyPr wrap="square" lIns="0" tIns="0" rIns="0" bIns="0" rtlCol="0" anchor="ctr"/>
+          <a:lstStyle/>
+          <a:p>
+            <a:pPr marL="0" indent="0">
               <a:buNone/>
             </a:pPr>
             <a:r>
@@ -10783,9 +10724,9 @@
                 <a:solidFill>
                   <a:srgbClr val="FFFFFF"/>
                 </a:solidFill>
-                <a:latin typeface="Calibri" pitchFamily="34" charset="0"/>
-                <a:ea typeface="Calibri" pitchFamily="34" charset="-122"/>
-                <a:cs typeface="Calibri" pitchFamily="34" charset="-120"/>
+                <a:latin typeface="Calibri" panose="020F0502020204030204" pitchFamily="34" charset="0"/>
+                <a:ea typeface="Calibri" panose="020F0502020204030204" pitchFamily="34" charset="-122"/>
+                <a:cs typeface="Calibri" panose="020F0502020204030204" pitchFamily="34" charset="-120"/>
               </a:rPr>
               <a:t>Chegam por ambiente</a:t>
             </a:r>
@@ -10808,13 +10749,12 @@
             <a:avLst/>
           </a:prstGeom>
           <a:noFill/>
-          <a:ln/>
-        </p:spPr>
-        <p:txBody>
-          <a:bodyPr wrap="square" lIns="0" tIns="0" rIns="0" bIns="0" rtlCol="0" anchor="ctr"/>
-          <a:lstStyle/>
-          <a:p>
-            <a:pPr indent="0" marL="0">
+        </p:spPr>
+        <p:txBody>
+          <a:bodyPr wrap="square" lIns="0" tIns="0" rIns="0" bIns="0" rtlCol="0" anchor="ctr"/>
+          <a:lstStyle/>
+          <a:p>
+            <a:pPr marL="0" indent="0">
               <a:buNone/>
             </a:pPr>
             <a:r>
@@ -10822,9 +10762,9 @@
                 <a:solidFill>
                   <a:srgbClr val="9FC9CE"/>
                 </a:solidFill>
-                <a:latin typeface="Calibri" pitchFamily="34" charset="0"/>
-                <a:ea typeface="Calibri" pitchFamily="34" charset="-122"/>
-                <a:cs typeface="Calibri" pitchFamily="34" charset="-120"/>
+                <a:latin typeface="Calibri" panose="020F0502020204030204" pitchFamily="34" charset="0"/>
+                <a:ea typeface="Calibri" panose="020F0502020204030204" pitchFamily="34" charset="-122"/>
+                <a:cs typeface="Calibri" panose="020F0502020204030204" pitchFamily="34" charset="-120"/>
               </a:rPr>
               <a:t>Pods consomem via envFrom secretRef — nunca por arquivo</a:t>
             </a:r>
@@ -10872,13 +10812,12 @@
             <a:avLst/>
           </a:prstGeom>
           <a:noFill/>
-          <a:ln/>
-        </p:spPr>
-        <p:txBody>
-          <a:bodyPr wrap="square" lIns="0" tIns="0" rIns="0" bIns="0" rtlCol="0" anchor="ctr"/>
-          <a:lstStyle/>
-          <a:p>
-            <a:pPr algn="ctr" indent="0" marL="0">
+        </p:spPr>
+        <p:txBody>
+          <a:bodyPr wrap="square" lIns="0" tIns="0" rIns="0" bIns="0" rtlCol="0" anchor="ctr"/>
+          <a:lstStyle/>
+          <a:p>
+            <a:pPr marL="0" indent="0" algn="ctr">
               <a:buNone/>
             </a:pPr>
             <a:r>
@@ -10886,9 +10825,9 @@
                 <a:solidFill>
                   <a:srgbClr val="07352C"/>
                 </a:solidFill>
-                <a:latin typeface="Calibri" pitchFamily="34" charset="0"/>
-                <a:ea typeface="Calibri" pitchFamily="34" charset="-122"/>
-                <a:cs typeface="Calibri" pitchFamily="34" charset="-120"/>
+                <a:latin typeface="Calibri" panose="020F0502020204030204" pitchFamily="34" charset="0"/>
+                <a:ea typeface="Calibri" panose="020F0502020204030204" pitchFamily="34" charset="-122"/>
+                <a:cs typeface="Calibri" panose="020F0502020204030204" pitchFamily="34" charset="-120"/>
               </a:rPr>
               <a:t>4</a:t>
             </a:r>
@@ -10911,13 +10850,12 @@
             <a:avLst/>
           </a:prstGeom>
           <a:noFill/>
-          <a:ln/>
-        </p:spPr>
-        <p:txBody>
-          <a:bodyPr wrap="square" lIns="0" tIns="0" rIns="0" bIns="0" rtlCol="0" anchor="ctr"/>
-          <a:lstStyle/>
-          <a:p>
-            <a:pPr indent="0" marL="0">
+        </p:spPr>
+        <p:txBody>
+          <a:bodyPr wrap="square" lIns="0" tIns="0" rIns="0" bIns="0" rtlCol="0" anchor="ctr"/>
+          <a:lstStyle/>
+          <a:p>
+            <a:pPr marL="0" indent="0">
               <a:buNone/>
             </a:pPr>
             <a:r>
@@ -10925,9 +10863,9 @@
                 <a:solidFill>
                   <a:srgbClr val="FFFFFF"/>
                 </a:solidFill>
-                <a:latin typeface="Calibri" pitchFamily="34" charset="0"/>
-                <a:ea typeface="Calibri" pitchFamily="34" charset="-122"/>
-                <a:cs typeface="Calibri" pitchFamily="34" charset="-120"/>
+                <a:latin typeface="Calibri" panose="020F0502020204030204" pitchFamily="34" charset="0"/>
+                <a:ea typeface="Calibri" panose="020F0502020204030204" pitchFamily="34" charset="-122"/>
+                <a:cs typeface="Calibri" panose="020F0502020204030204" pitchFamily="34" charset="-120"/>
               </a:rPr>
               <a:t>Connections injetadas</a:t>
             </a:r>
@@ -10950,13 +10888,12 @@
             <a:avLst/>
           </a:prstGeom>
           <a:noFill/>
-          <a:ln/>
-        </p:spPr>
-        <p:txBody>
-          <a:bodyPr wrap="square" lIns="0" tIns="0" rIns="0" bIns="0" rtlCol="0" anchor="ctr"/>
-          <a:lstStyle/>
-          <a:p>
-            <a:pPr indent="0" marL="0">
+        </p:spPr>
+        <p:txBody>
+          <a:bodyPr wrap="square" lIns="0" tIns="0" rIns="0" bIns="0" rtlCol="0" anchor="ctr"/>
+          <a:lstStyle/>
+          <a:p>
+            <a:pPr marL="0" indent="0">
               <a:buNone/>
             </a:pPr>
             <a:r>
@@ -10964,9 +10901,9 @@
                 <a:solidFill>
                   <a:srgbClr val="9FC9CE"/>
                 </a:solidFill>
-                <a:latin typeface="Calibri" pitchFamily="34" charset="0"/>
-                <a:ea typeface="Calibri" pitchFamily="34" charset="-122"/>
-                <a:cs typeface="Calibri" pitchFamily="34" charset="-120"/>
+                <a:latin typeface="Calibri" panose="020F0502020204030204" pitchFamily="34" charset="0"/>
+                <a:ea typeface="Calibri" panose="020F0502020204030204" pitchFamily="34" charset="-122"/>
+                <a:cs typeface="Calibri" panose="020F0502020204030204" pitchFamily="34" charset="-120"/>
               </a:rPr>
               <a:t>AIRFLOW_CONN_* não ficam no banco nem são digitadas na interface</a:t>
             </a:r>
@@ -11014,13 +10951,12 @@
             <a:avLst/>
           </a:prstGeom>
           <a:noFill/>
-          <a:ln/>
-        </p:spPr>
-        <p:txBody>
-          <a:bodyPr wrap="square" lIns="0" tIns="0" rIns="0" bIns="0" rtlCol="0" anchor="ctr"/>
-          <a:lstStyle/>
-          <a:p>
-            <a:pPr algn="ctr" indent="0" marL="0">
+        </p:spPr>
+        <p:txBody>
+          <a:bodyPr wrap="square" lIns="0" tIns="0" rIns="0" bIns="0" rtlCol="0" anchor="ctr"/>
+          <a:lstStyle/>
+          <a:p>
+            <a:pPr marL="0" indent="0" algn="ctr">
               <a:buNone/>
             </a:pPr>
             <a:r>
@@ -11028,9 +10964,9 @@
                 <a:solidFill>
                   <a:srgbClr val="07352C"/>
                 </a:solidFill>
-                <a:latin typeface="Calibri" pitchFamily="34" charset="0"/>
-                <a:ea typeface="Calibri" pitchFamily="34" charset="-122"/>
-                <a:cs typeface="Calibri" pitchFamily="34" charset="-120"/>
+                <a:latin typeface="Calibri" panose="020F0502020204030204" pitchFamily="34" charset="0"/>
+                <a:ea typeface="Calibri" panose="020F0502020204030204" pitchFamily="34" charset="-122"/>
+                <a:cs typeface="Calibri" panose="020F0502020204030204" pitchFamily="34" charset="-120"/>
               </a:rPr>
               <a:t>5</a:t>
             </a:r>
@@ -11053,13 +10989,12 @@
             <a:avLst/>
           </a:prstGeom>
           <a:noFill/>
-          <a:ln/>
-        </p:spPr>
-        <p:txBody>
-          <a:bodyPr wrap="square" lIns="0" tIns="0" rIns="0" bIns="0" rtlCol="0" anchor="ctr"/>
-          <a:lstStyle/>
-          <a:p>
-            <a:pPr indent="0" marL="0">
+        </p:spPr>
+        <p:txBody>
+          <a:bodyPr wrap="square" lIns="0" tIns="0" rIns="0" bIns="0" rtlCol="0" anchor="ctr"/>
+          <a:lstStyle/>
+          <a:p>
+            <a:pPr marL="0" indent="0">
               <a:buNone/>
             </a:pPr>
             <a:r>
@@ -11067,9 +11002,9 @@
                 <a:solidFill>
                   <a:srgbClr val="FFFFFF"/>
                 </a:solidFill>
-                <a:latin typeface="Calibri" pitchFamily="34" charset="0"/>
-                <a:ea typeface="Calibri" pitchFamily="34" charset="-122"/>
-                <a:cs typeface="Calibri" pitchFamily="34" charset="-120"/>
+                <a:latin typeface="Calibri" panose="020F0502020204030204" pitchFamily="34" charset="0"/>
+                <a:ea typeface="Calibri" panose="020F0502020204030204" pitchFamily="34" charset="-122"/>
+                <a:cs typeface="Calibri" panose="020F0502020204030204" pitchFamily="34" charset="-120"/>
               </a:rPr>
               <a:t>Meltano referencia nomes</a:t>
             </a:r>
@@ -11092,13 +11027,12 @@
             <a:avLst/>
           </a:prstGeom>
           <a:noFill/>
-          <a:ln/>
-        </p:spPr>
-        <p:txBody>
-          <a:bodyPr wrap="square" lIns="0" tIns="0" rIns="0" bIns="0" rtlCol="0" anchor="ctr"/>
-          <a:lstStyle/>
-          <a:p>
-            <a:pPr indent="0" marL="0">
+        </p:spPr>
+        <p:txBody>
+          <a:bodyPr wrap="square" lIns="0" tIns="0" rIns="0" bIns="0" rtlCol="0" anchor="ctr"/>
+          <a:lstStyle/>
+          <a:p>
+            <a:pPr marL="0" indent="0">
               <a:buNone/>
             </a:pPr>
             <a:r>
@@ -11106,9 +11040,9 @@
                 <a:solidFill>
                   <a:srgbClr val="9FC9CE"/>
                 </a:solidFill>
-                <a:latin typeface="Calibri" pitchFamily="34" charset="0"/>
-                <a:ea typeface="Calibri" pitchFamily="34" charset="-122"/>
-                <a:cs typeface="Calibri" pitchFamily="34" charset="-120"/>
+                <a:latin typeface="Calibri" panose="020F0502020204030204" pitchFamily="34" charset="0"/>
+                <a:ea typeface="Calibri" panose="020F0502020204030204" pitchFamily="34" charset="-122"/>
+                <a:cs typeface="Calibri" panose="020F0502020204030204" pitchFamily="34" charset="-120"/>
               </a:rPr>
               <a:t>meltano.yml usa ${BANVIC_DW_PASSWORD}, nunca o valor</a:t>
             </a:r>
@@ -11131,13 +11065,12 @@
             <a:avLst/>
           </a:prstGeom>
           <a:noFill/>
-          <a:ln/>
-        </p:spPr>
-        <p:txBody>
-          <a:bodyPr wrap="square" lIns="0" tIns="0" rIns="0" bIns="0" rtlCol="0" anchor="ctr"/>
-          <a:lstStyle/>
-          <a:p>
-            <a:pPr algn="r" indent="0" marL="0">
+        </p:spPr>
+        <p:txBody>
+          <a:bodyPr wrap="square" lIns="0" tIns="0" rIns="0" bIns="0" rtlCol="0" anchor="ctr"/>
+          <a:lstStyle/>
+          <a:p>
+            <a:pPr marL="0" indent="0" algn="r">
               <a:buNone/>
             </a:pPr>
             <a:r>
@@ -11145,9 +11078,9 @@
                 <a:solidFill>
                   <a:srgbClr val="17414D"/>
                 </a:solidFill>
-                <a:latin typeface="Calibri" pitchFamily="34" charset="0"/>
-                <a:ea typeface="Calibri" pitchFamily="34" charset="-122"/>
-                <a:cs typeface="Calibri" pitchFamily="34" charset="-120"/>
+                <a:latin typeface="Calibri" panose="020F0502020204030204" pitchFamily="34" charset="0"/>
+                <a:ea typeface="Calibri" panose="020F0502020204030204" pitchFamily="34" charset="-122"/>
+                <a:cs typeface="Calibri" panose="020F0502020204030204" pitchFamily="34" charset="-120"/>
               </a:rPr>
               <a:t>9</a:t>
             </a:r>
@@ -11206,7 +11139,7 @@
     </a:clrScheme>
     <a:fontScheme name="Office">
       <a:majorFont>
-        <a:latin typeface="Calibri Light" panose="020F0302020204030204"/>
+        <a:latin typeface="Calibri Light"/>
         <a:ea typeface=""/>
         <a:cs typeface=""/>
         <a:font script="Jpan" typeface="游ゴシック Light"/>
@@ -11239,26 +11172,9 @@
         <a:font script="Viet" typeface="Times New Roman"/>
         <a:font script="Uigh" typeface="Microsoft Uighur"/>
         <a:font script="Geor" typeface="Sylfaen"/>
-        <a:font script="Armn" typeface="Arial"/>
-        <a:font script="Bugi" typeface="Leelawadee UI"/>
-        <a:font script="Bopo" typeface="Microsoft JhengHei"/>
-        <a:font script="Java" typeface="Javanese Text"/>
-        <a:font script="Lisu" typeface="Segoe UI"/>
-        <a:font script="Mymr" typeface="Myanmar Text"/>
-        <a:font script="Nkoo" typeface="Ebrima"/>
-        <a:font script="Olck" typeface="Nirmala UI"/>
-        <a:font script="Osma" typeface="Ebrima"/>
-        <a:font script="Phag" typeface="Phagspa"/>
-        <a:font script="Syrn" typeface="Estrangelo Edessa"/>
-        <a:font script="Syrj" typeface="Estrangelo Edessa"/>
-        <a:font script="Syre" typeface="Estrangelo Edessa"/>
-        <a:font script="Sora" typeface="Nirmala UI"/>
-        <a:font script="Tale" typeface="Microsoft Tai Le"/>
-        <a:font script="Talu" typeface="Microsoft New Tai Lue"/>
-        <a:font script="Tfng" typeface="Ebrima"/>
       </a:majorFont>
       <a:minorFont>
-        <a:latin typeface="Calibri" panose="020F0502020204030204"/>
+        <a:latin typeface="Calibri"/>
         <a:ea typeface=""/>
         <a:cs typeface=""/>
         <a:font script="Jpan" typeface="游ゴシック"/>
@@ -11291,23 +11207,6 @@
         <a:font script="Viet" typeface="Arial"/>
         <a:font script="Uigh" typeface="Microsoft Uighur"/>
         <a:font script="Geor" typeface="Sylfaen"/>
-        <a:font script="Armn" typeface="Arial"/>
-        <a:font script="Bugi" typeface="Leelawadee UI"/>
-        <a:font script="Bopo" typeface="Microsoft JhengHei"/>
-        <a:font script="Java" typeface="Javanese Text"/>
-        <a:font script="Lisu" typeface="Segoe UI"/>
-        <a:font script="Mymr" typeface="Myanmar Text"/>
-        <a:font script="Nkoo" typeface="Ebrima"/>
-        <a:font script="Olck" typeface="Nirmala UI"/>
-        <a:font script="Osma" typeface="Ebrima"/>
-        <a:font script="Phag" typeface="Phagspa"/>
-        <a:font script="Syrn" typeface="Estrangelo Edessa"/>
-        <a:font script="Syrj" typeface="Estrangelo Edessa"/>
-        <a:font script="Syre" typeface="Estrangelo Edessa"/>
-        <a:font script="Sora" typeface="Nirmala UI"/>
-        <a:font script="Tale" typeface="Microsoft Tai Le"/>
-        <a:font script="Talu" typeface="Microsoft New Tai Lue"/>
-        <a:font script="Tfng" typeface="Ebrima"/>
       </a:minorFont>
     </a:fontScheme>
     <a:fmtScheme name="Office">
@@ -11448,8 +11347,265 @@
       </a:bgFillStyleLst>
     </a:fmtScheme>
   </a:themeElements>
-  <a:objectDefaults/>
-  <a:extraClrSchemeLst/>
+  <a:extLst>
+    <a:ext uri="{05A4C25C-085E-4340-85A3-A5531E510DB2}">
+      <thm15:themeFamily xmlns:thm15="http://schemas.microsoft.com/office/thememl/2012/main" name="Office Theme" id="{62F939B6-93AF-4DB8-9C6B-D6C7DFDC589F}" vid="{4A3C46E8-61CC-4603-A589-7422A47A8E4A}"/>
+    </a:ext>
+  </a:extLst>
+</a:theme>
+</file>
+
+<file path=ppt/theme/theme2.xml><?xml version="1.0" encoding="utf-8"?>
+<a:theme xmlns:a="http://schemas.openxmlformats.org/drawingml/2006/main" name="Office Theme">
+  <a:themeElements>
+    <a:clrScheme name="Office">
+      <a:dk1>
+        <a:sysClr val="windowText" lastClr="000000"/>
+      </a:dk1>
+      <a:lt1>
+        <a:sysClr val="window" lastClr="FFFFFF"/>
+      </a:lt1>
+      <a:dk2>
+        <a:srgbClr val="44546A"/>
+      </a:dk2>
+      <a:lt2>
+        <a:srgbClr val="E7E6E6"/>
+      </a:lt2>
+      <a:accent1>
+        <a:srgbClr val="4472C4"/>
+      </a:accent1>
+      <a:accent2>
+        <a:srgbClr val="ED7D31"/>
+      </a:accent2>
+      <a:accent3>
+        <a:srgbClr val="A5A5A5"/>
+      </a:accent3>
+      <a:accent4>
+        <a:srgbClr val="FFC000"/>
+      </a:accent4>
+      <a:accent5>
+        <a:srgbClr val="5B9BD5"/>
+      </a:accent5>
+      <a:accent6>
+        <a:srgbClr val="70AD47"/>
+      </a:accent6>
+      <a:hlink>
+        <a:srgbClr val="0563C1"/>
+      </a:hlink>
+      <a:folHlink>
+        <a:srgbClr val="954F72"/>
+      </a:folHlink>
+    </a:clrScheme>
+    <a:fontScheme name="Office">
+      <a:majorFont>
+        <a:latin typeface="Calibri Light"/>
+        <a:ea typeface=""/>
+        <a:cs typeface=""/>
+        <a:font script="Jpan" typeface="游ゴシック Light"/>
+        <a:font script="Hang" typeface="맑은 고딕"/>
+        <a:font script="Hans" typeface="等线 Light"/>
+        <a:font script="Hant" typeface="新細明體"/>
+        <a:font script="Arab" typeface="Times New Roman"/>
+        <a:font script="Hebr" typeface="Times New Roman"/>
+        <a:font script="Thai" typeface="Angsana New"/>
+        <a:font script="Ethi" typeface="Nyala"/>
+        <a:font script="Beng" typeface="Vrinda"/>
+        <a:font script="Gujr" typeface="Shruti"/>
+        <a:font script="Khmr" typeface="MoolBoran"/>
+        <a:font script="Knda" typeface="Tunga"/>
+        <a:font script="Guru" typeface="Raavi"/>
+        <a:font script="Cans" typeface="Euphemia"/>
+        <a:font script="Cher" typeface="Plantagenet Cherokee"/>
+        <a:font script="Yiii" typeface="Microsoft Yi Baiti"/>
+        <a:font script="Tibt" typeface="Microsoft Himalaya"/>
+        <a:font script="Thaa" typeface="MV Boli"/>
+        <a:font script="Deva" typeface="Mangal"/>
+        <a:font script="Telu" typeface="Gautami"/>
+        <a:font script="Taml" typeface="Latha"/>
+        <a:font script="Syrc" typeface="Estrangelo Edessa"/>
+        <a:font script="Orya" typeface="Kalinga"/>
+        <a:font script="Mlym" typeface="Kartika"/>
+        <a:font script="Laoo" typeface="DokChampa"/>
+        <a:font script="Sinh" typeface="Iskoola Pota"/>
+        <a:font script="Mong" typeface="Mongolian Baiti"/>
+        <a:font script="Viet" typeface="Times New Roman"/>
+        <a:font script="Uigh" typeface="Microsoft Uighur"/>
+        <a:font script="Geor" typeface="Sylfaen"/>
+      </a:majorFont>
+      <a:minorFont>
+        <a:latin typeface="Calibri"/>
+        <a:ea typeface=""/>
+        <a:cs typeface=""/>
+        <a:font script="Jpan" typeface="游ゴシック"/>
+        <a:font script="Hang" typeface="맑은 고딕"/>
+        <a:font script="Hans" typeface="等线"/>
+        <a:font script="Hant" typeface="新細明體"/>
+        <a:font script="Arab" typeface="Arial"/>
+        <a:font script="Hebr" typeface="Arial"/>
+        <a:font script="Thai" typeface="Cordia New"/>
+        <a:font script="Ethi" typeface="Nyala"/>
+        <a:font script="Beng" typeface="Vrinda"/>
+        <a:font script="Gujr" typeface="Shruti"/>
+        <a:font script="Khmr" typeface="DaunPenh"/>
+        <a:font script="Knda" typeface="Tunga"/>
+        <a:font script="Guru" typeface="Raavi"/>
+        <a:font script="Cans" typeface="Euphemia"/>
+        <a:font script="Cher" typeface="Plantagenet Cherokee"/>
+        <a:font script="Yiii" typeface="Microsoft Yi Baiti"/>
+        <a:font script="Tibt" typeface="Microsoft Himalaya"/>
+        <a:font script="Thaa" typeface="MV Boli"/>
+        <a:font script="Deva" typeface="Mangal"/>
+        <a:font script="Telu" typeface="Gautami"/>
+        <a:font script="Taml" typeface="Latha"/>
+        <a:font script="Syrc" typeface="Estrangelo Edessa"/>
+        <a:font script="Orya" typeface="Kalinga"/>
+        <a:font script="Mlym" typeface="Kartika"/>
+        <a:font script="Laoo" typeface="DokChampa"/>
+        <a:font script="Sinh" typeface="Iskoola Pota"/>
+        <a:font script="Mong" typeface="Mongolian Baiti"/>
+        <a:font script="Viet" typeface="Arial"/>
+        <a:font script="Uigh" typeface="Microsoft Uighur"/>
+        <a:font script="Geor" typeface="Sylfaen"/>
+      </a:minorFont>
+    </a:fontScheme>
+    <a:fmtScheme name="Office">
+      <a:fillStyleLst>
+        <a:solidFill>
+          <a:schemeClr val="phClr"/>
+        </a:solidFill>
+        <a:gradFill rotWithShape="1">
+          <a:gsLst>
+            <a:gs pos="0">
+              <a:schemeClr val="phClr">
+                <a:lumMod val="110000"/>
+                <a:satMod val="105000"/>
+                <a:tint val="67000"/>
+              </a:schemeClr>
+            </a:gs>
+            <a:gs pos="50000">
+              <a:schemeClr val="phClr">
+                <a:lumMod val="105000"/>
+                <a:satMod val="103000"/>
+                <a:tint val="73000"/>
+              </a:schemeClr>
+            </a:gs>
+            <a:gs pos="100000">
+              <a:schemeClr val="phClr">
+                <a:lumMod val="105000"/>
+                <a:satMod val="109000"/>
+                <a:tint val="81000"/>
+              </a:schemeClr>
+            </a:gs>
+          </a:gsLst>
+          <a:lin ang="5400000" scaled="0"/>
+        </a:gradFill>
+        <a:gradFill rotWithShape="1">
+          <a:gsLst>
+            <a:gs pos="0">
+              <a:schemeClr val="phClr">
+                <a:satMod val="103000"/>
+                <a:lumMod val="102000"/>
+                <a:tint val="94000"/>
+              </a:schemeClr>
+            </a:gs>
+            <a:gs pos="50000">
+              <a:schemeClr val="phClr">
+                <a:satMod val="110000"/>
+                <a:lumMod val="100000"/>
+                <a:shade val="100000"/>
+              </a:schemeClr>
+            </a:gs>
+            <a:gs pos="100000">
+              <a:schemeClr val="phClr">
+                <a:lumMod val="99000"/>
+                <a:satMod val="120000"/>
+                <a:shade val="78000"/>
+              </a:schemeClr>
+            </a:gs>
+          </a:gsLst>
+          <a:lin ang="5400000" scaled="0"/>
+        </a:gradFill>
+      </a:fillStyleLst>
+      <a:lnStyleLst>
+        <a:ln w="6350" cap="flat" cmpd="sng" algn="ctr">
+          <a:solidFill>
+            <a:schemeClr val="phClr"/>
+          </a:solidFill>
+          <a:prstDash val="solid"/>
+          <a:miter lim="800000"/>
+        </a:ln>
+        <a:ln w="12700" cap="flat" cmpd="sng" algn="ctr">
+          <a:solidFill>
+            <a:schemeClr val="phClr"/>
+          </a:solidFill>
+          <a:prstDash val="solid"/>
+          <a:miter lim="800000"/>
+        </a:ln>
+        <a:ln w="19050" cap="flat" cmpd="sng" algn="ctr">
+          <a:solidFill>
+            <a:schemeClr val="phClr"/>
+          </a:solidFill>
+          <a:prstDash val="solid"/>
+          <a:miter lim="800000"/>
+        </a:ln>
+      </a:lnStyleLst>
+      <a:effectStyleLst>
+        <a:effectStyle>
+          <a:effectLst/>
+        </a:effectStyle>
+        <a:effectStyle>
+          <a:effectLst/>
+        </a:effectStyle>
+        <a:effectStyle>
+          <a:effectLst>
+            <a:outerShdw blurRad="57150" dist="19050" dir="5400000" algn="ctr" rotWithShape="0">
+              <a:srgbClr val="000000">
+                <a:alpha val="63000"/>
+              </a:srgbClr>
+            </a:outerShdw>
+          </a:effectLst>
+        </a:effectStyle>
+      </a:effectStyleLst>
+      <a:bgFillStyleLst>
+        <a:solidFill>
+          <a:schemeClr val="phClr"/>
+        </a:solidFill>
+        <a:solidFill>
+          <a:schemeClr val="phClr">
+            <a:tint val="95000"/>
+            <a:satMod val="170000"/>
+          </a:schemeClr>
+        </a:solidFill>
+        <a:gradFill rotWithShape="1">
+          <a:gsLst>
+            <a:gs pos="0">
+              <a:schemeClr val="phClr">
+                <a:tint val="93000"/>
+                <a:satMod val="150000"/>
+                <a:shade val="98000"/>
+                <a:lumMod val="102000"/>
+              </a:schemeClr>
+            </a:gs>
+            <a:gs pos="50000">
+              <a:schemeClr val="phClr">
+                <a:tint val="98000"/>
+                <a:satMod val="130000"/>
+                <a:shade val="90000"/>
+                <a:lumMod val="103000"/>
+              </a:schemeClr>
+            </a:gs>
+            <a:gs pos="100000">
+              <a:schemeClr val="phClr">
+                <a:shade val="63000"/>
+                <a:satMod val="120000"/>
+              </a:schemeClr>
+            </a:gs>
+          </a:gsLst>
+          <a:lin ang="5400000" scaled="0"/>
+        </a:gradFill>
+      </a:bgFillStyleLst>
+    </a:fmtScheme>
+  </a:themeElements>
   <a:extLst>
     <a:ext uri="{05A4C25C-085E-4340-85A3-A5531E510DB2}">
       <thm15:themeFamily xmlns:thm15="http://schemas.microsoft.com/office/thememl/2012/main" name="Office Theme" id="{62F939B6-93AF-4DB8-9C6B-D6C7DFDC589F}" vid="{4A3C46E8-61CC-4603-A589-7422A47A8E4A}"/>
